--- a/ideation/XNexus_CrisisOS_Presentation.pptx
+++ b/ideation/XNexus_CrisisOS_Presentation.pptx
@@ -17,6 +17,9 @@
     <p:sldId id="265" r:id="rId16"/>
     <p:sldId id="266" r:id="rId17"/>
     <p:sldId id="267" r:id="rId18"/>
+    <p:sldId id="268" r:id="rId19"/>
+    <p:sldId id="269" r:id="rId20"/>
+    <p:sldId id="270" r:id="rId21"/>
   </p:sldIdLst>
   <p:sldSz cx="12191695" cy="6858000" type="screen4x3"/>
   <p:notesSz cx="6858000" cy="9144000"/>
@@ -3150,14 +3153,14 @@
         </p:nvSpPr>
         <p:spPr>
           <a:xfrm>
-            <a:off x="1371600" y="1097280"/>
-            <a:ext cx="9448495" cy="4663440"/>
+            <a:off x="1097280" y="914400"/>
+            <a:ext cx="9997135" cy="5029200"/>
           </a:xfrm>
           <a:prstGeom prst="roundRect">
             <a:avLst/>
           </a:prstGeom>
           <a:solidFill>
-            <a:srgbClr val="0F1420"/>
+            <a:srgbClr val="0E121E"/>
           </a:solidFill>
           <a:ln>
             <a:solidFill>
@@ -3184,7 +3187,7 @@
           <a:lstStyle/>
           <a:p>
             <a:pPr algn="ctr">
-              <a:defRPr sz="1200" b="1">
+              <a:defRPr sz="1100" b="1">
                 <a:solidFill>
                   <a:srgbClr val="00F0FF"/>
                 </a:solidFill>
@@ -3224,7 +3227,7 @@
           <a:p>
             <a:br/>
             <a:pPr algn="ctr">
-              <a:defRPr sz="1400">
+              <a:defRPr sz="1350">
                 <a:solidFill>
                   <a:srgbClr val="E8EDF5"/>
                 </a:solidFill>
@@ -3321,7 +3324,7 @@
         <p:spPr>
           <a:xfrm>
             <a:off x="731520" y="365760"/>
-            <a:ext cx="10698480" cy="365760"/>
+            <a:ext cx="10698480" cy="320040"/>
           </a:xfrm>
           <a:prstGeom prst="rect">
             <a:avLst/>
@@ -3343,7 +3346,7 @@
               </a:defRPr>
             </a:pPr>
             <a:r>
-              <a:t>10 / SYSTEM FLOW</a:t>
+              <a:t>10 / CODE SPECS (ORCHESTRATOR)</a:t>
             </a:r>
           </a:p>
         </p:txBody>
@@ -3357,7 +3360,7 @@
         <p:spPr>
           <a:xfrm>
             <a:off x="731520" y="685800"/>
-            <a:ext cx="10698480" cy="731520"/>
+            <a:ext cx="10698480" cy="640080"/>
           </a:xfrm>
           <a:prstGeom prst="rect">
             <a:avLst/>
@@ -3371,7 +3374,7 @@
           <a:lstStyle/>
           <a:p>
             <a:pPr>
-              <a:defRPr sz="2600" b="1">
+              <a:defRPr sz="2500" b="1">
                 <a:solidFill>
                   <a:srgbClr val="FFFFFF"/>
                 </a:solidFill>
@@ -3379,7 +3382,7 @@
               </a:defRPr>
             </a:pPr>
             <a:r>
-              <a:t>Telemetry to Execution Pipeline</a:t>
+              <a:t>LangGraph Multi-Agent State Machine Code</a:t>
             </a:r>
           </a:p>
         </p:txBody>
@@ -3392,8 +3395,8 @@
         </p:nvSpPr>
         <p:spPr>
           <a:xfrm>
-            <a:off x="731520" y="1371600"/>
-            <a:ext cx="10698480" cy="457200"/>
+            <a:off x="731520" y="1325880"/>
+            <a:ext cx="10698480" cy="502920"/>
           </a:xfrm>
           <a:prstGeom prst="rect">
             <a:avLst/>
@@ -3407,7 +3410,7 @@
           <a:lstStyle/>
           <a:p>
             <a:pPr>
-              <a:defRPr sz="1300">
+              <a:defRPr sz="1200">
                 <a:solidFill>
                   <a:srgbClr val="6B7A99"/>
                 </a:solidFill>
@@ -3415,7 +3418,7 @@
               </a:defRPr>
             </a:pPr>
             <a:r>
-              <a:t>4-stage continuous disaster monitoring and dispatch lifecycle.</a:t>
+              <a:t>Production implementation of agent_orchestrator.py routing agent state transitions.</a:t>
             </a:r>
           </a:p>
         </p:txBody>
@@ -3428,18 +3431,18 @@
         </p:nvSpPr>
         <p:spPr>
           <a:xfrm>
-            <a:off x="731520" y="2286000"/>
-            <a:ext cx="2468880" cy="3474720"/>
+            <a:off x="731520" y="1920240"/>
+            <a:ext cx="10607040" cy="4389120"/>
           </a:xfrm>
           <a:prstGeom prst="roundRect">
             <a:avLst/>
           </a:prstGeom>
           <a:solidFill>
-            <a:srgbClr val="0F1420"/>
+            <a:srgbClr val="0E121E"/>
           </a:solidFill>
           <a:ln>
             <a:solidFill>
-              <a:srgbClr val="00F0FF"/>
+              <a:srgbClr val="7B61FF"/>
             </a:solidFill>
           </a:ln>
         </p:spPr>
@@ -3462,248 +3465,114 @@
           <a:lstStyle/>
           <a:p>
             <a:pPr algn="ctr">
-              <a:defRPr sz="1600" b="1">
-                <a:solidFill>
-                  <a:srgbClr val="00F0FF"/>
-                </a:solidFill>
-              </a:defRPr>
-            </a:pPr>
-            <a:r>
-              <a:t>01. INGEST</a:t>
-            </a:r>
-          </a:p>
-          <a:p>
-            <a:br/>
-            <a:pPr>
-              <a:defRPr sz="1100">
+              <a:defRPr sz="1300" b="1">
+                <a:solidFill>
+                  <a:srgbClr val="7B61FF"/>
+                </a:solidFill>
+              </a:defRPr>
+            </a:pPr>
+            <a:r>
+              <a:t>ideation/agent_orchestrator.py (LangGraph Core)</a:t>
+            </a:r>
+          </a:p>
+          <a:p>
+            <a:pPr>
+              <a:defRPr sz="1000">
                 <a:solidFill>
                   <a:srgbClr val="E8EDF5"/>
                 </a:solidFill>
-              </a:defRPr>
-            </a:pPr>
-            <a:r>
-              <a:t>Telemetry Streams</a:t>
-            </a:r>
-            <a:br/>
-            <a:br/>
-            <a:r>
-              <a:t>Scrapes IMD doppler radar &amp; CWC gauges every 15 min.</a:t>
-            </a:r>
-          </a:p>
-        </p:txBody>
-      </p:sp>
-      <p:sp>
-        <p:nvSpPr>
-          <p:cNvPr id="7" name="Rounded Rectangle 6"/>
-          <p:cNvSpPr/>
-          <p:nvPr/>
-        </p:nvSpPr>
-        <p:spPr>
-          <a:xfrm>
-            <a:off x="3429000" y="2286000"/>
-            <a:ext cx="2468880" cy="3474720"/>
-          </a:xfrm>
-          <a:prstGeom prst="roundRect">
-            <a:avLst/>
-          </a:prstGeom>
-          <a:solidFill>
-            <a:srgbClr val="0F1420"/>
-          </a:solidFill>
-          <a:ln>
-            <a:solidFill>
-              <a:srgbClr val="00F0FF"/>
-            </a:solidFill>
-          </a:ln>
-        </p:spPr>
-        <p:style>
-          <a:lnRef idx="1">
-            <a:schemeClr val="accent1"/>
-          </a:lnRef>
-          <a:fillRef idx="3">
-            <a:schemeClr val="accent1"/>
-          </a:fillRef>
-          <a:effectRef idx="2">
-            <a:schemeClr val="accent1"/>
-          </a:effectRef>
-          <a:fontRef idx="minor">
-            <a:schemeClr val="lt1"/>
-          </a:fontRef>
-        </p:style>
-        <p:txBody>
-          <a:bodyPr rtlCol="0" anchor="ctr" wrap="square"/>
-          <a:lstStyle/>
-          <a:p>
-            <a:pPr algn="ctr">
-              <a:defRPr sz="1600" b="1">
-                <a:solidFill>
-                  <a:srgbClr val="00F0FF"/>
-                </a:solidFill>
-              </a:defRPr>
-            </a:pPr>
-            <a:r>
-              <a:t>02. PROFILE</a:t>
-            </a:r>
-          </a:p>
-          <a:p>
-            <a:br/>
-            <a:pPr>
-              <a:defRPr sz="1100">
-                <a:solidFill>
-                  <a:srgbClr val="E8EDF5"/>
-                </a:solidFill>
-              </a:defRPr>
-            </a:pPr>
-            <a:r>
-              <a:t>Risk Assessment</a:t>
-            </a:r>
-            <a:br/>
-            <a:br/>
-            <a:r>
-              <a:t>Computes landslide susceptibility &amp; inundation zones.</a:t>
-            </a:r>
-          </a:p>
-        </p:txBody>
-      </p:sp>
-      <p:sp>
-        <p:nvSpPr>
-          <p:cNvPr id="8" name="Rounded Rectangle 7"/>
-          <p:cNvSpPr/>
-          <p:nvPr/>
-        </p:nvSpPr>
-        <p:spPr>
-          <a:xfrm>
-            <a:off x="6126480" y="2286000"/>
-            <a:ext cx="2468880" cy="3474720"/>
-          </a:xfrm>
-          <a:prstGeom prst="roundRect">
-            <a:avLst/>
-          </a:prstGeom>
-          <a:solidFill>
-            <a:srgbClr val="0F1420"/>
-          </a:solidFill>
-          <a:ln>
-            <a:solidFill>
-              <a:srgbClr val="00F0FF"/>
-            </a:solidFill>
-          </a:ln>
-        </p:spPr>
-        <p:style>
-          <a:lnRef idx="1">
-            <a:schemeClr val="accent1"/>
-          </a:lnRef>
-          <a:fillRef idx="3">
-            <a:schemeClr val="accent1"/>
-          </a:fillRef>
-          <a:effectRef idx="2">
-            <a:schemeClr val="accent1"/>
-          </a:effectRef>
-          <a:fontRef idx="minor">
-            <a:schemeClr val="lt1"/>
-          </a:fontRef>
-        </p:style>
-        <p:txBody>
-          <a:bodyPr rtlCol="0" anchor="ctr" wrap="square"/>
-          <a:lstStyle/>
-          <a:p>
-            <a:pPr algn="ctr">
-              <a:defRPr sz="1600" b="1">
-                <a:solidFill>
-                  <a:srgbClr val="00F0FF"/>
-                </a:solidFill>
-              </a:defRPr>
-            </a:pPr>
-            <a:r>
-              <a:t>03. SIMULATE</a:t>
-            </a:r>
-          </a:p>
-          <a:p>
-            <a:br/>
-            <a:pPr>
-              <a:defRPr sz="1100">
-                <a:solidFill>
-                  <a:srgbClr val="E8EDF5"/>
-                </a:solidFill>
-              </a:defRPr>
-            </a:pPr>
-            <a:r>
-              <a:t>Plan Generation</a:t>
-            </a:r>
-            <a:br/>
-            <a:br/>
-            <a:r>
-              <a:t>Calculates evacuation routes via MapmyIndia API.</a:t>
-            </a:r>
-          </a:p>
-        </p:txBody>
-      </p:sp>
-      <p:sp>
-        <p:nvSpPr>
-          <p:cNvPr id="9" name="Rounded Rectangle 8"/>
-          <p:cNvSpPr/>
-          <p:nvPr/>
-        </p:nvSpPr>
-        <p:spPr>
-          <a:xfrm>
-            <a:off x="8823960" y="2286000"/>
-            <a:ext cx="2468880" cy="3474720"/>
-          </a:xfrm>
-          <a:prstGeom prst="roundRect">
-            <a:avLst/>
-          </a:prstGeom>
-          <a:solidFill>
-            <a:srgbClr val="0F1420"/>
-          </a:solidFill>
-          <a:ln>
-            <a:solidFill>
-              <a:srgbClr val="FF4D6A"/>
-            </a:solidFill>
-          </a:ln>
-        </p:spPr>
-        <p:style>
-          <a:lnRef idx="1">
-            <a:schemeClr val="accent1"/>
-          </a:lnRef>
-          <a:fillRef idx="3">
-            <a:schemeClr val="accent1"/>
-          </a:fillRef>
-          <a:effectRef idx="2">
-            <a:schemeClr val="accent1"/>
-          </a:effectRef>
-          <a:fontRef idx="minor">
-            <a:schemeClr val="lt1"/>
-          </a:fontRef>
-        </p:style>
-        <p:txBody>
-          <a:bodyPr rtlCol="0" anchor="ctr" wrap="square"/>
-          <a:lstStyle/>
-          <a:p>
-            <a:pPr algn="ctr">
-              <a:defRPr sz="1600" b="1">
-                <a:solidFill>
-                  <a:srgbClr val="FF4D6A"/>
-                </a:solidFill>
-              </a:defRPr>
-            </a:pPr>
-            <a:r>
-              <a:t>04. EXECUTE</a:t>
-            </a:r>
-          </a:p>
-          <a:p>
-            <a:br/>
-            <a:pPr>
-              <a:defRPr sz="1100">
-                <a:solidFill>
-                  <a:srgbClr val="E8EDF5"/>
-                </a:solidFill>
-              </a:defRPr>
-            </a:pPr>
-            <a:r>
-              <a:t>Action Dispatch</a:t>
-            </a:r>
-            <a:br/>
-            <a:br/>
-            <a:r>
-              <a:t>Dispatches NDMA Sachet cell warnings &amp; 108 ICU beds.</a:t>
+                <a:latin typeface="Courier New"/>
+              </a:defRPr>
+            </a:pPr>
+            <a:r>
+              <a:t>class DisasterState(TypedDict):</a:t>
+            </a:r>
+            <a:br/>
+            <a:r>
+              <a:t>    incident_active: bool</a:t>
+            </a:r>
+            <a:br/>
+            <a:r>
+              <a:t>    rainfall_rate_mm_hr: float</a:t>
+            </a:r>
+            <a:br/>
+            <a:r>
+              <a:t>    landslide_risk_score: float</a:t>
+            </a:r>
+            <a:br/>
+            <a:r>
+              <a:t>    recommended_action: str</a:t>
+            </a:r>
+            <a:br/>
+            <a:r>
+              <a:t>    evacuation_routes: List[str]</a:t>
+            </a:r>
+            <a:br/>
+            <a:br/>
+            <a:r>
+              <a:t>def commander_agent(state: DisasterState):</a:t>
+            </a:r>
+            <a:br/>
+            <a:r>
+              <a:t>    if state["landslide_risk_score"] &gt; 0.75:</a:t>
+            </a:r>
+            <a:br/>
+            <a:r>
+              <a:t>        return {</a:t>
+            </a:r>
+            <a:br/>
+            <a:r>
+              <a:t>            "recommended_action": "EVACUATE Sector B-4 (Wayanad). Mobilize NDRF 4th Battalion.",</a:t>
+            </a:r>
+            <a:br/>
+            <a:r>
+              <a:t>            "evacuation_routes": ["Route 3 East Bypass Corridor"],</a:t>
+            </a:r>
+            <a:br/>
+            <a:r>
+              <a:t>            "incident_active": True</a:t>
+            </a:r>
+            <a:br/>
+            <a:r>
+              <a:t>        }</a:t>
+            </a:r>
+            <a:br/>
+            <a:br/>
+            <a:r>
+              <a:t>workflow = StateGraph(DisasterState)</a:t>
+            </a:r>
+            <a:br/>
+            <a:r>
+              <a:t>workflow.add_node("WeatherIntel", weather_agent)</a:t>
+            </a:r>
+            <a:br/>
+            <a:r>
+              <a:t>workflow.add_node("HydroGeoRisk", flood_landslide_agent)</a:t>
+            </a:r>
+            <a:br/>
+            <a:r>
+              <a:t>workflow.add_node("CommanderCore", commander_agent)</a:t>
+            </a:r>
+            <a:br/>
+            <a:br/>
+            <a:r>
+              <a:t>workflow.set_entry_point("WeatherIntel")</a:t>
+            </a:r>
+            <a:br/>
+            <a:r>
+              <a:t>workflow.add_edge("WeatherIntel", "HydroGeoRisk")</a:t>
+            </a:r>
+            <a:br/>
+            <a:r>
+              <a:t>workflow.add_edge("HydroGeoRisk", "CommanderCore")</a:t>
+            </a:r>
+            <a:br/>
+            <a:r>
+              <a:t>workflow.add_edge("CommanderCore", END)</a:t>
+            </a:r>
+            <a:br/>
+            <a:r>
+              <a:t>app = workflow.compile()</a:t>
             </a:r>
           </a:p>
         </p:txBody>
@@ -3778,7 +3647,7 @@
         <p:spPr>
           <a:xfrm>
             <a:off x="731520" y="365760"/>
-            <a:ext cx="10698480" cy="365760"/>
+            <a:ext cx="10698480" cy="320040"/>
           </a:xfrm>
           <a:prstGeom prst="rect">
             <a:avLst/>
@@ -3800,7 +3669,7 @@
               </a:defRPr>
             </a:pPr>
             <a:r>
-              <a:t>11 / PROJECTED IMPACT</a:t>
+              <a:t>11 / GIS &amp; CAP SPECS</a:t>
             </a:r>
           </a:p>
         </p:txBody>
@@ -3814,7 +3683,7 @@
         <p:spPr>
           <a:xfrm>
             <a:off x="731520" y="685800"/>
-            <a:ext cx="10698480" cy="731520"/>
+            <a:ext cx="10698480" cy="640080"/>
           </a:xfrm>
           <a:prstGeom prst="rect">
             <a:avLst/>
@@ -3828,7 +3697,7 @@
           <a:lstStyle/>
           <a:p>
             <a:pPr>
-              <a:defRPr sz="2600" b="1">
+              <a:defRPr sz="2500" b="1">
                 <a:solidFill>
                   <a:srgbClr val="FFFFFF"/>
                 </a:solidFill>
@@ -3836,7 +3705,7 @@
               </a:defRPr>
             </a:pPr>
             <a:r>
-              <a:t>Target Safety &amp; Performance Metrics</a:t>
+              <a:t>PostGIS Spatial Join &amp; NDMA CAP XML Payload</a:t>
             </a:r>
           </a:p>
         </p:txBody>
@@ -3849,8 +3718,8 @@
         </p:nvSpPr>
         <p:spPr>
           <a:xfrm>
-            <a:off x="731520" y="1371600"/>
-            <a:ext cx="10698480" cy="457200"/>
+            <a:off x="731520" y="1325880"/>
+            <a:ext cx="10698480" cy="502920"/>
           </a:xfrm>
           <a:prstGeom prst="rect">
             <a:avLst/>
@@ -3864,7 +3733,7 @@
           <a:lstStyle/>
           <a:p>
             <a:pPr>
-              <a:defRPr sz="1300">
+              <a:defRPr sz="1200">
                 <a:solidFill>
                   <a:srgbClr val="6B7A99"/>
                 </a:solidFill>
@@ -3872,7 +3741,7 @@
               </a:defRPr>
             </a:pPr>
             <a:r>
-              <a:t>Empirical performance targets for XNexus-CrisisOS deployment.</a:t>
+              <a:t>Database spatial intersection and OASIS CAP cell broadcast payload structures.</a:t>
             </a:r>
           </a:p>
         </p:txBody>
@@ -3885,18 +3754,18 @@
         </p:nvSpPr>
         <p:spPr>
           <a:xfrm>
-            <a:off x="731520" y="2011680"/>
-            <a:ext cx="3291840" cy="2011680"/>
+            <a:off x="731520" y="1920240"/>
+            <a:ext cx="5120640" cy="4389120"/>
           </a:xfrm>
           <a:prstGeom prst="roundRect">
             <a:avLst/>
           </a:prstGeom>
           <a:solidFill>
-            <a:srgbClr val="0F1420"/>
+            <a:srgbClr val="0E121E"/>
           </a:solidFill>
           <a:ln>
             <a:solidFill>
-              <a:srgbClr val="00F0FF"/>
+              <a:srgbClr val="FFC107"/>
             </a:solidFill>
           </a:ln>
         </p:spPr>
@@ -3919,30 +3788,63 @@
           <a:lstStyle/>
           <a:p>
             <a:pPr algn="ctr">
-              <a:defRPr sz="3200" b="1">
-                <a:solidFill>
-                  <a:srgbClr val="00F0FF"/>
-                </a:solidFill>
-              </a:defRPr>
-            </a:pPr>
-            <a:r>
-              <a:t>&lt; 5 min</a:t>
-            </a:r>
-          </a:p>
-          <a:p>
-            <a:pPr>
-              <a:defRPr sz="1100">
+              <a:defRPr sz="1200" b="1">
+                <a:solidFill>
+                  <a:srgbClr val="FFC107"/>
+                </a:solidFill>
+              </a:defRPr>
+            </a:pPr>
+            <a:r>
+              <a:t>1. PostGIS SPATIAL POPULATION INTERSECT</a:t>
+            </a:r>
+          </a:p>
+          <a:p>
+            <a:pPr>
+              <a:defRPr sz="950">
                 <a:solidFill>
                   <a:srgbClr val="E8EDF5"/>
                 </a:solidFill>
-              </a:defRPr>
-            </a:pPr>
-            <a:r>
-              <a:t>RESPONSE TIME</a:t>
-            </a:r>
-            <a:br/>
-            <a:r>
-              <a:t>From gauge trigger to cell broadcast.</a:t>
+                <a:latin typeface="Courier New"/>
+              </a:defRPr>
+            </a:pPr>
+            <a:r>
+              <a:t>SELECT </a:t>
+            </a:r>
+            <a:br/>
+            <a:r>
+              <a:t>    census.block_id,</a:t>
+            </a:r>
+            <a:br/>
+            <a:r>
+              <a:t>    census.district_name,</a:t>
+            </a:r>
+            <a:br/>
+            <a:r>
+              <a:t>    COUNT(census.household_id) AS households,</a:t>
+            </a:r>
+            <a:br/>
+            <a:r>
+              <a:t>    SUM(census.population) AS population</a:t>
+            </a:r>
+            <a:br/>
+            <a:r>
+              <a:t>FROM census_demographics_spatial AS census</a:t>
+            </a:r>
+            <a:br/>
+            <a:r>
+              <a:t>JOIN cwc_flood_inundation_layer AS flood</a:t>
+            </a:r>
+            <a:br/>
+            <a:r>
+              <a:t>  ON ST_Intersects(census.geom, flood.geom)</a:t>
+            </a:r>
+            <a:br/>
+            <a:r>
+              <a:t>WHERE flood.station_code = 'CWC-KBL-03'</a:t>
+            </a:r>
+            <a:br/>
+            <a:r>
+              <a:t>GROUP BY census.block_id, census.district_name;</a:t>
             </a:r>
           </a:p>
         </p:txBody>
@@ -3955,18 +3857,18 @@
         </p:nvSpPr>
         <p:spPr>
           <a:xfrm>
-            <a:off x="4389120" y="2011680"/>
-            <a:ext cx="3291840" cy="2011680"/>
+            <a:off x="6217920" y="1920240"/>
+            <a:ext cx="5120640" cy="4389120"/>
           </a:xfrm>
           <a:prstGeom prst="roundRect">
             <a:avLst/>
           </a:prstGeom>
           <a:solidFill>
-            <a:srgbClr val="0F1420"/>
+            <a:srgbClr val="0E121E"/>
           </a:solidFill>
           <a:ln>
             <a:solidFill>
-              <a:srgbClr val="7B61FF"/>
+              <a:srgbClr val="FF4D6A"/>
             </a:solidFill>
           </a:ln>
         </p:spPr>
@@ -3989,174 +3891,59 @@
           <a:lstStyle/>
           <a:p>
             <a:pPr algn="ctr">
-              <a:defRPr sz="3200" b="1">
-                <a:solidFill>
-                  <a:srgbClr val="7B61FF"/>
-                </a:solidFill>
-              </a:defRPr>
-            </a:pPr>
-            <a:r>
-              <a:t>840+</a:t>
-            </a:r>
-          </a:p>
-          <a:p>
-            <a:pPr>
-              <a:defRPr sz="1100">
+              <a:defRPr sz="1200" b="1">
+                <a:solidFill>
+                  <a:srgbClr val="FF4D6A"/>
+                </a:solidFill>
+              </a:defRPr>
+            </a:pPr>
+            <a:r>
+              <a:t>2. NDMA SACHET OASIS CAP v1.2 XML</a:t>
+            </a:r>
+          </a:p>
+          <a:p>
+            <a:pPr>
+              <a:defRPr sz="950">
                 <a:solidFill>
                   <a:srgbClr val="E8EDF5"/>
                 </a:solidFill>
-              </a:defRPr>
-            </a:pPr>
-            <a:r>
-              <a:t>HOUSEHOLDS COVERED</a:t>
-            </a:r>
-            <a:br/>
-            <a:r>
-              <a:t>Per targeted warning polygon.</a:t>
-            </a:r>
-          </a:p>
-        </p:txBody>
-      </p:sp>
-      <p:sp>
-        <p:nvSpPr>
-          <p:cNvPr id="8" name="Rounded Rectangle 7"/>
-          <p:cNvSpPr/>
-          <p:nvPr/>
-        </p:nvSpPr>
-        <p:spPr>
-          <a:xfrm>
-            <a:off x="8046720" y="2011680"/>
-            <a:ext cx="3291840" cy="2011680"/>
-          </a:xfrm>
-          <a:prstGeom prst="roundRect">
-            <a:avLst/>
-          </a:prstGeom>
-          <a:solidFill>
-            <a:srgbClr val="0F1420"/>
-          </a:solidFill>
-          <a:ln>
-            <a:solidFill>
-              <a:srgbClr val="00E676"/>
-            </a:solidFill>
-          </a:ln>
-        </p:spPr>
-        <p:style>
-          <a:lnRef idx="1">
-            <a:schemeClr val="accent1"/>
-          </a:lnRef>
-          <a:fillRef idx="3">
-            <a:schemeClr val="accent1"/>
-          </a:fillRef>
-          <a:effectRef idx="2">
-            <a:schemeClr val="accent1"/>
-          </a:effectRef>
-          <a:fontRef idx="minor">
-            <a:schemeClr val="lt1"/>
-          </a:fontRef>
-        </p:style>
-        <p:txBody>
-          <a:bodyPr rtlCol="0" anchor="ctr" wrap="square"/>
-          <a:lstStyle/>
-          <a:p>
-            <a:pPr algn="ctr">
-              <a:defRPr sz="3200" b="1">
-                <a:solidFill>
-                  <a:srgbClr val="00E676"/>
-                </a:solidFill>
-              </a:defRPr>
-            </a:pPr>
-            <a:r>
-              <a:t>9</a:t>
-            </a:r>
-          </a:p>
-          <a:p>
-            <a:pPr>
-              <a:defRPr sz="1100">
-                <a:solidFill>
-                  <a:srgbClr val="E8EDF5"/>
-                </a:solidFill>
-              </a:defRPr>
-            </a:pPr>
-            <a:r>
-              <a:t>AI AGENTS ACTIVE</a:t>
-            </a:r>
-            <a:br/>
-            <a:r>
-              <a:t>Collaborating in shared memory.</a:t>
-            </a:r>
-          </a:p>
-        </p:txBody>
-      </p:sp>
-      <p:sp>
-        <p:nvSpPr>
-          <p:cNvPr id="9" name="Rounded Rectangle 8"/>
-          <p:cNvSpPr/>
-          <p:nvPr/>
-        </p:nvSpPr>
-        <p:spPr>
-          <a:xfrm>
-            <a:off x="731520" y="4297680"/>
-            <a:ext cx="10607040" cy="1828800"/>
-          </a:xfrm>
-          <a:prstGeom prst="roundRect">
-            <a:avLst/>
-          </a:prstGeom>
-          <a:solidFill>
-            <a:srgbClr val="0F1420"/>
-          </a:solidFill>
-          <a:ln>
-            <a:solidFill>
-              <a:srgbClr val="00F0FF"/>
-            </a:solidFill>
-          </a:ln>
-        </p:spPr>
-        <p:style>
-          <a:lnRef idx="1">
-            <a:schemeClr val="accent1"/>
-          </a:lnRef>
-          <a:fillRef idx="3">
-            <a:schemeClr val="accent1"/>
-          </a:fillRef>
-          <a:effectRef idx="2">
-            <a:schemeClr val="accent1"/>
-          </a:effectRef>
-          <a:fontRef idx="minor">
-            <a:schemeClr val="lt1"/>
-          </a:fontRef>
-        </p:style>
-        <p:txBody>
-          <a:bodyPr rtlCol="0" anchor="ctr" wrap="square"/>
-          <a:lstStyle/>
-          <a:p>
-            <a:pPr algn="ctr">
-              <a:defRPr sz="1400" b="1">
-                <a:solidFill>
-                  <a:srgbClr val="00F0FF"/>
-                </a:solidFill>
-              </a:defRPr>
-            </a:pPr>
-            <a:r>
-              <a:t>OPERATIONAL PERFORMANCE TARGETS</a:t>
-            </a:r>
-          </a:p>
-          <a:p>
-            <a:pPr>
-              <a:defRPr sz="1100">
-                <a:solidFill>
-                  <a:srgbClr val="E8EDF5"/>
-                </a:solidFill>
-              </a:defRPr>
-            </a:pPr>
-            <a:r>
-              <a:t>• 90% Warning Speedup: Cuts traditional 100-minute manual delay down to under 5 minutes.</a:t>
-            </a:r>
-            <a:br/>
-            <a:r>
-              <a:t>• 75% Resource Efficiency: Eliminates duplicate NDRF dispatches &amp; optimizes ambulance routes.</a:t>
-            </a:r>
-            <a:br/>
-            <a:r>
-              <a:t>• 85% Evacuation Compliance: Localized multilingual cell broadcasts increase compliance rates.</a:t>
+                <a:latin typeface="Courier New"/>
+              </a:defRPr>
+            </a:pPr>
+            <a:r>
+              <a:t>&lt;alert xmlns="urn:oasis:names:tc:emergency:cap:1.2"&gt;</a:t>
+            </a:r>
+            <a:br/>
+            <a:r>
+              <a:t>  &lt;identifier&gt;NDMA-WAYANAD-20260722-001&lt;/identifier&gt;</a:t>
+            </a:r>
+            <a:br/>
+            <a:r>
+              <a:t>  &lt;info&gt;</a:t>
+            </a:r>
+            <a:br/>
+            <a:r>
+              <a:t>    &lt;language&gt;ml-IN&lt;/language&gt; &lt;!-- Malayalam --&gt;</a:t>
+            </a:r>
+            <a:br/>
+            <a:r>
+              <a:t>    &lt;headline&gt;വയനാട് മിന്നൽ പ്രളയ മുന്നറിയിപ്പ്&lt;/headline&gt;</a:t>
+            </a:r>
+            <a:br/>
+            <a:r>
+              <a:t>    &lt;description&gt;ഉയർന്ന പ്രദേശങ്ങളിലേക്ക് മാറുക.&lt;/description&gt;</a:t>
+            </a:r>
+            <a:br/>
+            <a:r>
+              <a:t>    &lt;area&gt;&lt;circle&gt;11.6854,76.1320 5000&lt;/circle&gt;&lt;/area&gt;</a:t>
+            </a:r>
+            <a:br/>
+            <a:r>
+              <a:t>  &lt;/info&gt;</a:t>
+            </a:r>
+            <a:br/>
+            <a:r>
+              <a:t>&lt;/alert&gt;</a:t>
             </a:r>
           </a:p>
         </p:txBody>
@@ -4231,7 +4018,7 @@
         <p:spPr>
           <a:xfrm>
             <a:off x="731520" y="365760"/>
-            <a:ext cx="10698480" cy="365760"/>
+            <a:ext cx="10698480" cy="320040"/>
           </a:xfrm>
           <a:prstGeom prst="rect">
             <a:avLst/>
@@ -4253,7 +4040,7 @@
               </a:defRPr>
             </a:pPr>
             <a:r>
-              <a:t>12 / DEVELOPMENT ROADMAP</a:t>
+              <a:t>12 / SYSTEM FLOW</a:t>
             </a:r>
           </a:p>
         </p:txBody>
@@ -4267,7 +4054,7 @@
         <p:spPr>
           <a:xfrm>
             <a:off x="731520" y="685800"/>
-            <a:ext cx="10698480" cy="731520"/>
+            <a:ext cx="10698480" cy="640080"/>
           </a:xfrm>
           <a:prstGeom prst="rect">
             <a:avLst/>
@@ -4281,7 +4068,7 @@
           <a:lstStyle/>
           <a:p>
             <a:pPr>
-              <a:defRPr sz="2600" b="1">
+              <a:defRPr sz="2500" b="1">
                 <a:solidFill>
                   <a:srgbClr val="FFFFFF"/>
                 </a:solidFill>
@@ -4289,7 +4076,7 @@
               </a:defRPr>
             </a:pPr>
             <a:r>
-              <a:t>Development Blueprint &amp; Expansion Phases</a:t>
+              <a:t>Telemetry to Execution Pipeline</a:t>
             </a:r>
           </a:p>
         </p:txBody>
@@ -4302,8 +4089,8 @@
         </p:nvSpPr>
         <p:spPr>
           <a:xfrm>
-            <a:off x="731520" y="1371600"/>
-            <a:ext cx="10698480" cy="457200"/>
+            <a:off x="731520" y="1325880"/>
+            <a:ext cx="10698480" cy="502920"/>
           </a:xfrm>
           <a:prstGeom prst="rect">
             <a:avLst/>
@@ -4317,7 +4104,7 @@
           <a:lstStyle/>
           <a:p>
             <a:pPr>
-              <a:defRPr sz="1300">
+              <a:defRPr sz="1200">
                 <a:solidFill>
                   <a:srgbClr val="6B7A99"/>
                 </a:solidFill>
@@ -4325,7 +4112,7 @@
               </a:defRPr>
             </a:pPr>
             <a:r>
-              <a:t>Scaling XNexus-CrisisOS across India's disaster management framework.</a:t>
+              <a:t>4-stage continuous disaster monitoring and dispatch lifecycle.</a:t>
             </a:r>
           </a:p>
         </p:txBody>
@@ -4338,14 +4125,14 @@
         </p:nvSpPr>
         <p:spPr>
           <a:xfrm>
-            <a:off x="731520" y="2011680"/>
-            <a:ext cx="3383280" cy="3291840"/>
+            <a:off x="731520" y="2286000"/>
+            <a:ext cx="2468880" cy="3474720"/>
           </a:xfrm>
           <a:prstGeom prst="roundRect">
             <a:avLst/>
           </a:prstGeom>
           <a:solidFill>
-            <a:srgbClr val="0F1420"/>
+            <a:srgbClr val="0E121E"/>
           </a:solidFill>
           <a:ln>
             <a:solidFill>
@@ -4372,14 +4159,14 @@
           <a:lstStyle/>
           <a:p>
             <a:pPr algn="ctr">
-              <a:defRPr sz="1100" b="1">
+              <a:defRPr sz="1600" b="1">
                 <a:solidFill>
                   <a:srgbClr val="00F0FF"/>
                 </a:solidFill>
               </a:defRPr>
             </a:pPr>
             <a:r>
-              <a:t>PHASE 1 — NOW (MVP)</a:t>
+              <a:t>01. INGEST</a:t>
             </a:r>
           </a:p>
           <a:p>
@@ -4392,12 +4179,12 @@
               </a:defRPr>
             </a:pPr>
             <a:r>
-              <a:t>Hackathon Prototype</a:t>
-            </a:r>
-            <a:br/>
-            <a:br/>
-            <a:r>
-              <a:t>Core 9-agent architecture, FastMCP servers, Wayanad flood scenario proof-of-concept.</a:t>
+              <a:t>Telemetry Streams</a:t>
+            </a:r>
+            <a:br/>
+            <a:br/>
+            <a:r>
+              <a:t>Scrapes IMD doppler radar &amp; CWC gauges every 15 min.</a:t>
             </a:r>
           </a:p>
         </p:txBody>
@@ -4410,14 +4197,399 @@
         </p:nvSpPr>
         <p:spPr>
           <a:xfrm>
-            <a:off x="4297680" y="2011680"/>
-            <a:ext cx="3383280" cy="3291840"/>
+            <a:off x="3429000" y="2286000"/>
+            <a:ext cx="2468880" cy="3474720"/>
           </a:xfrm>
           <a:prstGeom prst="roundRect">
             <a:avLst/>
           </a:prstGeom>
           <a:solidFill>
-            <a:srgbClr val="0F1420"/>
+            <a:srgbClr val="0E121E"/>
+          </a:solidFill>
+          <a:ln>
+            <a:solidFill>
+              <a:srgbClr val="00F0FF"/>
+            </a:solidFill>
+          </a:ln>
+        </p:spPr>
+        <p:style>
+          <a:lnRef idx="1">
+            <a:schemeClr val="accent1"/>
+          </a:lnRef>
+          <a:fillRef idx="3">
+            <a:schemeClr val="accent1"/>
+          </a:fillRef>
+          <a:effectRef idx="2">
+            <a:schemeClr val="accent1"/>
+          </a:effectRef>
+          <a:fontRef idx="minor">
+            <a:schemeClr val="lt1"/>
+          </a:fontRef>
+        </p:style>
+        <p:txBody>
+          <a:bodyPr rtlCol="0" anchor="ctr" wrap="square"/>
+          <a:lstStyle/>
+          <a:p>
+            <a:pPr algn="ctr">
+              <a:defRPr sz="1600" b="1">
+                <a:solidFill>
+                  <a:srgbClr val="00F0FF"/>
+                </a:solidFill>
+              </a:defRPr>
+            </a:pPr>
+            <a:r>
+              <a:t>02. PROFILE</a:t>
+            </a:r>
+          </a:p>
+          <a:p>
+            <a:br/>
+            <a:pPr>
+              <a:defRPr sz="1100">
+                <a:solidFill>
+                  <a:srgbClr val="E8EDF5"/>
+                </a:solidFill>
+              </a:defRPr>
+            </a:pPr>
+            <a:r>
+              <a:t>Risk Assessment</a:t>
+            </a:r>
+            <a:br/>
+            <a:br/>
+            <a:r>
+              <a:t>Computes landslide susceptibility &amp; inundation zones.</a:t>
+            </a:r>
+          </a:p>
+        </p:txBody>
+      </p:sp>
+      <p:sp>
+        <p:nvSpPr>
+          <p:cNvPr id="8" name="Rounded Rectangle 7"/>
+          <p:cNvSpPr/>
+          <p:nvPr/>
+        </p:nvSpPr>
+        <p:spPr>
+          <a:xfrm>
+            <a:off x="6126480" y="2286000"/>
+            <a:ext cx="2468880" cy="3474720"/>
+          </a:xfrm>
+          <a:prstGeom prst="roundRect">
+            <a:avLst/>
+          </a:prstGeom>
+          <a:solidFill>
+            <a:srgbClr val="0E121E"/>
+          </a:solidFill>
+          <a:ln>
+            <a:solidFill>
+              <a:srgbClr val="00F0FF"/>
+            </a:solidFill>
+          </a:ln>
+        </p:spPr>
+        <p:style>
+          <a:lnRef idx="1">
+            <a:schemeClr val="accent1"/>
+          </a:lnRef>
+          <a:fillRef idx="3">
+            <a:schemeClr val="accent1"/>
+          </a:fillRef>
+          <a:effectRef idx="2">
+            <a:schemeClr val="accent1"/>
+          </a:effectRef>
+          <a:fontRef idx="minor">
+            <a:schemeClr val="lt1"/>
+          </a:fontRef>
+        </p:style>
+        <p:txBody>
+          <a:bodyPr rtlCol="0" anchor="ctr" wrap="square"/>
+          <a:lstStyle/>
+          <a:p>
+            <a:pPr algn="ctr">
+              <a:defRPr sz="1600" b="1">
+                <a:solidFill>
+                  <a:srgbClr val="00F0FF"/>
+                </a:solidFill>
+              </a:defRPr>
+            </a:pPr>
+            <a:r>
+              <a:t>03. SIMULATE</a:t>
+            </a:r>
+          </a:p>
+          <a:p>
+            <a:br/>
+            <a:pPr>
+              <a:defRPr sz="1100">
+                <a:solidFill>
+                  <a:srgbClr val="E8EDF5"/>
+                </a:solidFill>
+              </a:defRPr>
+            </a:pPr>
+            <a:r>
+              <a:t>Plan Generation</a:t>
+            </a:r>
+            <a:br/>
+            <a:br/>
+            <a:r>
+              <a:t>Calculates evacuation routes via MapmyIndia API.</a:t>
+            </a:r>
+          </a:p>
+        </p:txBody>
+      </p:sp>
+      <p:sp>
+        <p:nvSpPr>
+          <p:cNvPr id="9" name="Rounded Rectangle 8"/>
+          <p:cNvSpPr/>
+          <p:nvPr/>
+        </p:nvSpPr>
+        <p:spPr>
+          <a:xfrm>
+            <a:off x="8823960" y="2286000"/>
+            <a:ext cx="2468880" cy="3474720"/>
+          </a:xfrm>
+          <a:prstGeom prst="roundRect">
+            <a:avLst/>
+          </a:prstGeom>
+          <a:solidFill>
+            <a:srgbClr val="0E121E"/>
+          </a:solidFill>
+          <a:ln>
+            <a:solidFill>
+              <a:srgbClr val="FF4D6A"/>
+            </a:solidFill>
+          </a:ln>
+        </p:spPr>
+        <p:style>
+          <a:lnRef idx="1">
+            <a:schemeClr val="accent1"/>
+          </a:lnRef>
+          <a:fillRef idx="3">
+            <a:schemeClr val="accent1"/>
+          </a:fillRef>
+          <a:effectRef idx="2">
+            <a:schemeClr val="accent1"/>
+          </a:effectRef>
+          <a:fontRef idx="minor">
+            <a:schemeClr val="lt1"/>
+          </a:fontRef>
+        </p:style>
+        <p:txBody>
+          <a:bodyPr rtlCol="0" anchor="ctr" wrap="square"/>
+          <a:lstStyle/>
+          <a:p>
+            <a:pPr algn="ctr">
+              <a:defRPr sz="1600" b="1">
+                <a:solidFill>
+                  <a:srgbClr val="FF4D6A"/>
+                </a:solidFill>
+              </a:defRPr>
+            </a:pPr>
+            <a:r>
+              <a:t>04. EXECUTE</a:t>
+            </a:r>
+          </a:p>
+          <a:p>
+            <a:br/>
+            <a:pPr>
+              <a:defRPr sz="1100">
+                <a:solidFill>
+                  <a:srgbClr val="E8EDF5"/>
+                </a:solidFill>
+              </a:defRPr>
+            </a:pPr>
+            <a:r>
+              <a:t>Action Dispatch</a:t>
+            </a:r>
+            <a:br/>
+            <a:br/>
+            <a:r>
+              <a:t>Dispatches NDMA Sachet cell warnings &amp; 108 ICU beds.</a:t>
+            </a:r>
+          </a:p>
+        </p:txBody>
+      </p:sp>
+    </p:spTree>
+  </p:cSld>
+  <p:clrMapOvr>
+    <a:masterClrMapping/>
+  </p:clrMapOvr>
+</p:sld>
+</file>
+
+<file path=ppt/slides/slide13.xml><?xml version="1.0" encoding="utf-8"?>
+<p:sld xmlns:a="http://schemas.openxmlformats.org/drawingml/2006/main" xmlns:p="http://schemas.openxmlformats.org/presentationml/2006/main" xmlns:r="http://schemas.openxmlformats.org/officeDocument/2006/relationships">
+  <p:cSld>
+    <p:spTree>
+      <p:nvGrpSpPr>
+        <p:cNvPr id="1" name=""/>
+        <p:cNvGrpSpPr/>
+        <p:nvPr/>
+      </p:nvGrpSpPr>
+      <p:grpSpPr/>
+      <p:sp>
+        <p:nvSpPr>
+          <p:cNvPr id="2" name="Rectangle 1"/>
+          <p:cNvSpPr/>
+          <p:nvPr/>
+        </p:nvSpPr>
+        <p:spPr>
+          <a:xfrm>
+            <a:off x="0" y="0"/>
+            <a:ext cx="12191695" cy="6858000"/>
+          </a:xfrm>
+          <a:prstGeom prst="rect">
+            <a:avLst/>
+          </a:prstGeom>
+          <a:solidFill>
+            <a:srgbClr val="030509"/>
+          </a:solidFill>
+          <a:ln>
+            <a:noFill/>
+          </a:ln>
+        </p:spPr>
+        <p:style>
+          <a:lnRef idx="1">
+            <a:schemeClr val="accent1"/>
+          </a:lnRef>
+          <a:fillRef idx="3">
+            <a:schemeClr val="accent1"/>
+          </a:fillRef>
+          <a:effectRef idx="2">
+            <a:schemeClr val="accent1"/>
+          </a:effectRef>
+          <a:fontRef idx="minor">
+            <a:schemeClr val="lt1"/>
+          </a:fontRef>
+        </p:style>
+        <p:txBody>
+          <a:bodyPr rtlCol="0" anchor="ctr"/>
+          <a:lstStyle/>
+          <a:p>
+            <a:pPr algn="ctr"/>
+          </a:p>
+        </p:txBody>
+      </p:sp>
+      <p:sp>
+        <p:nvSpPr>
+          <p:cNvPr id="3" name="TextBox 2"/>
+          <p:cNvSpPr txBox="1"/>
+          <p:nvPr/>
+        </p:nvSpPr>
+        <p:spPr>
+          <a:xfrm>
+            <a:off x="731520" y="365760"/>
+            <a:ext cx="10698480" cy="320040"/>
+          </a:xfrm>
+          <a:prstGeom prst="rect">
+            <a:avLst/>
+          </a:prstGeom>
+          <a:noFill/>
+        </p:spPr>
+        <p:txBody>
+          <a:bodyPr wrap="square">
+            <a:spAutoFit/>
+          </a:bodyPr>
+          <a:lstStyle/>
+          <a:p>
+            <a:pPr>
+              <a:defRPr sz="1000" b="1">
+                <a:solidFill>
+                  <a:srgbClr val="00F0FF"/>
+                </a:solidFill>
+                <a:latin typeface="Arial"/>
+              </a:defRPr>
+            </a:pPr>
+            <a:r>
+              <a:t>13 / THE 'WOW' USP</a:t>
+            </a:r>
+          </a:p>
+        </p:txBody>
+      </p:sp>
+      <p:sp>
+        <p:nvSpPr>
+          <p:cNvPr id="4" name="TextBox 3"/>
+          <p:cNvSpPr txBox="1"/>
+          <p:nvPr/>
+        </p:nvSpPr>
+        <p:spPr>
+          <a:xfrm>
+            <a:off x="731520" y="685800"/>
+            <a:ext cx="10698480" cy="640080"/>
+          </a:xfrm>
+          <a:prstGeom prst="rect">
+            <a:avLst/>
+          </a:prstGeom>
+          <a:noFill/>
+        </p:spPr>
+        <p:txBody>
+          <a:bodyPr wrap="square">
+            <a:spAutoFit/>
+          </a:bodyPr>
+          <a:lstStyle/>
+          <a:p>
+            <a:pPr>
+              <a:defRPr sz="2500" b="1">
+                <a:solidFill>
+                  <a:srgbClr val="FFFFFF"/>
+                </a:solidFill>
+                <a:latin typeface="Arial"/>
+              </a:defRPr>
+            </a:pPr>
+            <a:r>
+              <a:t>Beyond Alerting: Real-Data Autonomous Decisions</a:t>
+            </a:r>
+          </a:p>
+        </p:txBody>
+      </p:sp>
+      <p:sp>
+        <p:nvSpPr>
+          <p:cNvPr id="5" name="TextBox 4"/>
+          <p:cNvSpPr txBox="1"/>
+          <p:nvPr/>
+        </p:nvSpPr>
+        <p:spPr>
+          <a:xfrm>
+            <a:off x="731520" y="1325880"/>
+            <a:ext cx="10698480" cy="502920"/>
+          </a:xfrm>
+          <a:prstGeom prst="rect">
+            <a:avLst/>
+          </a:prstGeom>
+          <a:noFill/>
+        </p:spPr>
+        <p:txBody>
+          <a:bodyPr wrap="square">
+            <a:spAutoFit/>
+          </a:bodyPr>
+          <a:lstStyle/>
+          <a:p>
+            <a:pPr>
+              <a:defRPr sz="1200">
+                <a:solidFill>
+                  <a:srgbClr val="6B7A99"/>
+                </a:solidFill>
+                <a:latin typeface="Arial"/>
+              </a:defRPr>
+            </a:pPr>
+            <a:r>
+              <a:t>Why XNexus-CrisisOS stands out from legacy dashboard software.</a:t>
+            </a:r>
+          </a:p>
+        </p:txBody>
+      </p:sp>
+      <p:sp>
+        <p:nvSpPr>
+          <p:cNvPr id="6" name="Rounded Rectangle 5"/>
+          <p:cNvSpPr/>
+          <p:nvPr/>
+        </p:nvSpPr>
+        <p:spPr>
+          <a:xfrm>
+            <a:off x="731520" y="1920240"/>
+            <a:ext cx="3383280" cy="1920240"/>
+          </a:xfrm>
+          <a:prstGeom prst="roundRect">
+            <a:avLst/>
+          </a:prstGeom>
+          <a:solidFill>
+            <a:srgbClr val="0E121E"/>
           </a:solidFill>
           <a:ln>
             <a:solidFill>
@@ -4444,32 +4616,94 @@
           <a:lstStyle/>
           <a:p>
             <a:pPr algn="ctr">
-              <a:defRPr sz="1100" b="1">
-                <a:solidFill>
-                  <a:srgbClr val="7B61FF"/>
-                </a:solidFill>
-              </a:defRPr>
-            </a:pPr>
-            <a:r>
-              <a:t>PHASE 2 — Q3 2026</a:t>
-            </a:r>
-          </a:p>
-          <a:p>
-            <a:br/>
-            <a:pPr>
-              <a:defRPr sz="1100">
+              <a:defRPr sz="1250" b="1">
+                <a:solidFill>
+                  <a:srgbClr val="FFFFFF"/>
+                </a:solidFill>
+              </a:defRPr>
+            </a:pPr>
+            <a:r>
+              <a:t>01. Multi-Agency Data Fusion</a:t>
+            </a:r>
+          </a:p>
+          <a:p>
+            <a:br/>
+            <a:pPr>
+              <a:defRPr sz="1050">
                 <a:solidFill>
                   <a:srgbClr val="E8EDF5"/>
                 </a:solidFill>
               </a:defRPr>
             </a:pPr>
             <a:r>
-              <a:t>State-Level Pilots</a:t>
-            </a:r>
-            <a:br/>
-            <a:br/>
-            <a:r>
-              <a:t>Deploy across Kerala SDMA &amp; Uttarakhand SDMA. Live 108 health API &amp; NDMA Sachet connections.</a:t>
+              <a:t>Agents from IMD, CWC, NDRF, MapmyIndia, and 108-Health share a semantic memory space.</a:t>
+            </a:r>
+          </a:p>
+        </p:txBody>
+      </p:sp>
+      <p:sp>
+        <p:nvSpPr>
+          <p:cNvPr id="7" name="Rounded Rectangle 6"/>
+          <p:cNvSpPr/>
+          <p:nvPr/>
+        </p:nvSpPr>
+        <p:spPr>
+          <a:xfrm>
+            <a:off x="4297680" y="1920240"/>
+            <a:ext cx="3383280" cy="1920240"/>
+          </a:xfrm>
+          <a:prstGeom prst="roundRect">
+            <a:avLst/>
+          </a:prstGeom>
+          <a:solidFill>
+            <a:srgbClr val="0E121E"/>
+          </a:solidFill>
+          <a:ln>
+            <a:solidFill>
+              <a:srgbClr val="00F0FF"/>
+            </a:solidFill>
+          </a:ln>
+        </p:spPr>
+        <p:style>
+          <a:lnRef idx="1">
+            <a:schemeClr val="accent1"/>
+          </a:lnRef>
+          <a:fillRef idx="3">
+            <a:schemeClr val="accent1"/>
+          </a:fillRef>
+          <a:effectRef idx="2">
+            <a:schemeClr val="accent1"/>
+          </a:effectRef>
+          <a:fontRef idx="minor">
+            <a:schemeClr val="lt1"/>
+          </a:fontRef>
+        </p:style>
+        <p:txBody>
+          <a:bodyPr rtlCol="0" anchor="ctr" wrap="square"/>
+          <a:lstStyle/>
+          <a:p>
+            <a:pPr algn="ctr">
+              <a:defRPr sz="1250" b="1">
+                <a:solidFill>
+                  <a:srgbClr val="FFFFFF"/>
+                </a:solidFill>
+              </a:defRPr>
+            </a:pPr>
+            <a:r>
+              <a:t>02. CWC-to-Road Graph Intelligence</a:t>
+            </a:r>
+          </a:p>
+          <a:p>
+            <a:br/>
+            <a:pPr>
+              <a:defRPr sz="1050">
+                <a:solidFill>
+                  <a:srgbClr val="E8EDF5"/>
+                </a:solidFill>
+              </a:defRPr>
+            </a:pPr>
+            <a:r>
+              <a:t>Flood inundation shapes directly overlay NHAI road graphs, auto-computing detours.</a:t>
             </a:r>
           </a:p>
         </p:txBody>
@@ -4482,14 +4716,591 @@
         </p:nvSpPr>
         <p:spPr>
           <a:xfrm>
-            <a:off x="7863840" y="2011680"/>
-            <a:ext cx="3383280" cy="3291840"/>
+            <a:off x="7863840" y="1920240"/>
+            <a:ext cx="3383280" cy="1920240"/>
           </a:xfrm>
           <a:prstGeom prst="roundRect">
             <a:avLst/>
           </a:prstGeom>
           <a:solidFill>
-            <a:srgbClr val="0F1420"/>
+            <a:srgbClr val="0E121E"/>
+          </a:solidFill>
+          <a:ln>
+            <a:solidFill>
+              <a:srgbClr val="7B61FF"/>
+            </a:solidFill>
+          </a:ln>
+        </p:spPr>
+        <p:style>
+          <a:lnRef idx="1">
+            <a:schemeClr val="accent1"/>
+          </a:lnRef>
+          <a:fillRef idx="3">
+            <a:schemeClr val="accent1"/>
+          </a:fillRef>
+          <a:effectRef idx="2">
+            <a:schemeClr val="accent1"/>
+          </a:effectRef>
+          <a:fontRef idx="minor">
+            <a:schemeClr val="lt1"/>
+          </a:fontRef>
+        </p:style>
+        <p:txBody>
+          <a:bodyPr rtlCol="0" anchor="ctr" wrap="square"/>
+          <a:lstStyle/>
+          <a:p>
+            <a:pPr algn="ctr">
+              <a:defRPr sz="1250" b="1">
+                <a:solidFill>
+                  <a:srgbClr val="FFFFFF"/>
+                </a:solidFill>
+              </a:defRPr>
+            </a:pPr>
+            <a:r>
+              <a:t>03. Multilingual Cell Broadcast</a:t>
+            </a:r>
+          </a:p>
+          <a:p>
+            <a:br/>
+            <a:pPr>
+              <a:defRPr sz="1050">
+                <a:solidFill>
+                  <a:srgbClr val="E8EDF5"/>
+                </a:solidFill>
+              </a:defRPr>
+            </a:pPr>
+            <a:r>
+              <a:t>NDMA Sachet protocol pushes Hindi, English, and local alerts directly to cell towers.</a:t>
+            </a:r>
+          </a:p>
+        </p:txBody>
+      </p:sp>
+      <p:sp>
+        <p:nvSpPr>
+          <p:cNvPr id="9" name="Rounded Rectangle 8"/>
+          <p:cNvSpPr/>
+          <p:nvPr/>
+        </p:nvSpPr>
+        <p:spPr>
+          <a:xfrm>
+            <a:off x="731520" y="4114800"/>
+            <a:ext cx="3383280" cy="1920240"/>
+          </a:xfrm>
+          <a:prstGeom prst="roundRect">
+            <a:avLst/>
+          </a:prstGeom>
+          <a:solidFill>
+            <a:srgbClr val="0E121E"/>
+          </a:solidFill>
+          <a:ln>
+            <a:solidFill>
+              <a:srgbClr val="7B61FF"/>
+            </a:solidFill>
+          </a:ln>
+        </p:spPr>
+        <p:style>
+          <a:lnRef idx="1">
+            <a:schemeClr val="accent1"/>
+          </a:lnRef>
+          <a:fillRef idx="3">
+            <a:schemeClr val="accent1"/>
+          </a:fillRef>
+          <a:effectRef idx="2">
+            <a:schemeClr val="accent1"/>
+          </a:effectRef>
+          <a:fontRef idx="minor">
+            <a:schemeClr val="lt1"/>
+          </a:fontRef>
+        </p:style>
+        <p:txBody>
+          <a:bodyPr rtlCol="0" anchor="ctr" wrap="square"/>
+          <a:lstStyle/>
+          <a:p>
+            <a:pPr algn="ctr">
+              <a:defRPr sz="1250" b="1">
+                <a:solidFill>
+                  <a:srgbClr val="FFFFFF"/>
+                </a:solidFill>
+              </a:defRPr>
+            </a:pPr>
+            <a:r>
+              <a:t>04. Tested on Real Wayanad Data</a:t>
+            </a:r>
+          </a:p>
+          <a:p>
+            <a:br/>
+            <a:pPr>
+              <a:defRPr sz="1050">
+                <a:solidFill>
+                  <a:srgbClr val="E8EDF5"/>
+                </a:solidFill>
+              </a:defRPr>
+            </a:pPr>
+            <a:r>
+              <a:t>Modeled against Kabini reservoir discharge records and 2024 Wayanad flood maps.</a:t>
+            </a:r>
+          </a:p>
+        </p:txBody>
+      </p:sp>
+      <p:sp>
+        <p:nvSpPr>
+          <p:cNvPr id="10" name="Rounded Rectangle 9"/>
+          <p:cNvSpPr/>
+          <p:nvPr/>
+        </p:nvSpPr>
+        <p:spPr>
+          <a:xfrm>
+            <a:off x="4297680" y="4114800"/>
+            <a:ext cx="3383280" cy="1920240"/>
+          </a:xfrm>
+          <a:prstGeom prst="roundRect">
+            <a:avLst/>
+          </a:prstGeom>
+          <a:solidFill>
+            <a:srgbClr val="0E121E"/>
+          </a:solidFill>
+          <a:ln>
+            <a:solidFill>
+              <a:srgbClr val="7B61FF"/>
+            </a:solidFill>
+          </a:ln>
+        </p:spPr>
+        <p:style>
+          <a:lnRef idx="1">
+            <a:schemeClr val="accent1"/>
+          </a:lnRef>
+          <a:fillRef idx="3">
+            <a:schemeClr val="accent1"/>
+          </a:fillRef>
+          <a:effectRef idx="2">
+            <a:schemeClr val="accent1"/>
+          </a:effectRef>
+          <a:fontRef idx="minor">
+            <a:schemeClr val="lt1"/>
+          </a:fontRef>
+        </p:style>
+        <p:txBody>
+          <a:bodyPr rtlCol="0" anchor="ctr" wrap="square"/>
+          <a:lstStyle/>
+          <a:p>
+            <a:pPr algn="ctr">
+              <a:defRPr sz="1250" b="1">
+                <a:solidFill>
+                  <a:srgbClr val="FFFFFF"/>
+                </a:solidFill>
+              </a:defRPr>
+            </a:pPr>
+            <a:r>
+              <a:t>05. 100% India-Native Infrastructure</a:t>
+            </a:r>
+          </a:p>
+          <a:p>
+            <a:br/>
+            <a:pPr>
+              <a:defRPr sz="1050">
+                <a:solidFill>
+                  <a:srgbClr val="E8EDF5"/>
+                </a:solidFill>
+              </a:defRPr>
+            </a:pPr>
+            <a:r>
+              <a:t>Zero dependency on foreign mapping or cloud tools. Built on Indian APIs.</a:t>
+            </a:r>
+          </a:p>
+        </p:txBody>
+      </p:sp>
+      <p:sp>
+        <p:nvSpPr>
+          <p:cNvPr id="11" name="Rounded Rectangle 10"/>
+          <p:cNvSpPr/>
+          <p:nvPr/>
+        </p:nvSpPr>
+        <p:spPr>
+          <a:xfrm>
+            <a:off x="7863840" y="4114800"/>
+            <a:ext cx="3383280" cy="1920240"/>
+          </a:xfrm>
+          <a:prstGeom prst="roundRect">
+            <a:avLst/>
+          </a:prstGeom>
+          <a:solidFill>
+            <a:srgbClr val="0E121E"/>
+          </a:solidFill>
+          <a:ln>
+            <a:solidFill>
+              <a:srgbClr val="7B61FF"/>
+            </a:solidFill>
+          </a:ln>
+        </p:spPr>
+        <p:style>
+          <a:lnRef idx="1">
+            <a:schemeClr val="accent1"/>
+          </a:lnRef>
+          <a:fillRef idx="3">
+            <a:schemeClr val="accent1"/>
+          </a:fillRef>
+          <a:effectRef idx="2">
+            <a:schemeClr val="accent1"/>
+          </a:effectRef>
+          <a:fontRef idx="minor">
+            <a:schemeClr val="lt1"/>
+          </a:fontRef>
+        </p:style>
+        <p:txBody>
+          <a:bodyPr rtlCol="0" anchor="ctr" wrap="square"/>
+          <a:lstStyle/>
+          <a:p>
+            <a:pPr algn="ctr">
+              <a:defRPr sz="1250" b="1">
+                <a:solidFill>
+                  <a:srgbClr val="FFFFFF"/>
+                </a:solidFill>
+              </a:defRPr>
+            </a:pPr>
+            <a:r>
+              <a:t>06. Zero-Latency Hospital Triage</a:t>
+            </a:r>
+          </a:p>
+          <a:p>
+            <a:br/>
+            <a:pPr>
+              <a:defRPr sz="1050">
+                <a:solidFill>
+                  <a:srgbClr val="E8EDF5"/>
+                </a:solidFill>
+              </a:defRPr>
+            </a:pPr>
+            <a:r>
+              <a:t>Queries 108 health API to route casualties only to hospitals with verified ICU beds.</a:t>
+            </a:r>
+          </a:p>
+        </p:txBody>
+      </p:sp>
+    </p:spTree>
+  </p:cSld>
+  <p:clrMapOvr>
+    <a:masterClrMapping/>
+  </p:clrMapOvr>
+</p:sld>
+</file>
+
+<file path=ppt/slides/slide14.xml><?xml version="1.0" encoding="utf-8"?>
+<p:sld xmlns:a="http://schemas.openxmlformats.org/drawingml/2006/main" xmlns:p="http://schemas.openxmlformats.org/presentationml/2006/main" xmlns:r="http://schemas.openxmlformats.org/officeDocument/2006/relationships">
+  <p:cSld>
+    <p:spTree>
+      <p:nvGrpSpPr>
+        <p:cNvPr id="1" name=""/>
+        <p:cNvGrpSpPr/>
+        <p:nvPr/>
+      </p:nvGrpSpPr>
+      <p:grpSpPr/>
+      <p:sp>
+        <p:nvSpPr>
+          <p:cNvPr id="2" name="Rectangle 1"/>
+          <p:cNvSpPr/>
+          <p:nvPr/>
+        </p:nvSpPr>
+        <p:spPr>
+          <a:xfrm>
+            <a:off x="0" y="0"/>
+            <a:ext cx="12191695" cy="6858000"/>
+          </a:xfrm>
+          <a:prstGeom prst="rect">
+            <a:avLst/>
+          </a:prstGeom>
+          <a:solidFill>
+            <a:srgbClr val="030509"/>
+          </a:solidFill>
+          <a:ln>
+            <a:noFill/>
+          </a:ln>
+        </p:spPr>
+        <p:style>
+          <a:lnRef idx="1">
+            <a:schemeClr val="accent1"/>
+          </a:lnRef>
+          <a:fillRef idx="3">
+            <a:schemeClr val="accent1"/>
+          </a:fillRef>
+          <a:effectRef idx="2">
+            <a:schemeClr val="accent1"/>
+          </a:effectRef>
+          <a:fontRef idx="minor">
+            <a:schemeClr val="lt1"/>
+          </a:fontRef>
+        </p:style>
+        <p:txBody>
+          <a:bodyPr rtlCol="0" anchor="ctr"/>
+          <a:lstStyle/>
+          <a:p>
+            <a:pPr algn="ctr"/>
+          </a:p>
+        </p:txBody>
+      </p:sp>
+      <p:sp>
+        <p:nvSpPr>
+          <p:cNvPr id="3" name="TextBox 2"/>
+          <p:cNvSpPr txBox="1"/>
+          <p:nvPr/>
+        </p:nvSpPr>
+        <p:spPr>
+          <a:xfrm>
+            <a:off x="731520" y="365760"/>
+            <a:ext cx="10698480" cy="320040"/>
+          </a:xfrm>
+          <a:prstGeom prst="rect">
+            <a:avLst/>
+          </a:prstGeom>
+          <a:noFill/>
+        </p:spPr>
+        <p:txBody>
+          <a:bodyPr wrap="square">
+            <a:spAutoFit/>
+          </a:bodyPr>
+          <a:lstStyle/>
+          <a:p>
+            <a:pPr>
+              <a:defRPr sz="1000" b="1">
+                <a:solidFill>
+                  <a:srgbClr val="00F0FF"/>
+                </a:solidFill>
+                <a:latin typeface="Arial"/>
+              </a:defRPr>
+            </a:pPr>
+            <a:r>
+              <a:t>14 / PROJECTED IMPACT</a:t>
+            </a:r>
+          </a:p>
+        </p:txBody>
+      </p:sp>
+      <p:sp>
+        <p:nvSpPr>
+          <p:cNvPr id="4" name="TextBox 3"/>
+          <p:cNvSpPr txBox="1"/>
+          <p:nvPr/>
+        </p:nvSpPr>
+        <p:spPr>
+          <a:xfrm>
+            <a:off x="731520" y="685800"/>
+            <a:ext cx="10698480" cy="640080"/>
+          </a:xfrm>
+          <a:prstGeom prst="rect">
+            <a:avLst/>
+          </a:prstGeom>
+          <a:noFill/>
+        </p:spPr>
+        <p:txBody>
+          <a:bodyPr wrap="square">
+            <a:spAutoFit/>
+          </a:bodyPr>
+          <a:lstStyle/>
+          <a:p>
+            <a:pPr>
+              <a:defRPr sz="2500" b="1">
+                <a:solidFill>
+                  <a:srgbClr val="FFFFFF"/>
+                </a:solidFill>
+                <a:latin typeface="Arial"/>
+              </a:defRPr>
+            </a:pPr>
+            <a:r>
+              <a:t>Target Safety &amp; Performance Metrics</a:t>
+            </a:r>
+          </a:p>
+        </p:txBody>
+      </p:sp>
+      <p:sp>
+        <p:nvSpPr>
+          <p:cNvPr id="5" name="TextBox 4"/>
+          <p:cNvSpPr txBox="1"/>
+          <p:nvPr/>
+        </p:nvSpPr>
+        <p:spPr>
+          <a:xfrm>
+            <a:off x="731520" y="1325880"/>
+            <a:ext cx="10698480" cy="502920"/>
+          </a:xfrm>
+          <a:prstGeom prst="rect">
+            <a:avLst/>
+          </a:prstGeom>
+          <a:noFill/>
+        </p:spPr>
+        <p:txBody>
+          <a:bodyPr wrap="square">
+            <a:spAutoFit/>
+          </a:bodyPr>
+          <a:lstStyle/>
+          <a:p>
+            <a:pPr>
+              <a:defRPr sz="1200">
+                <a:solidFill>
+                  <a:srgbClr val="6B7A99"/>
+                </a:solidFill>
+                <a:latin typeface="Arial"/>
+              </a:defRPr>
+            </a:pPr>
+            <a:r>
+              <a:t>Empirical performance targets for XNexus-CrisisOS deployment.</a:t>
+            </a:r>
+          </a:p>
+        </p:txBody>
+      </p:sp>
+      <p:sp>
+        <p:nvSpPr>
+          <p:cNvPr id="6" name="Rounded Rectangle 5"/>
+          <p:cNvSpPr/>
+          <p:nvPr/>
+        </p:nvSpPr>
+        <p:spPr>
+          <a:xfrm>
+            <a:off x="731520" y="1920240"/>
+            <a:ext cx="3291840" cy="1920240"/>
+          </a:xfrm>
+          <a:prstGeom prst="roundRect">
+            <a:avLst/>
+          </a:prstGeom>
+          <a:solidFill>
+            <a:srgbClr val="0E121E"/>
+          </a:solidFill>
+          <a:ln>
+            <a:solidFill>
+              <a:srgbClr val="00F0FF"/>
+            </a:solidFill>
+          </a:ln>
+        </p:spPr>
+        <p:style>
+          <a:lnRef idx="1">
+            <a:schemeClr val="accent1"/>
+          </a:lnRef>
+          <a:fillRef idx="3">
+            <a:schemeClr val="accent1"/>
+          </a:fillRef>
+          <a:effectRef idx="2">
+            <a:schemeClr val="accent1"/>
+          </a:effectRef>
+          <a:fontRef idx="minor">
+            <a:schemeClr val="lt1"/>
+          </a:fontRef>
+        </p:style>
+        <p:txBody>
+          <a:bodyPr rtlCol="0" anchor="ctr" wrap="square"/>
+          <a:lstStyle/>
+          <a:p>
+            <a:pPr algn="ctr">
+              <a:defRPr sz="3200" b="1">
+                <a:solidFill>
+                  <a:srgbClr val="00F0FF"/>
+                </a:solidFill>
+              </a:defRPr>
+            </a:pPr>
+            <a:r>
+              <a:t>&lt; 5 min</a:t>
+            </a:r>
+          </a:p>
+          <a:p>
+            <a:pPr>
+              <a:defRPr sz="1100">
+                <a:solidFill>
+                  <a:srgbClr val="E8EDF5"/>
+                </a:solidFill>
+              </a:defRPr>
+            </a:pPr>
+            <a:r>
+              <a:t>RESPONSE TIME</a:t>
+            </a:r>
+            <a:br/>
+            <a:r>
+              <a:t>From gauge trigger to cell broadcast.</a:t>
+            </a:r>
+          </a:p>
+        </p:txBody>
+      </p:sp>
+      <p:sp>
+        <p:nvSpPr>
+          <p:cNvPr id="7" name="Rounded Rectangle 6"/>
+          <p:cNvSpPr/>
+          <p:nvPr/>
+        </p:nvSpPr>
+        <p:spPr>
+          <a:xfrm>
+            <a:off x="4389120" y="1920240"/>
+            <a:ext cx="3291840" cy="1920240"/>
+          </a:xfrm>
+          <a:prstGeom prst="roundRect">
+            <a:avLst/>
+          </a:prstGeom>
+          <a:solidFill>
+            <a:srgbClr val="0E121E"/>
+          </a:solidFill>
+          <a:ln>
+            <a:solidFill>
+              <a:srgbClr val="7B61FF"/>
+            </a:solidFill>
+          </a:ln>
+        </p:spPr>
+        <p:style>
+          <a:lnRef idx="1">
+            <a:schemeClr val="accent1"/>
+          </a:lnRef>
+          <a:fillRef idx="3">
+            <a:schemeClr val="accent1"/>
+          </a:fillRef>
+          <a:effectRef idx="2">
+            <a:schemeClr val="accent1"/>
+          </a:effectRef>
+          <a:fontRef idx="minor">
+            <a:schemeClr val="lt1"/>
+          </a:fontRef>
+        </p:style>
+        <p:txBody>
+          <a:bodyPr rtlCol="0" anchor="ctr" wrap="square"/>
+          <a:lstStyle/>
+          <a:p>
+            <a:pPr algn="ctr">
+              <a:defRPr sz="3200" b="1">
+                <a:solidFill>
+                  <a:srgbClr val="7B61FF"/>
+                </a:solidFill>
+              </a:defRPr>
+            </a:pPr>
+            <a:r>
+              <a:t>840+</a:t>
+            </a:r>
+          </a:p>
+          <a:p>
+            <a:pPr>
+              <a:defRPr sz="1100">
+                <a:solidFill>
+                  <a:srgbClr val="E8EDF5"/>
+                </a:solidFill>
+              </a:defRPr>
+            </a:pPr>
+            <a:r>
+              <a:t>HOUSEHOLDS COVERED</a:t>
+            </a:r>
+            <a:br/>
+            <a:r>
+              <a:t>Per targeted warning polygon.</a:t>
+            </a:r>
+          </a:p>
+        </p:txBody>
+      </p:sp>
+      <p:sp>
+        <p:nvSpPr>
+          <p:cNvPr id="8" name="Rounded Rectangle 7"/>
+          <p:cNvSpPr/>
+          <p:nvPr/>
+        </p:nvSpPr>
+        <p:spPr>
+          <a:xfrm>
+            <a:off x="8046720" y="1920240"/>
+            <a:ext cx="3291840" cy="1920240"/>
+          </a:xfrm>
+          <a:prstGeom prst="roundRect">
+            <a:avLst/>
+          </a:prstGeom>
+          <a:solidFill>
+            <a:srgbClr val="0E121E"/>
           </a:solidFill>
           <a:ln>
             <a:solidFill>
@@ -4516,8 +5327,465 @@
           <a:lstStyle/>
           <a:p>
             <a:pPr algn="ctr">
+              <a:defRPr sz="3200" b="1">
+                <a:solidFill>
+                  <a:srgbClr val="00E676"/>
+                </a:solidFill>
+              </a:defRPr>
+            </a:pPr>
+            <a:r>
+              <a:t>9</a:t>
+            </a:r>
+          </a:p>
+          <a:p>
+            <a:pPr>
+              <a:defRPr sz="1100">
+                <a:solidFill>
+                  <a:srgbClr val="E8EDF5"/>
+                </a:solidFill>
+              </a:defRPr>
+            </a:pPr>
+            <a:r>
+              <a:t>AI AGENTS ACTIVE</a:t>
+            </a:r>
+            <a:br/>
+            <a:r>
+              <a:t>Collaborating in shared memory.</a:t>
+            </a:r>
+          </a:p>
+        </p:txBody>
+      </p:sp>
+      <p:sp>
+        <p:nvSpPr>
+          <p:cNvPr id="9" name="Rounded Rectangle 8"/>
+          <p:cNvSpPr/>
+          <p:nvPr/>
+        </p:nvSpPr>
+        <p:spPr>
+          <a:xfrm>
+            <a:off x="731520" y="4114800"/>
+            <a:ext cx="10607040" cy="2194560"/>
+          </a:xfrm>
+          <a:prstGeom prst="roundRect">
+            <a:avLst/>
+          </a:prstGeom>
+          <a:solidFill>
+            <a:srgbClr val="0E121E"/>
+          </a:solidFill>
+          <a:ln>
+            <a:solidFill>
+              <a:srgbClr val="00F0FF"/>
+            </a:solidFill>
+          </a:ln>
+        </p:spPr>
+        <p:style>
+          <a:lnRef idx="1">
+            <a:schemeClr val="accent1"/>
+          </a:lnRef>
+          <a:fillRef idx="3">
+            <a:schemeClr val="accent1"/>
+          </a:fillRef>
+          <a:effectRef idx="2">
+            <a:schemeClr val="accent1"/>
+          </a:effectRef>
+          <a:fontRef idx="minor">
+            <a:schemeClr val="lt1"/>
+          </a:fontRef>
+        </p:style>
+        <p:txBody>
+          <a:bodyPr rtlCol="0" anchor="ctr" wrap="square"/>
+          <a:lstStyle/>
+          <a:p>
+            <a:pPr algn="ctr">
+              <a:defRPr sz="1300" b="1">
+                <a:solidFill>
+                  <a:srgbClr val="00F0FF"/>
+                </a:solidFill>
+              </a:defRPr>
+            </a:pPr>
+            <a:r>
+              <a:t>OPERATIONAL PERFORMANCE TARGETS</a:t>
+            </a:r>
+          </a:p>
+          <a:p>
+            <a:pPr>
+              <a:defRPr sz="1100">
+                <a:solidFill>
+                  <a:srgbClr val="E8EDF5"/>
+                </a:solidFill>
+              </a:defRPr>
+            </a:pPr>
+            <a:r>
+              <a:t>• 90% Warning Speedup: Cuts traditional 100-minute manual delay down to under 5 minutes.</a:t>
+            </a:r>
+            <a:br/>
+            <a:r>
+              <a:t>• 75% Resource Efficiency: Eliminates duplicate NDRF dispatches &amp; optimizes ambulance routes.</a:t>
+            </a:r>
+            <a:br/>
+            <a:r>
+              <a:t>• 85% Evacuation Compliance: Localized multilingual cell broadcasts increase compliance rates.</a:t>
+            </a:r>
+          </a:p>
+        </p:txBody>
+      </p:sp>
+    </p:spTree>
+  </p:cSld>
+  <p:clrMapOvr>
+    <a:masterClrMapping/>
+  </p:clrMapOvr>
+</p:sld>
+</file>
+
+<file path=ppt/slides/slide15.xml><?xml version="1.0" encoding="utf-8"?>
+<p:sld xmlns:a="http://schemas.openxmlformats.org/drawingml/2006/main" xmlns:p="http://schemas.openxmlformats.org/presentationml/2006/main" xmlns:r="http://schemas.openxmlformats.org/officeDocument/2006/relationships">
+  <p:cSld>
+    <p:spTree>
+      <p:nvGrpSpPr>
+        <p:cNvPr id="1" name=""/>
+        <p:cNvGrpSpPr/>
+        <p:nvPr/>
+      </p:nvGrpSpPr>
+      <p:grpSpPr/>
+      <p:sp>
+        <p:nvSpPr>
+          <p:cNvPr id="2" name="Rectangle 1"/>
+          <p:cNvSpPr/>
+          <p:nvPr/>
+        </p:nvSpPr>
+        <p:spPr>
+          <a:xfrm>
+            <a:off x="0" y="0"/>
+            <a:ext cx="12191695" cy="6858000"/>
+          </a:xfrm>
+          <a:prstGeom prst="rect">
+            <a:avLst/>
+          </a:prstGeom>
+          <a:solidFill>
+            <a:srgbClr val="030509"/>
+          </a:solidFill>
+          <a:ln>
+            <a:noFill/>
+          </a:ln>
+        </p:spPr>
+        <p:style>
+          <a:lnRef idx="1">
+            <a:schemeClr val="accent1"/>
+          </a:lnRef>
+          <a:fillRef idx="3">
+            <a:schemeClr val="accent1"/>
+          </a:fillRef>
+          <a:effectRef idx="2">
+            <a:schemeClr val="accent1"/>
+          </a:effectRef>
+          <a:fontRef idx="minor">
+            <a:schemeClr val="lt1"/>
+          </a:fontRef>
+        </p:style>
+        <p:txBody>
+          <a:bodyPr rtlCol="0" anchor="ctr"/>
+          <a:lstStyle/>
+          <a:p>
+            <a:pPr algn="ctr"/>
+          </a:p>
+        </p:txBody>
+      </p:sp>
+      <p:sp>
+        <p:nvSpPr>
+          <p:cNvPr id="3" name="TextBox 2"/>
+          <p:cNvSpPr txBox="1"/>
+          <p:nvPr/>
+        </p:nvSpPr>
+        <p:spPr>
+          <a:xfrm>
+            <a:off x="731520" y="365760"/>
+            <a:ext cx="10698480" cy="320040"/>
+          </a:xfrm>
+          <a:prstGeom prst="rect">
+            <a:avLst/>
+          </a:prstGeom>
+          <a:noFill/>
+        </p:spPr>
+        <p:txBody>
+          <a:bodyPr wrap="square">
+            <a:spAutoFit/>
+          </a:bodyPr>
+          <a:lstStyle/>
+          <a:p>
+            <a:pPr>
+              <a:defRPr sz="1000" b="1">
+                <a:solidFill>
+                  <a:srgbClr val="00F0FF"/>
+                </a:solidFill>
+                <a:latin typeface="Arial"/>
+              </a:defRPr>
+            </a:pPr>
+            <a:r>
+              <a:t>15 / DEVELOPMENT ROADMAP</a:t>
+            </a:r>
+          </a:p>
+        </p:txBody>
+      </p:sp>
+      <p:sp>
+        <p:nvSpPr>
+          <p:cNvPr id="4" name="TextBox 3"/>
+          <p:cNvSpPr txBox="1"/>
+          <p:nvPr/>
+        </p:nvSpPr>
+        <p:spPr>
+          <a:xfrm>
+            <a:off x="731520" y="685800"/>
+            <a:ext cx="10698480" cy="640080"/>
+          </a:xfrm>
+          <a:prstGeom prst="rect">
+            <a:avLst/>
+          </a:prstGeom>
+          <a:noFill/>
+        </p:spPr>
+        <p:txBody>
+          <a:bodyPr wrap="square">
+            <a:spAutoFit/>
+          </a:bodyPr>
+          <a:lstStyle/>
+          <a:p>
+            <a:pPr>
+              <a:defRPr sz="2500" b="1">
+                <a:solidFill>
+                  <a:srgbClr val="FFFFFF"/>
+                </a:solidFill>
+                <a:latin typeface="Arial"/>
+              </a:defRPr>
+            </a:pPr>
+            <a:r>
+              <a:t>Development Blueprint &amp; Expansion Phases</a:t>
+            </a:r>
+          </a:p>
+        </p:txBody>
+      </p:sp>
+      <p:sp>
+        <p:nvSpPr>
+          <p:cNvPr id="5" name="TextBox 4"/>
+          <p:cNvSpPr txBox="1"/>
+          <p:nvPr/>
+        </p:nvSpPr>
+        <p:spPr>
+          <a:xfrm>
+            <a:off x="731520" y="1325880"/>
+            <a:ext cx="10698480" cy="502920"/>
+          </a:xfrm>
+          <a:prstGeom prst="rect">
+            <a:avLst/>
+          </a:prstGeom>
+          <a:noFill/>
+        </p:spPr>
+        <p:txBody>
+          <a:bodyPr wrap="square">
+            <a:spAutoFit/>
+          </a:bodyPr>
+          <a:lstStyle/>
+          <a:p>
+            <a:pPr>
+              <a:defRPr sz="1200">
+                <a:solidFill>
+                  <a:srgbClr val="6B7A99"/>
+                </a:solidFill>
+                <a:latin typeface="Arial"/>
+              </a:defRPr>
+            </a:pPr>
+            <a:r>
+              <a:t>Scaling XNexus-CrisisOS across India's disaster management framework.</a:t>
+            </a:r>
+          </a:p>
+        </p:txBody>
+      </p:sp>
+      <p:sp>
+        <p:nvSpPr>
+          <p:cNvPr id="6" name="Rounded Rectangle 5"/>
+          <p:cNvSpPr/>
+          <p:nvPr/>
+        </p:nvSpPr>
+        <p:spPr>
+          <a:xfrm>
+            <a:off x="731520" y="1920240"/>
+            <a:ext cx="3383280" cy="3383280"/>
+          </a:xfrm>
+          <a:prstGeom prst="roundRect">
+            <a:avLst/>
+          </a:prstGeom>
+          <a:solidFill>
+            <a:srgbClr val="0E121E"/>
+          </a:solidFill>
+          <a:ln>
+            <a:solidFill>
+              <a:srgbClr val="00F0FF"/>
+            </a:solidFill>
+          </a:ln>
+        </p:spPr>
+        <p:style>
+          <a:lnRef idx="1">
+            <a:schemeClr val="accent1"/>
+          </a:lnRef>
+          <a:fillRef idx="3">
+            <a:schemeClr val="accent1"/>
+          </a:fillRef>
+          <a:effectRef idx="2">
+            <a:schemeClr val="accent1"/>
+          </a:effectRef>
+          <a:fontRef idx="minor">
+            <a:schemeClr val="lt1"/>
+          </a:fontRef>
+        </p:style>
+        <p:txBody>
+          <a:bodyPr rtlCol="0" anchor="ctr" wrap="square"/>
+          <a:lstStyle/>
+          <a:p>
+            <a:pPr algn="ctr">
               <a:defRPr sz="1100" b="1">
                 <a:solidFill>
+                  <a:srgbClr val="00F0FF"/>
+                </a:solidFill>
+              </a:defRPr>
+            </a:pPr>
+            <a:r>
+              <a:t>PHASE 1 — NOW (MVP)</a:t>
+            </a:r>
+          </a:p>
+          <a:p>
+            <a:br/>
+            <a:pPr>
+              <a:defRPr sz="1050">
+                <a:solidFill>
+                  <a:srgbClr val="E8EDF5"/>
+                </a:solidFill>
+              </a:defRPr>
+            </a:pPr>
+            <a:r>
+              <a:t>Hackathon Prototype</a:t>
+            </a:r>
+            <a:br/>
+            <a:br/>
+            <a:r>
+              <a:t>Core 9-agent architecture, FastMCP servers, Wayanad flood scenario proof-of-concept.</a:t>
+            </a:r>
+          </a:p>
+        </p:txBody>
+      </p:sp>
+      <p:sp>
+        <p:nvSpPr>
+          <p:cNvPr id="7" name="Rounded Rectangle 6"/>
+          <p:cNvSpPr/>
+          <p:nvPr/>
+        </p:nvSpPr>
+        <p:spPr>
+          <a:xfrm>
+            <a:off x="4297680" y="1920240"/>
+            <a:ext cx="3383280" cy="3383280"/>
+          </a:xfrm>
+          <a:prstGeom prst="roundRect">
+            <a:avLst/>
+          </a:prstGeom>
+          <a:solidFill>
+            <a:srgbClr val="0E121E"/>
+          </a:solidFill>
+          <a:ln>
+            <a:solidFill>
+              <a:srgbClr val="7B61FF"/>
+            </a:solidFill>
+          </a:ln>
+        </p:spPr>
+        <p:style>
+          <a:lnRef idx="1">
+            <a:schemeClr val="accent1"/>
+          </a:lnRef>
+          <a:fillRef idx="3">
+            <a:schemeClr val="accent1"/>
+          </a:fillRef>
+          <a:effectRef idx="2">
+            <a:schemeClr val="accent1"/>
+          </a:effectRef>
+          <a:fontRef idx="minor">
+            <a:schemeClr val="lt1"/>
+          </a:fontRef>
+        </p:style>
+        <p:txBody>
+          <a:bodyPr rtlCol="0" anchor="ctr" wrap="square"/>
+          <a:lstStyle/>
+          <a:p>
+            <a:pPr algn="ctr">
+              <a:defRPr sz="1100" b="1">
+                <a:solidFill>
+                  <a:srgbClr val="7B61FF"/>
+                </a:solidFill>
+              </a:defRPr>
+            </a:pPr>
+            <a:r>
+              <a:t>PHASE 2 — Q3 2026</a:t>
+            </a:r>
+          </a:p>
+          <a:p>
+            <a:br/>
+            <a:pPr>
+              <a:defRPr sz="1050">
+                <a:solidFill>
+                  <a:srgbClr val="E8EDF5"/>
+                </a:solidFill>
+              </a:defRPr>
+            </a:pPr>
+            <a:r>
+              <a:t>State-Level Pilots</a:t>
+            </a:r>
+            <a:br/>
+            <a:br/>
+            <a:r>
+              <a:t>Deploy across Kerala SDMA &amp; Uttarakhand SDMA. Live 108 health API &amp; NDMA Sachet connections.</a:t>
+            </a:r>
+          </a:p>
+        </p:txBody>
+      </p:sp>
+      <p:sp>
+        <p:nvSpPr>
+          <p:cNvPr id="8" name="Rounded Rectangle 7"/>
+          <p:cNvSpPr/>
+          <p:nvPr/>
+        </p:nvSpPr>
+        <p:spPr>
+          <a:xfrm>
+            <a:off x="7863840" y="1920240"/>
+            <a:ext cx="3383280" cy="3383280"/>
+          </a:xfrm>
+          <a:prstGeom prst="roundRect">
+            <a:avLst/>
+          </a:prstGeom>
+          <a:solidFill>
+            <a:srgbClr val="0E121E"/>
+          </a:solidFill>
+          <a:ln>
+            <a:solidFill>
+              <a:srgbClr val="00E676"/>
+            </a:solidFill>
+          </a:ln>
+        </p:spPr>
+        <p:style>
+          <a:lnRef idx="1">
+            <a:schemeClr val="accent1"/>
+          </a:lnRef>
+          <a:fillRef idx="3">
+            <a:schemeClr val="accent1"/>
+          </a:fillRef>
+          <a:effectRef idx="2">
+            <a:schemeClr val="accent1"/>
+          </a:effectRef>
+          <a:fontRef idx="minor">
+            <a:schemeClr val="lt1"/>
+          </a:fontRef>
+        </p:style>
+        <p:txBody>
+          <a:bodyPr rtlCol="0" anchor="ctr" wrap="square"/>
+          <a:lstStyle/>
+          <a:p>
+            <a:pPr algn="ctr">
+              <a:defRPr sz="1100" b="1">
+                <a:solidFill>
                   <a:srgbClr val="00E676"/>
                 </a:solidFill>
               </a:defRPr>
@@ -4529,7 +5797,7 @@
           <a:p>
             <a:br/>
             <a:pPr>
-              <a:defRPr sz="1100">
+              <a:defRPr sz="1050">
                 <a:solidFill>
                   <a:srgbClr val="E8EDF5"/>
                 </a:solidFill>
@@ -4663,7 +5931,7 @@
         <p:spPr>
           <a:xfrm>
             <a:off x="731520" y="365760"/>
-            <a:ext cx="10698480" cy="365760"/>
+            <a:ext cx="10698480" cy="320040"/>
           </a:xfrm>
           <a:prstGeom prst="rect">
             <a:avLst/>
@@ -4699,7 +5967,7 @@
         <p:spPr>
           <a:xfrm>
             <a:off x="731520" y="685800"/>
-            <a:ext cx="10698480" cy="731520"/>
+            <a:ext cx="10698480" cy="640080"/>
           </a:xfrm>
           <a:prstGeom prst="rect">
             <a:avLst/>
@@ -4713,7 +5981,7 @@
           <a:lstStyle/>
           <a:p>
             <a:pPr>
-              <a:defRPr sz="2600" b="1">
+              <a:defRPr sz="2500" b="1">
                 <a:solidFill>
                   <a:srgbClr val="FFFFFF"/>
                 </a:solidFill>
@@ -4734,8 +6002,8 @@
         </p:nvSpPr>
         <p:spPr>
           <a:xfrm>
-            <a:off x="731520" y="1371600"/>
-            <a:ext cx="10698480" cy="457200"/>
+            <a:off x="731520" y="1325880"/>
+            <a:ext cx="10698480" cy="502920"/>
           </a:xfrm>
           <a:prstGeom prst="rect">
             <a:avLst/>
@@ -4749,7 +6017,7 @@
           <a:lstStyle/>
           <a:p>
             <a:pPr>
-              <a:defRPr sz="1300">
+              <a:defRPr sz="1200">
                 <a:solidFill>
                   <a:srgbClr val="6B7A99"/>
                 </a:solidFill>
@@ -4757,7 +6025,7 @@
               </a:defRPr>
             </a:pPr>
             <a:r>
-              <a:t>India has world-class sensor networks (IMD, CWC, GSI), but they operate in absolute data silos. Manual phone chains create fatal delays.</a:t>
+              <a:t>India possesses world-class sensors (IMD, CWC, GSI), but they operate in absolute data silos. Manual phone chains create fatal delays.</a:t>
             </a:r>
           </a:p>
         </p:txBody>
@@ -4770,14 +6038,14 @@
         </p:nvSpPr>
         <p:spPr>
           <a:xfrm>
-            <a:off x="731520" y="2011680"/>
-            <a:ext cx="3291840" cy="1645920"/>
+            <a:off x="731520" y="1920240"/>
+            <a:ext cx="2468880" cy="1645920"/>
           </a:xfrm>
           <a:prstGeom prst="roundRect">
             <a:avLst/>
           </a:prstGeom>
           <a:solidFill>
-            <a:srgbClr val="0F1420"/>
+            <a:srgbClr val="0E121E"/>
           </a:solidFill>
           <a:ln>
             <a:solidFill>
@@ -4804,7 +6072,7 @@
           <a:lstStyle/>
           <a:p>
             <a:pPr algn="ctr">
-              <a:defRPr sz="2200" b="1">
+              <a:defRPr sz="1800" b="1">
                 <a:solidFill>
                   <a:srgbClr val="FF4D6A"/>
                 </a:solidFill>
@@ -4815,15 +6083,16 @@
             </a:r>
           </a:p>
           <a:p>
-            <a:pPr>
-              <a:defRPr sz="1100">
+            <a:br/>
+            <a:pPr>
+              <a:defRPr sz="1050">
                 <a:solidFill>
                   <a:srgbClr val="E8EDF5"/>
                 </a:solidFill>
               </a:defRPr>
             </a:pPr>
             <a:r>
-              <a:t>Annual mortality from floods alone in India (NDMA 2023).</a:t>
+              <a:t>Annual flood mortality in India (NDMA Report 2023).</a:t>
             </a:r>
           </a:p>
         </p:txBody>
@@ -4836,14 +6105,14 @@
         </p:nvSpPr>
         <p:spPr>
           <a:xfrm>
-            <a:off x="4389120" y="2011680"/>
-            <a:ext cx="3291840" cy="1645920"/>
+            <a:off x="3429000" y="1920240"/>
+            <a:ext cx="2468880" cy="1645920"/>
           </a:xfrm>
           <a:prstGeom prst="roundRect">
             <a:avLst/>
           </a:prstGeom>
           <a:solidFill>
-            <a:srgbClr val="0F1420"/>
+            <a:srgbClr val="0E121E"/>
           </a:solidFill>
           <a:ln>
             <a:solidFill>
@@ -4870,7 +6139,7 @@
           <a:lstStyle/>
           <a:p>
             <a:pPr algn="ctr">
-              <a:defRPr sz="2200" b="1">
+              <a:defRPr sz="1800" b="1">
                 <a:solidFill>
                   <a:srgbClr val="FF4D6A"/>
                 </a:solidFill>
@@ -4881,15 +6150,16 @@
             </a:r>
           </a:p>
           <a:p>
-            <a:pPr>
-              <a:defRPr sz="1100">
+            <a:br/>
+            <a:pPr>
+              <a:defRPr sz="1050">
                 <a:solidFill>
                   <a:srgbClr val="E8EDF5"/>
                 </a:solidFill>
               </a:defRPr>
             </a:pPr>
             <a:r>
-              <a:t>Cumulative economic damage from disasters (World Bank).</a:t>
+              <a:t>Cumulative economic disaster loss 2000-2023 (World Bank).</a:t>
             </a:r>
           </a:p>
         </p:txBody>
@@ -4902,14 +6172,14 @@
         </p:nvSpPr>
         <p:spPr>
           <a:xfrm>
-            <a:off x="8046720" y="2011680"/>
-            <a:ext cx="3291840" cy="1645920"/>
+            <a:off x="6126480" y="1920240"/>
+            <a:ext cx="2468880" cy="1645920"/>
           </a:xfrm>
           <a:prstGeom prst="roundRect">
             <a:avLst/>
           </a:prstGeom>
           <a:solidFill>
-            <a:srgbClr val="0F1420"/>
+            <a:srgbClr val="0E121E"/>
           </a:solidFill>
           <a:ln>
             <a:solidFill>
@@ -4936,7 +6206,7 @@
           <a:lstStyle/>
           <a:p>
             <a:pPr algn="ctr">
-              <a:defRPr sz="2200" b="1">
+              <a:defRPr sz="1800" b="1">
                 <a:solidFill>
                   <a:srgbClr val="FF4D6A"/>
                 </a:solidFill>
@@ -4947,8 +6217,9 @@
             </a:r>
           </a:p>
           <a:p>
-            <a:pPr>
-              <a:defRPr sz="1100">
+            <a:br/>
+            <a:pPr>
+              <a:defRPr sz="1050">
                 <a:solidFill>
                   <a:srgbClr val="E8EDF5"/>
                 </a:solidFill>
@@ -4968,14 +6239,81 @@
         </p:nvSpPr>
         <p:spPr>
           <a:xfrm>
-            <a:off x="731520" y="3931920"/>
-            <a:ext cx="10607040" cy="2377440"/>
+            <a:off x="8823960" y="1920240"/>
+            <a:ext cx="2468880" cy="1645920"/>
           </a:xfrm>
           <a:prstGeom prst="roundRect">
             <a:avLst/>
           </a:prstGeom>
           <a:solidFill>
-            <a:srgbClr val="0F1420"/>
+            <a:srgbClr val="0E121E"/>
+          </a:solidFill>
+          <a:ln>
+            <a:solidFill>
+              <a:srgbClr val="FFC107"/>
+            </a:solidFill>
+          </a:ln>
+        </p:spPr>
+        <p:style>
+          <a:lnRef idx="1">
+            <a:schemeClr val="accent1"/>
+          </a:lnRef>
+          <a:fillRef idx="3">
+            <a:schemeClr val="accent1"/>
+          </a:fillRef>
+          <a:effectRef idx="2">
+            <a:schemeClr val="accent1"/>
+          </a:effectRef>
+          <a:fontRef idx="minor">
+            <a:schemeClr val="lt1"/>
+          </a:fontRef>
+        </p:style>
+        <p:txBody>
+          <a:bodyPr rtlCol="0" anchor="ctr" wrap="square"/>
+          <a:lstStyle/>
+          <a:p>
+            <a:pPr algn="ctr">
+              <a:defRPr sz="1800" b="1">
+                <a:solidFill>
+                  <a:srgbClr val="FFC107"/>
+                </a:solidFill>
+              </a:defRPr>
+            </a:pPr>
+            <a:r>
+              <a:t>40M Hectares</a:t>
+            </a:r>
+          </a:p>
+          <a:p>
+            <a:br/>
+            <a:pPr>
+              <a:defRPr sz="1050">
+                <a:solidFill>
+                  <a:srgbClr val="E8EDF5"/>
+                </a:solidFill>
+              </a:defRPr>
+            </a:pPr>
+            <a:r>
+              <a:t>Flood-exposed agricultural &amp; urban land in India (CWC).</a:t>
+            </a:r>
+          </a:p>
+        </p:txBody>
+      </p:sp>
+      <p:sp>
+        <p:nvSpPr>
+          <p:cNvPr id="10" name="Rounded Rectangle 9"/>
+          <p:cNvSpPr/>
+          <p:nvPr/>
+        </p:nvSpPr>
+        <p:spPr>
+          <a:xfrm>
+            <a:off x="731520" y="3749039"/>
+            <a:ext cx="10607040" cy="2560320"/>
+          </a:xfrm>
+          <a:prstGeom prst="roundRect">
+            <a:avLst/>
+          </a:prstGeom>
+          <a:solidFill>
+            <a:srgbClr val="0E121E"/>
           </a:solidFill>
           <a:ln>
             <a:solidFill>
@@ -5002,50 +6340,86 @@
           <a:lstStyle/>
           <a:p>
             <a:pPr algn="ctr">
-              <a:defRPr sz="1400" b="1">
+              <a:defRPr sz="1300" b="1">
                 <a:solidFill>
                   <a:srgbClr val="7B61FF"/>
                 </a:solidFill>
               </a:defRPr>
             </a:pPr>
             <a:r>
-              <a:t>REAL HISTORICAL CASE STUDIES &amp; COORDINATION FAILURES</a:t>
-            </a:r>
-          </a:p>
-          <a:p>
-            <a:pPr>
-              <a:defRPr sz="1100">
+              <a:t>THE 100-MINUTE COORDINATION FRICTION PIPELINE</a:t>
+            </a:r>
+          </a:p>
+          <a:p>
+            <a:pPr>
+              <a:defRPr sz="1050">
                 <a:solidFill>
                   <a:srgbClr val="E8EDF5"/>
                 </a:solidFill>
               </a:defRPr>
             </a:pPr>
             <a:r>
-              <a:t>• Wayanad Landslides (July 2024 - 400+ Dead): Landslides struck at 2:00 AM. CWC upstream telemetry, GSI soil moisture, and IMD rain alerts were never cross-analyzed in real time.</a:t>
-            </a:r>
-          </a:p>
-          <a:p>
-            <a:pPr>
-              <a:defRPr sz="1100">
+              <a:t>1. IMD Doppler Radar detects heavy precipitation surge (T + 0 min)</a:t>
+            </a:r>
+          </a:p>
+          <a:p>
+            <a:pPr>
+              <a:defRPr sz="1050">
                 <a:solidFill>
                   <a:srgbClr val="E8EDF5"/>
                 </a:solidFill>
               </a:defRPr>
             </a:pPr>
             <a:r>
-              <a:t>• Kerala Floods (August 2018 - 483 Dead): 35 major dams opened simultaneously without synchronized downstream evacuation modeling. Rescue fleets arrived 6+ hours late.</a:t>
-            </a:r>
-          </a:p>
-          <a:p>
-            <a:pPr>
-              <a:defRPr sz="1100" b="1">
+              <a:t>2. Weather alert sent via email/fax to District Magistrate (DM) office (T + 45 min delay)</a:t>
+            </a:r>
+          </a:p>
+          <a:p>
+            <a:pPr>
+              <a:defRPr sz="1050">
+                <a:solidFill>
+                  <a:srgbClr val="E8EDF5"/>
+                </a:solidFill>
+              </a:defRPr>
+            </a:pPr>
+            <a:r>
+              <a:t>3. DM office staff manually calls Central Water Commission (CWC) for river levels (T + 80 min delay)</a:t>
+            </a:r>
+          </a:p>
+          <a:p>
+            <a:pPr>
+              <a:defRPr sz="1050">
+                <a:solidFill>
+                  <a:srgbClr val="E8EDF5"/>
+                </a:solidFill>
+              </a:defRPr>
+            </a:pPr>
+            <a:r>
+              <a:t>4. NDRF &amp; SDRF rescue battalion commanders notified via phone calls (T + 95 min delay)</a:t>
+            </a:r>
+          </a:p>
+          <a:p>
+            <a:pPr>
+              <a:defRPr sz="1050">
+                <a:solidFill>
+                  <a:srgbClr val="E8EDF5"/>
+                </a:solidFill>
+              </a:defRPr>
+            </a:pPr>
+            <a:r>
+              <a:t>5. Standard sirens activated without route guidance or localized language broadcasts (T + 100+ min delay)</a:t>
+            </a:r>
+          </a:p>
+          <a:p>
+            <a:pPr>
+              <a:defRPr sz="1050" b="1">
                 <a:solidFill>
                   <a:srgbClr val="FF4D6A"/>
                 </a:solidFill>
               </a:defRPr>
             </a:pPr>
             <a:r>
-              <a:t>• Traditional 100-Minute Warning Friction: IMD Alert (45 min) → DM Office (35 min) → NDRF Dispatch (22 min) = 100+ minutes total delay.</a:t>
+              <a:t>--&gt; CATASTROPHIC OUTCOME: Families receive under 10 minutes of actionable notice before floodwaters hit.</a:t>
             </a:r>
           </a:p>
         </p:txBody>
@@ -5120,7 +6494,7 @@
         <p:spPr>
           <a:xfrm>
             <a:off x="731520" y="365760"/>
-            <a:ext cx="10698480" cy="365760"/>
+            <a:ext cx="10698480" cy="320040"/>
           </a:xfrm>
           <a:prstGeom prst="rect">
             <a:avLst/>
@@ -5142,7 +6516,7 @@
               </a:defRPr>
             </a:pPr>
             <a:r>
-              <a:t>03 / PROPOSED SOLUTION</a:t>
+              <a:t>03 / CASE STUDIES</a:t>
             </a:r>
           </a:p>
         </p:txBody>
@@ -5156,7 +6530,7 @@
         <p:spPr>
           <a:xfrm>
             <a:off x="731520" y="685800"/>
-            <a:ext cx="10698480" cy="731520"/>
+            <a:ext cx="10698480" cy="640080"/>
           </a:xfrm>
           <a:prstGeom prst="rect">
             <a:avLst/>
@@ -5170,7 +6544,7 @@
           <a:lstStyle/>
           <a:p>
             <a:pPr>
-              <a:defRPr sz="2600" b="1">
+              <a:defRPr sz="2500" b="1">
                 <a:solidFill>
                   <a:srgbClr val="FFFFFF"/>
                 </a:solidFill>
@@ -5178,7 +6552,7 @@
               </a:defRPr>
             </a:pPr>
             <a:r>
-              <a:t>What We're Building: XNexus-CrisisOS</a:t>
+              <a:t>Real Historical Disasters &amp; Analysis</a:t>
             </a:r>
           </a:p>
         </p:txBody>
@@ -5191,8 +6565,8 @@
         </p:nvSpPr>
         <p:spPr>
           <a:xfrm>
-            <a:off x="731520" y="1371600"/>
-            <a:ext cx="10698480" cy="457200"/>
+            <a:off x="731520" y="1325880"/>
+            <a:ext cx="10698480" cy="502920"/>
           </a:xfrm>
           <a:prstGeom prst="rect">
             <a:avLst/>
@@ -5206,7 +6580,7 @@
           <a:lstStyle/>
           <a:p>
             <a:pPr>
-              <a:defRPr sz="1300">
+              <a:defRPr sz="1200">
                 <a:solidFill>
                   <a:srgbClr val="6B7A99"/>
                 </a:solidFill>
@@ -5214,7 +6588,7 @@
               </a:defRPr>
             </a:pPr>
             <a:r>
-              <a:t>Replacing the manual 100-minute phone-call chain with an autonomous multi-agent AI operating system.</a:t>
+              <a:t>Empirical breakdown of past Indian disaster response failures caused by agency silos.</a:t>
             </a:r>
           </a:p>
         </p:txBody>
@@ -5227,14 +6601,14 @@
         </p:nvSpPr>
         <p:spPr>
           <a:xfrm>
-            <a:off x="731520" y="2011680"/>
-            <a:ext cx="5120640" cy="4297680"/>
+            <a:off x="731520" y="1920240"/>
+            <a:ext cx="5120640" cy="2103120"/>
           </a:xfrm>
           <a:prstGeom prst="roundRect">
             <a:avLst/>
           </a:prstGeom>
           <a:solidFill>
-            <a:srgbClr val="0F1420"/>
+            <a:srgbClr val="0E121E"/>
           </a:solidFill>
           <a:ln>
             <a:solidFill>
@@ -5261,87 +6635,39 @@
           <a:lstStyle/>
           <a:p>
             <a:pPr algn="ctr">
-              <a:defRPr sz="1400" b="1">
+              <a:defRPr sz="1300" b="1">
+                <a:solidFill>
+                  <a:srgbClr val="FFFFFF"/>
+                </a:solidFill>
+              </a:defRPr>
+            </a:pPr>
+            <a:r>
+              <a:t>WAYANAD LANDSLIDES (JULY 2024)</a:t>
+            </a:r>
+          </a:p>
+          <a:p>
+            <a:pPr>
+              <a:defRPr sz="1050" b="1">
                 <a:solidFill>
                   <a:srgbClr val="FF4D6A"/>
                 </a:solidFill>
               </a:defRPr>
             </a:pPr>
             <a:r>
-              <a:t>TODAY: MANUAL PHONE CHAIN (100+ MIN)</a:t>
-            </a:r>
-          </a:p>
-          <a:p>
-            <a:pPr>
-              <a:defRPr sz="1100">
+              <a:t>400+ Dead · Debris Flow</a:t>
+            </a:r>
+          </a:p>
+          <a:p>
+            <a:br/>
+            <a:pPr>
+              <a:defRPr sz="1000">
                 <a:solidFill>
                   <a:srgbClr val="E8EDF5"/>
                 </a:solidFill>
               </a:defRPr>
             </a:pPr>
             <a:r>
-              <a:t>1. IMD Doppler detects heavy rainfall (T + 0m)</a:t>
-            </a:r>
-          </a:p>
-          <a:p>
-            <a:pPr>
-              <a:defRPr sz="1100">
-                <a:solidFill>
-                  <a:srgbClr val="E8EDF5"/>
-                </a:solidFill>
-              </a:defRPr>
-            </a:pPr>
-            <a:r>
-              <a:t>2. Fax/Email alert sent to District Magistrate (T + 45m)</a:t>
-            </a:r>
-          </a:p>
-          <a:p>
-            <a:pPr>
-              <a:defRPr sz="1100">
-                <a:solidFill>
-                  <a:srgbClr val="E8EDF5"/>
-                </a:solidFill>
-              </a:defRPr>
-            </a:pPr>
-            <a:r>
-              <a:t>3. DM office calls CWC officials for river levels (T + 80m)</a:t>
-            </a:r>
-          </a:p>
-          <a:p>
-            <a:pPr>
-              <a:defRPr sz="1100">
-                <a:solidFill>
-                  <a:srgbClr val="E8EDF5"/>
-                </a:solidFill>
-              </a:defRPr>
-            </a:pPr>
-            <a:r>
-              <a:t>4. NDRF dispatched via manual phone call (T + 95m)</a:t>
-            </a:r>
-          </a:p>
-          <a:p>
-            <a:pPr>
-              <a:defRPr sz="1100">
-                <a:solidFill>
-                  <a:srgbClr val="E8EDF5"/>
-                </a:solidFill>
-              </a:defRPr>
-            </a:pPr>
-            <a:r>
-              <a:t>5. Standard sirens blown (no route guidance given)</a:t>
-            </a:r>
-          </a:p>
-          <a:p>
-            <a:br/>
-            <a:pPr>
-              <a:defRPr sz="1100">
-                <a:solidFill>
-                  <a:srgbClr val="E8EDF5"/>
-                </a:solidFill>
-              </a:defRPr>
-            </a:pPr>
-            <a:r>
-              <a:t>RESULT: 100+ minutes delay. Less than 10 min warning for families.</a:t>
+              <a:t>Landslides struck at 2:00 AM. CWC upstream gauges showed swelling rivers, GSI had high soil moisture indices, and IMD recorded heavy rain. Zero real-time data fusion occurred. Entire villages (Chooralmala, Mundakkai) were buried.</a:t>
             </a:r>
           </a:p>
         </p:txBody>
@@ -5354,18 +6680,18 @@
         </p:nvSpPr>
         <p:spPr>
           <a:xfrm>
-            <a:off x="6217920" y="2011680"/>
-            <a:ext cx="5120640" cy="4297680"/>
+            <a:off x="6126480" y="1920240"/>
+            <a:ext cx="5120640" cy="2103120"/>
           </a:xfrm>
           <a:prstGeom prst="roundRect">
             <a:avLst/>
           </a:prstGeom>
           <a:solidFill>
-            <a:srgbClr val="0F1420"/>
+            <a:srgbClr val="0E121E"/>
           </a:solidFill>
           <a:ln>
             <a:solidFill>
-              <a:srgbClr val="00E676"/>
+              <a:srgbClr val="FF4D6A"/>
             </a:solidFill>
           </a:ln>
         </p:spPr>
@@ -5388,87 +6714,197 @@
           <a:lstStyle/>
           <a:p>
             <a:pPr algn="ctr">
-              <a:defRPr sz="1400" b="1">
-                <a:solidFill>
-                  <a:srgbClr val="00E676"/>
-                </a:solidFill>
-              </a:defRPr>
-            </a:pPr>
-            <a:r>
-              <a:t>WITH XNEXUS: AUTONOMOUS MESH (&lt; 5 MIN)</a:t>
-            </a:r>
-          </a:p>
-          <a:p>
-            <a:pPr>
-              <a:defRPr sz="1100">
+              <a:defRPr sz="1300" b="1">
+                <a:solidFill>
+                  <a:srgbClr val="FFFFFF"/>
+                </a:solidFill>
+              </a:defRPr>
+            </a:pPr>
+            <a:r>
+              <a:t>KERALA FLOODS (AUGUST 2018)</a:t>
+            </a:r>
+          </a:p>
+          <a:p>
+            <a:pPr>
+              <a:defRPr sz="1050" b="1">
+                <a:solidFill>
+                  <a:srgbClr val="FF4D6A"/>
+                </a:solidFill>
+              </a:defRPr>
+            </a:pPr>
+            <a:r>
+              <a:t>483 Dead · 1.4M Displaced</a:t>
+            </a:r>
+          </a:p>
+          <a:p>
+            <a:br/>
+            <a:pPr>
+              <a:defRPr sz="1000">
                 <a:solidFill>
                   <a:srgbClr val="E8EDF5"/>
                 </a:solidFill>
               </a:defRPr>
             </a:pPr>
             <a:r>
-              <a:t>1. IMD, CWC, GSI feeds ingested concurrently via MCP (T + 0s)</a:t>
-            </a:r>
-          </a:p>
-          <a:p>
-            <a:pPr>
-              <a:defRPr sz="1100">
+              <a:t>35 major dams opened simultaneously without synchronized downstream inundation modeling. Rescue teams arrived 6+ hours late to high-risk zones due to unmapped road blockages.</a:t>
+            </a:r>
+          </a:p>
+        </p:txBody>
+      </p:sp>
+      <p:sp>
+        <p:nvSpPr>
+          <p:cNvPr id="8" name="Rounded Rectangle 7"/>
+          <p:cNvSpPr/>
+          <p:nvPr/>
+        </p:nvSpPr>
+        <p:spPr>
+          <a:xfrm>
+            <a:off x="731520" y="4206240"/>
+            <a:ext cx="5120640" cy="2103120"/>
+          </a:xfrm>
+          <a:prstGeom prst="roundRect">
+            <a:avLst/>
+          </a:prstGeom>
+          <a:solidFill>
+            <a:srgbClr val="0E121E"/>
+          </a:solidFill>
+          <a:ln>
+            <a:solidFill>
+              <a:srgbClr val="FFC107"/>
+            </a:solidFill>
+          </a:ln>
+        </p:spPr>
+        <p:style>
+          <a:lnRef idx="1">
+            <a:schemeClr val="accent1"/>
+          </a:lnRef>
+          <a:fillRef idx="3">
+            <a:schemeClr val="accent1"/>
+          </a:fillRef>
+          <a:effectRef idx="2">
+            <a:schemeClr val="accent1"/>
+          </a:effectRef>
+          <a:fontRef idx="minor">
+            <a:schemeClr val="lt1"/>
+          </a:fontRef>
+        </p:style>
+        <p:txBody>
+          <a:bodyPr rtlCol="0" anchor="ctr" wrap="square"/>
+          <a:lstStyle/>
+          <a:p>
+            <a:pPr algn="ctr">
+              <a:defRPr sz="1300" b="1">
+                <a:solidFill>
+                  <a:srgbClr val="FFFFFF"/>
+                </a:solidFill>
+              </a:defRPr>
+            </a:pPr>
+            <a:r>
+              <a:t>UTTARAKHAND OUTBURST (2023)</a:t>
+            </a:r>
+          </a:p>
+          <a:p>
+            <a:pPr>
+              <a:defRPr sz="1050" b="1">
+                <a:solidFill>
+                  <a:srgbClr val="FFC107"/>
+                </a:solidFill>
+              </a:defRPr>
+            </a:pPr>
+            <a:r>
+              <a:t>100+ Dead · Thousands Stranded</a:t>
+            </a:r>
+          </a:p>
+          <a:p>
+            <a:br/>
+            <a:pPr>
+              <a:defRPr sz="1000">
                 <a:solidFill>
                   <a:srgbClr val="E8EDF5"/>
                 </a:solidFill>
               </a:defRPr>
             </a:pPr>
             <a:r>
-              <a:t>2. WeatherIntel &amp; HydroMonitor agents reason jointly (T + 15s)</a:t>
-            </a:r>
-          </a:p>
-          <a:p>
-            <a:pPr>
-              <a:defRPr sz="1100">
+              <a:t>Glacial lake outburst flood. NHAI highway blockages were uncommunicated to incoming traffic. Emergency health facilities in Chamoli and Rudraprayag were overwhelmed due to zero bed triage.</a:t>
+            </a:r>
+          </a:p>
+        </p:txBody>
+      </p:sp>
+      <p:sp>
+        <p:nvSpPr>
+          <p:cNvPr id="9" name="Rounded Rectangle 8"/>
+          <p:cNvSpPr/>
+          <p:nvPr/>
+        </p:nvSpPr>
+        <p:spPr>
+          <a:xfrm>
+            <a:off x="6126480" y="4206240"/>
+            <a:ext cx="5120640" cy="2103120"/>
+          </a:xfrm>
+          <a:prstGeom prst="roundRect">
+            <a:avLst/>
+          </a:prstGeom>
+          <a:solidFill>
+            <a:srgbClr val="0E121E"/>
+          </a:solidFill>
+          <a:ln>
+            <a:solidFill>
+              <a:srgbClr val="FFC107"/>
+            </a:solidFill>
+          </a:ln>
+        </p:spPr>
+        <p:style>
+          <a:lnRef idx="1">
+            <a:schemeClr val="accent1"/>
+          </a:lnRef>
+          <a:fillRef idx="3">
+            <a:schemeClr val="accent1"/>
+          </a:fillRef>
+          <a:effectRef idx="2">
+            <a:schemeClr val="accent1"/>
+          </a:effectRef>
+          <a:fontRef idx="minor">
+            <a:schemeClr val="lt1"/>
+          </a:fontRef>
+        </p:style>
+        <p:txBody>
+          <a:bodyPr rtlCol="0" anchor="ctr" wrap="square"/>
+          <a:lstStyle/>
+          <a:p>
+            <a:pPr algn="ctr">
+              <a:defRPr sz="1300" b="1">
+                <a:solidFill>
+                  <a:srgbClr val="FFFFFF"/>
+                </a:solidFill>
+              </a:defRPr>
+            </a:pPr>
+            <a:r>
+              <a:t>CYCLONE BIPARJOY (2023)</a:t>
+            </a:r>
+          </a:p>
+          <a:p>
+            <a:pPr>
+              <a:defRPr sz="1050" b="1">
+                <a:solidFill>
+                  <a:srgbClr val="FFC107"/>
+                </a:solidFill>
+              </a:defRPr>
+            </a:pPr>
+            <a:r>
+              <a:t>Coastal Storm Surges</a:t>
+            </a:r>
+          </a:p>
+          <a:p>
+            <a:br/>
+            <a:pPr>
+              <a:defRPr sz="1000">
                 <a:solidFill>
                   <a:srgbClr val="E8EDF5"/>
                 </a:solidFill>
               </a:defRPr>
             </a:pPr>
             <a:r>
-              <a:t>3. RouteOptimizer maps detours around blocked NHAI roads (T + 30s)</a:t>
-            </a:r>
-          </a:p>
-          <a:p>
-            <a:pPr>
-              <a:defRPr sz="1100">
-                <a:solidFill>
-                  <a:srgbClr val="E8EDF5"/>
-                </a:solidFill>
-              </a:defRPr>
-            </a:pPr>
-            <a:r>
-              <a:t>4. MedResponse triages 108 ICU hospital bed availability (T + 45s)</a:t>
-            </a:r>
-          </a:p>
-          <a:p>
-            <a:pPr>
-              <a:defRPr sz="1100">
-                <a:solidFill>
-                  <a:srgbClr val="E8EDF5"/>
-                </a:solidFill>
-              </a:defRPr>
-            </a:pPr>
-            <a:r>
-              <a:t>5. NDMA Sachet cell broadcast sent to local towers (T + 60s)</a:t>
-            </a:r>
-          </a:p>
-          <a:p>
-            <a:br/>
-            <a:pPr>
-              <a:defRPr sz="1100">
-                <a:solidFill>
-                  <a:srgbClr val="E8EDF5"/>
-                </a:solidFill>
-              </a:defRPr>
-            </a:pPr>
-            <a:r>
-              <a:t>RESULT: Under 5 minutes total response. Automatic life-saving routing.</a:t>
+              <a:t>High wind speeds and storm surges along Gujarat coast. Siren broadcasts lacked evacuation route pathfinding, leading to traffic bottlenecks along low-lying coastal roads.</a:t>
             </a:r>
           </a:p>
         </p:txBody>
@@ -5543,7 +6979,7 @@
         <p:spPr>
           <a:xfrm>
             <a:off x="731520" y="365760"/>
-            <a:ext cx="10698480" cy="365760"/>
+            <a:ext cx="10698480" cy="320040"/>
           </a:xfrm>
           <a:prstGeom prst="rect">
             <a:avLst/>
@@ -5565,7 +7001,7 @@
               </a:defRPr>
             </a:pPr>
             <a:r>
-              <a:t>04 / MULTI-AGENT ARCHITECTURE</a:t>
+              <a:t>04 / PROPOSED SOLUTION</a:t>
             </a:r>
           </a:p>
         </p:txBody>
@@ -5579,7 +7015,7 @@
         <p:spPr>
           <a:xfrm>
             <a:off x="731520" y="685800"/>
-            <a:ext cx="10698480" cy="731520"/>
+            <a:ext cx="10698480" cy="640080"/>
           </a:xfrm>
           <a:prstGeom prst="rect">
             <a:avLst/>
@@ -5593,7 +7029,7 @@
           <a:lstStyle/>
           <a:p>
             <a:pPr>
-              <a:defRPr sz="2600" b="1">
+              <a:defRPr sz="2500" b="1">
                 <a:solidFill>
                   <a:srgbClr val="FFFFFF"/>
                 </a:solidFill>
@@ -5601,7 +7037,7 @@
               </a:defRPr>
             </a:pPr>
             <a:r>
-              <a:t>India-Focused 9-Agentic Framework</a:t>
+              <a:t>What We're Building: XNexus-CrisisOS</a:t>
             </a:r>
           </a:p>
         </p:txBody>
@@ -5614,8 +7050,8 @@
         </p:nvSpPr>
         <p:spPr>
           <a:xfrm>
-            <a:off x="731520" y="1371600"/>
-            <a:ext cx="10698480" cy="457200"/>
+            <a:off x="731520" y="1325880"/>
+            <a:ext cx="10698480" cy="502920"/>
           </a:xfrm>
           <a:prstGeom prst="rect">
             <a:avLst/>
@@ -5629,7 +7065,7 @@
           <a:lstStyle/>
           <a:p>
             <a:pPr>
-              <a:defRPr sz="1300">
+              <a:defRPr sz="1200">
                 <a:solidFill>
                   <a:srgbClr val="6B7A99"/>
                 </a:solidFill>
@@ -5637,7 +7073,7 @@
               </a:defRPr>
             </a:pPr>
             <a:r>
-              <a:t>Nine specialized AI agents collaborating in real time using Indian government telemetry.</a:t>
+              <a:t>Replacing the manual 100-minute phone-call chain with an autonomous multi-agent AI operating system.</a:t>
             </a:r>
           </a:p>
         </p:txBody>
@@ -5650,574 +7086,14 @@
         </p:nvSpPr>
         <p:spPr>
           <a:xfrm>
-            <a:off x="731520" y="2011680"/>
-            <a:ext cx="3383280" cy="1280160"/>
+            <a:off x="731520" y="1920240"/>
+            <a:ext cx="5120640" cy="4389120"/>
           </a:xfrm>
           <a:prstGeom prst="roundRect">
             <a:avLst/>
           </a:prstGeom>
           <a:solidFill>
-            <a:srgbClr val="0F1420"/>
-          </a:solidFill>
-          <a:ln>
-            <a:solidFill>
-              <a:srgbClr val="00F0FF"/>
-            </a:solidFill>
-          </a:ln>
-        </p:spPr>
-        <p:style>
-          <a:lnRef idx="1">
-            <a:schemeClr val="accent1"/>
-          </a:lnRef>
-          <a:fillRef idx="3">
-            <a:schemeClr val="accent1"/>
-          </a:fillRef>
-          <a:effectRef idx="2">
-            <a:schemeClr val="accent1"/>
-          </a:effectRef>
-          <a:fontRef idx="minor">
-            <a:schemeClr val="lt1"/>
-          </a:fontRef>
-        </p:style>
-        <p:txBody>
-          <a:bodyPr rtlCol="0" anchor="ctr" wrap="square"/>
-          <a:lstStyle/>
-          <a:p>
-            <a:pPr algn="ctr">
-              <a:defRPr sz="1200" b="1">
-                <a:solidFill>
-                  <a:srgbClr val="FFFFFF"/>
-                </a:solidFill>
-              </a:defRPr>
-            </a:pPr>
-            <a:r>
-              <a:t>🛰️ WeatherIntel</a:t>
-            </a:r>
-          </a:p>
-          <a:p>
-            <a:pPr>
-              <a:defRPr sz="950">
-                <a:solidFill>
-                  <a:srgbClr val="6B7A99"/>
-                </a:solidFill>
-              </a:defRPr>
-            </a:pPr>
-            <a:r>
-              <a:t>Feed: IMD Doppler Radar &amp; INSAT-3D</a:t>
-            </a:r>
-            <a:br/>
-            <a:r>
-              <a:t>Tracks cloud reflectivity &amp; rain rate</a:t>
-            </a:r>
-          </a:p>
-        </p:txBody>
-      </p:sp>
-      <p:sp>
-        <p:nvSpPr>
-          <p:cNvPr id="7" name="Rounded Rectangle 6"/>
-          <p:cNvSpPr/>
-          <p:nvPr/>
-        </p:nvSpPr>
-        <p:spPr>
-          <a:xfrm>
-            <a:off x="4297680" y="2011680"/>
-            <a:ext cx="3383280" cy="1280160"/>
-          </a:xfrm>
-          <a:prstGeom prst="roundRect">
-            <a:avLst/>
-          </a:prstGeom>
-          <a:solidFill>
-            <a:srgbClr val="0F1420"/>
-          </a:solidFill>
-          <a:ln>
-            <a:solidFill>
-              <a:srgbClr val="00F0FF"/>
-            </a:solidFill>
-          </a:ln>
-        </p:spPr>
-        <p:style>
-          <a:lnRef idx="1">
-            <a:schemeClr val="accent1"/>
-          </a:lnRef>
-          <a:fillRef idx="3">
-            <a:schemeClr val="accent1"/>
-          </a:fillRef>
-          <a:effectRef idx="2">
-            <a:schemeClr val="accent1"/>
-          </a:effectRef>
-          <a:fontRef idx="minor">
-            <a:schemeClr val="lt1"/>
-          </a:fontRef>
-        </p:style>
-        <p:txBody>
-          <a:bodyPr rtlCol="0" anchor="ctr" wrap="square"/>
-          <a:lstStyle/>
-          <a:p>
-            <a:pPr algn="ctr">
-              <a:defRPr sz="1200" b="1">
-                <a:solidFill>
-                  <a:srgbClr val="FFFFFF"/>
-                </a:solidFill>
-              </a:defRPr>
-            </a:pPr>
-            <a:r>
-              <a:t>🌊 HydroMonitor</a:t>
-            </a:r>
-          </a:p>
-          <a:p>
-            <a:pPr>
-              <a:defRPr sz="950">
-                <a:solidFill>
-                  <a:srgbClr val="6B7A99"/>
-                </a:solidFill>
-              </a:defRPr>
-            </a:pPr>
-            <a:r>
-              <a:t>Feed: CWC River Gauges</a:t>
-            </a:r>
-            <a:br/>
-            <a:r>
-              <a:t>Monitors river heights &amp; danger marks</a:t>
-            </a:r>
-          </a:p>
-        </p:txBody>
-      </p:sp>
-      <p:sp>
-        <p:nvSpPr>
-          <p:cNvPr id="8" name="Rounded Rectangle 7"/>
-          <p:cNvSpPr/>
-          <p:nvPr/>
-        </p:nvSpPr>
-        <p:spPr>
-          <a:xfrm>
-            <a:off x="7863840" y="2011680"/>
-            <a:ext cx="3383280" cy="1280160"/>
-          </a:xfrm>
-          <a:prstGeom prst="roundRect">
-            <a:avLst/>
-          </a:prstGeom>
-          <a:solidFill>
-            <a:srgbClr val="0F1420"/>
-          </a:solidFill>
-          <a:ln>
-            <a:solidFill>
-              <a:srgbClr val="00F0FF"/>
-            </a:solidFill>
-          </a:ln>
-        </p:spPr>
-        <p:style>
-          <a:lnRef idx="1">
-            <a:schemeClr val="accent1"/>
-          </a:lnRef>
-          <a:fillRef idx="3">
-            <a:schemeClr val="accent1"/>
-          </a:fillRef>
-          <a:effectRef idx="2">
-            <a:schemeClr val="accent1"/>
-          </a:effectRef>
-          <a:fontRef idx="minor">
-            <a:schemeClr val="lt1"/>
-          </a:fontRef>
-        </p:style>
-        <p:txBody>
-          <a:bodyPr rtlCol="0" anchor="ctr" wrap="square"/>
-          <a:lstStyle/>
-          <a:p>
-            <a:pPr algn="ctr">
-              <a:defRPr sz="1200" b="1">
-                <a:solidFill>
-                  <a:srgbClr val="FFFFFF"/>
-                </a:solidFill>
-              </a:defRPr>
-            </a:pPr>
-            <a:r>
-              <a:t>⛰️ GeoRisk</a:t>
-            </a:r>
-          </a:p>
-          <a:p>
-            <a:pPr>
-              <a:defRPr sz="950">
-                <a:solidFill>
-                  <a:srgbClr val="6B7A99"/>
-                </a:solidFill>
-              </a:defRPr>
-            </a:pPr>
-            <a:r>
-              <a:t>Feed: GSI Landslide Indices</a:t>
-            </a:r>
-            <a:br/>
-            <a:r>
-              <a:t>Calculates soil shear &amp; slope hazard</a:t>
-            </a:r>
-          </a:p>
-        </p:txBody>
-      </p:sp>
-      <p:sp>
-        <p:nvSpPr>
-          <p:cNvPr id="9" name="Rounded Rectangle 8"/>
-          <p:cNvSpPr/>
-          <p:nvPr/>
-        </p:nvSpPr>
-        <p:spPr>
-          <a:xfrm>
-            <a:off x="731520" y="3474720"/>
-            <a:ext cx="3383280" cy="1280160"/>
-          </a:xfrm>
-          <a:prstGeom prst="roundRect">
-            <a:avLst/>
-          </a:prstGeom>
-          <a:solidFill>
-            <a:srgbClr val="0F1420"/>
-          </a:solidFill>
-          <a:ln>
-            <a:solidFill>
-              <a:srgbClr val="00F0FF"/>
-            </a:solidFill>
-          </a:ln>
-        </p:spPr>
-        <p:style>
-          <a:lnRef idx="1">
-            <a:schemeClr val="accent1"/>
-          </a:lnRef>
-          <a:fillRef idx="3">
-            <a:schemeClr val="accent1"/>
-          </a:fillRef>
-          <a:effectRef idx="2">
-            <a:schemeClr val="accent1"/>
-          </a:effectRef>
-          <a:fontRef idx="minor">
-            <a:schemeClr val="lt1"/>
-          </a:fontRef>
-        </p:style>
-        <p:txBody>
-          <a:bodyPr rtlCol="0" anchor="ctr" wrap="square"/>
-          <a:lstStyle/>
-          <a:p>
-            <a:pPr algn="ctr">
-              <a:defRPr sz="1200" b="1">
-                <a:solidFill>
-                  <a:srgbClr val="FFFFFF"/>
-                </a:solidFill>
-              </a:defRPr>
-            </a:pPr>
-            <a:r>
-              <a:t>🗺️ RouteOptimizer</a:t>
-            </a:r>
-          </a:p>
-          <a:p>
-            <a:pPr>
-              <a:defRPr sz="950">
-                <a:solidFill>
-                  <a:srgbClr val="6B7A99"/>
-                </a:solidFill>
-              </a:defRPr>
-            </a:pPr>
-            <a:r>
-              <a:t>Feed: MapmyIndia (Mappls) API</a:t>
-            </a:r>
-            <a:br/>
-            <a:r>
-              <a:t>Computes detours around blocked roads</a:t>
-            </a:r>
-          </a:p>
-        </p:txBody>
-      </p:sp>
-      <p:sp>
-        <p:nvSpPr>
-          <p:cNvPr id="10" name="Rounded Rectangle 9"/>
-          <p:cNvSpPr/>
-          <p:nvPr/>
-        </p:nvSpPr>
-        <p:spPr>
-          <a:xfrm>
-            <a:off x="4297680" y="3474720"/>
-            <a:ext cx="3383280" cy="1280160"/>
-          </a:xfrm>
-          <a:prstGeom prst="roundRect">
-            <a:avLst/>
-          </a:prstGeom>
-          <a:solidFill>
-            <a:srgbClr val="0F1420"/>
-          </a:solidFill>
-          <a:ln>
-            <a:solidFill>
-              <a:srgbClr val="00F0FF"/>
-            </a:solidFill>
-          </a:ln>
-        </p:spPr>
-        <p:style>
-          <a:lnRef idx="1">
-            <a:schemeClr val="accent1"/>
-          </a:lnRef>
-          <a:fillRef idx="3">
-            <a:schemeClr val="accent1"/>
-          </a:fillRef>
-          <a:effectRef idx="2">
-            <a:schemeClr val="accent1"/>
-          </a:effectRef>
-          <a:fontRef idx="minor">
-            <a:schemeClr val="lt1"/>
-          </a:fontRef>
-        </p:style>
-        <p:txBody>
-          <a:bodyPr rtlCol="0" anchor="ctr" wrap="square"/>
-          <a:lstStyle/>
-          <a:p>
-            <a:pPr algn="ctr">
-              <a:defRPr sz="1200" b="1">
-                <a:solidFill>
-                  <a:srgbClr val="FFFFFF"/>
-                </a:solidFill>
-              </a:defRPr>
-            </a:pPr>
-            <a:r>
-              <a:t>📱 AlertBroadcast</a:t>
-            </a:r>
-          </a:p>
-          <a:p>
-            <a:pPr>
-              <a:defRPr sz="950">
-                <a:solidFill>
-                  <a:srgbClr val="6B7A99"/>
-                </a:solidFill>
-              </a:defRPr>
-            </a:pPr>
-            <a:r>
-              <a:t>Feed: NDMA Sachet Gateway</a:t>
-            </a:r>
-            <a:br/>
-            <a:r>
-              <a:t>Formats &amp; dispatches multilingual CAP alerts</a:t>
-            </a:r>
-          </a:p>
-        </p:txBody>
-      </p:sp>
-      <p:sp>
-        <p:nvSpPr>
-          <p:cNvPr id="11" name="Rounded Rectangle 10"/>
-          <p:cNvSpPr/>
-          <p:nvPr/>
-        </p:nvSpPr>
-        <p:spPr>
-          <a:xfrm>
-            <a:off x="7863840" y="3474720"/>
-            <a:ext cx="3383280" cy="1280160"/>
-          </a:xfrm>
-          <a:prstGeom prst="roundRect">
-            <a:avLst/>
-          </a:prstGeom>
-          <a:solidFill>
-            <a:srgbClr val="0F1420"/>
-          </a:solidFill>
-          <a:ln>
-            <a:solidFill>
-              <a:srgbClr val="00F0FF"/>
-            </a:solidFill>
-          </a:ln>
-        </p:spPr>
-        <p:style>
-          <a:lnRef idx="1">
-            <a:schemeClr val="accent1"/>
-          </a:lnRef>
-          <a:fillRef idx="3">
-            <a:schemeClr val="accent1"/>
-          </a:fillRef>
-          <a:effectRef idx="2">
-            <a:schemeClr val="accent1"/>
-          </a:effectRef>
-          <a:fontRef idx="minor">
-            <a:schemeClr val="lt1"/>
-          </a:fontRef>
-        </p:style>
-        <p:txBody>
-          <a:bodyPr rtlCol="0" anchor="ctr" wrap="square"/>
-          <a:lstStyle/>
-          <a:p>
-            <a:pPr algn="ctr">
-              <a:defRPr sz="1200" b="1">
-                <a:solidFill>
-                  <a:srgbClr val="FFFFFF"/>
-                </a:solidFill>
-              </a:defRPr>
-            </a:pPr>
-            <a:r>
-              <a:t>🏥 MedResponse</a:t>
-            </a:r>
-          </a:p>
-          <a:p>
-            <a:pPr>
-              <a:defRPr sz="950">
-                <a:solidFill>
-                  <a:srgbClr val="6B7A99"/>
-                </a:solidFill>
-              </a:defRPr>
-            </a:pPr>
-            <a:r>
-              <a:t>Feed: 108 Health API</a:t>
-            </a:r>
-            <a:br/>
-            <a:r>
-              <a:t>Triages hospital ICU beds &amp; ambulances</a:t>
-            </a:r>
-          </a:p>
-        </p:txBody>
-      </p:sp>
-      <p:sp>
-        <p:nvSpPr>
-          <p:cNvPr id="12" name="Rounded Rectangle 11"/>
-          <p:cNvSpPr/>
-          <p:nvPr/>
-        </p:nvSpPr>
-        <p:spPr>
-          <a:xfrm>
-            <a:off x="731520" y="4937760"/>
-            <a:ext cx="3383280" cy="1280160"/>
-          </a:xfrm>
-          <a:prstGeom prst="roundRect">
-            <a:avLst/>
-          </a:prstGeom>
-          <a:solidFill>
-            <a:srgbClr val="0F1420"/>
-          </a:solidFill>
-          <a:ln>
-            <a:solidFill>
-              <a:srgbClr val="00F0FF"/>
-            </a:solidFill>
-          </a:ln>
-        </p:spPr>
-        <p:style>
-          <a:lnRef idx="1">
-            <a:schemeClr val="accent1"/>
-          </a:lnRef>
-          <a:fillRef idx="3">
-            <a:schemeClr val="accent1"/>
-          </a:fillRef>
-          <a:effectRef idx="2">
-            <a:schemeClr val="accent1"/>
-          </a:effectRef>
-          <a:fontRef idx="minor">
-            <a:schemeClr val="lt1"/>
-          </a:fontRef>
-        </p:style>
-        <p:txBody>
-          <a:bodyPr rtlCol="0" anchor="ctr" wrap="square"/>
-          <a:lstStyle/>
-          <a:p>
-            <a:pPr algn="ctr">
-              <a:defRPr sz="1200" b="1">
-                <a:solidFill>
-                  <a:srgbClr val="FFFFFF"/>
-                </a:solidFill>
-              </a:defRPr>
-            </a:pPr>
-            <a:r>
-              <a:t>👥 PopDensity</a:t>
-            </a:r>
-          </a:p>
-          <a:p>
-            <a:pPr>
-              <a:defRPr sz="950">
-                <a:solidFill>
-                  <a:srgbClr val="6B7A99"/>
-                </a:solidFill>
-              </a:defRPr>
-            </a:pPr>
-            <a:r>
-              <a:t>Feed: Census Spatial Polygons</a:t>
-            </a:r>
-            <a:br/>
-            <a:r>
-              <a:t>Estimates households in hazard zone</a:t>
-            </a:r>
-          </a:p>
-        </p:txBody>
-      </p:sp>
-      <p:sp>
-        <p:nvSpPr>
-          <p:cNvPr id="13" name="Rounded Rectangle 12"/>
-          <p:cNvSpPr/>
-          <p:nvPr/>
-        </p:nvSpPr>
-        <p:spPr>
-          <a:xfrm>
-            <a:off x="4297680" y="4937760"/>
-            <a:ext cx="3383280" cy="1280160"/>
-          </a:xfrm>
-          <a:prstGeom prst="roundRect">
-            <a:avLst/>
-          </a:prstGeom>
-          <a:solidFill>
-            <a:srgbClr val="0F1420"/>
-          </a:solidFill>
-          <a:ln>
-            <a:solidFill>
-              <a:srgbClr val="00F0FF"/>
-            </a:solidFill>
-          </a:ln>
-        </p:spPr>
-        <p:style>
-          <a:lnRef idx="1">
-            <a:schemeClr val="accent1"/>
-          </a:lnRef>
-          <a:fillRef idx="3">
-            <a:schemeClr val="accent1"/>
-          </a:fillRef>
-          <a:effectRef idx="2">
-            <a:schemeClr val="accent1"/>
-          </a:effectRef>
-          <a:fontRef idx="minor">
-            <a:schemeClr val="lt1"/>
-          </a:fontRef>
-        </p:style>
-        <p:txBody>
-          <a:bodyPr rtlCol="0" anchor="ctr" wrap="square"/>
-          <a:lstStyle/>
-          <a:p>
-            <a:pPr algn="ctr">
-              <a:defRPr sz="1200" b="1">
-                <a:solidFill>
-                  <a:srgbClr val="FFFFFF"/>
-                </a:solidFill>
-              </a:defRPr>
-            </a:pPr>
-            <a:r>
-              <a:t>🏗️ InfraWatch</a:t>
-            </a:r>
-          </a:p>
-          <a:p>
-            <a:pPr>
-              <a:defRPr sz="950">
-                <a:solidFill>
-                  <a:srgbClr val="6B7A99"/>
-                </a:solidFill>
-              </a:defRPr>
-            </a:pPr>
-            <a:r>
-              <a:t>Feed: NHAI &amp; Rail Sensors</a:t>
-            </a:r>
-            <a:br/>
-            <a:r>
-              <a:t>Monitors bridge integrity &amp; railway tracks</a:t>
-            </a:r>
-          </a:p>
-        </p:txBody>
-      </p:sp>
-      <p:sp>
-        <p:nvSpPr>
-          <p:cNvPr id="14" name="Rounded Rectangle 13"/>
-          <p:cNvSpPr/>
-          <p:nvPr/>
-        </p:nvSpPr>
-        <p:spPr>
-          <a:xfrm>
-            <a:off x="7863840" y="4937760"/>
-            <a:ext cx="3383280" cy="1280160"/>
-          </a:xfrm>
-          <a:prstGeom prst="roundRect">
-            <a:avLst/>
-          </a:prstGeom>
-          <a:solidFill>
-            <a:srgbClr val="0F1420"/>
+            <a:srgbClr val="0E121E"/>
           </a:solidFill>
           <a:ln>
             <a:solidFill>
@@ -6244,30 +7120,214 @@
           <a:lstStyle/>
           <a:p>
             <a:pPr algn="ctr">
-              <a:defRPr sz="1200" b="1">
-                <a:solidFill>
-                  <a:srgbClr val="FFFFFF"/>
-                </a:solidFill>
-              </a:defRPr>
-            </a:pPr>
-            <a:r>
-              <a:t>🎖️ Commander Core</a:t>
-            </a:r>
-          </a:p>
-          <a:p>
-            <a:pPr>
-              <a:defRPr sz="950">
-                <a:solidFill>
-                  <a:srgbClr val="6B7A99"/>
-                </a:solidFill>
-              </a:defRPr>
-            </a:pPr>
-            <a:r>
-              <a:t>Feed: Orchestrator Core</a:t>
-            </a:r>
-            <a:br/>
-            <a:r>
-              <a:t>Synthesizes data &amp; executes binding orders</a:t>
+              <a:defRPr sz="1300" b="1">
+                <a:solidFill>
+                  <a:srgbClr val="FF4D6A"/>
+                </a:solidFill>
+              </a:defRPr>
+            </a:pPr>
+            <a:r>
+              <a:t>TODAY: MANUAL PHONE CHAIN (100+ MIN)</a:t>
+            </a:r>
+          </a:p>
+          <a:p>
+            <a:pPr>
+              <a:defRPr sz="1050">
+                <a:solidFill>
+                  <a:srgbClr val="E8EDF5"/>
+                </a:solidFill>
+              </a:defRPr>
+            </a:pPr>
+            <a:r>
+              <a:t>1. IMD Doppler detects rainfall surge (T + 0m)</a:t>
+            </a:r>
+          </a:p>
+          <a:p>
+            <a:pPr>
+              <a:defRPr sz="1050">
+                <a:solidFill>
+                  <a:srgbClr val="E8EDF5"/>
+                </a:solidFill>
+              </a:defRPr>
+            </a:pPr>
+            <a:r>
+              <a:t>2. Fax/Email alert sent to DM office (T + 45m)</a:t>
+            </a:r>
+          </a:p>
+          <a:p>
+            <a:pPr>
+              <a:defRPr sz="1050">
+                <a:solidFill>
+                  <a:srgbClr val="E8EDF5"/>
+                </a:solidFill>
+              </a:defRPr>
+            </a:pPr>
+            <a:r>
+              <a:t>3. DM office calls CWC for river data (T + 80m)</a:t>
+            </a:r>
+          </a:p>
+          <a:p>
+            <a:pPr>
+              <a:defRPr sz="1050">
+                <a:solidFill>
+                  <a:srgbClr val="E8EDF5"/>
+                </a:solidFill>
+              </a:defRPr>
+            </a:pPr>
+            <a:r>
+              <a:t>4. NDRF dispatched via voice call (T + 95m)</a:t>
+            </a:r>
+          </a:p>
+          <a:p>
+            <a:pPr>
+              <a:defRPr sz="1050">
+                <a:solidFill>
+                  <a:srgbClr val="E8EDF5"/>
+                </a:solidFill>
+              </a:defRPr>
+            </a:pPr>
+            <a:r>
+              <a:t>5. Standard sirens blown (no route guidance)</a:t>
+            </a:r>
+          </a:p>
+          <a:p>
+            <a:br/>
+            <a:pPr>
+              <a:defRPr sz="1050">
+                <a:solidFill>
+                  <a:srgbClr val="E8EDF5"/>
+                </a:solidFill>
+              </a:defRPr>
+            </a:pPr>
+            <a:r>
+              <a:t>RESULT: 100+ minutes delay. Less than 10 min warning for families.</a:t>
+            </a:r>
+          </a:p>
+        </p:txBody>
+      </p:sp>
+      <p:sp>
+        <p:nvSpPr>
+          <p:cNvPr id="7" name="Rounded Rectangle 6"/>
+          <p:cNvSpPr/>
+          <p:nvPr/>
+        </p:nvSpPr>
+        <p:spPr>
+          <a:xfrm>
+            <a:off x="6217920" y="1920240"/>
+            <a:ext cx="5120640" cy="4389120"/>
+          </a:xfrm>
+          <a:prstGeom prst="roundRect">
+            <a:avLst/>
+          </a:prstGeom>
+          <a:solidFill>
+            <a:srgbClr val="0E121E"/>
+          </a:solidFill>
+          <a:ln>
+            <a:solidFill>
+              <a:srgbClr val="00E676"/>
+            </a:solidFill>
+          </a:ln>
+        </p:spPr>
+        <p:style>
+          <a:lnRef idx="1">
+            <a:schemeClr val="accent1"/>
+          </a:lnRef>
+          <a:fillRef idx="3">
+            <a:schemeClr val="accent1"/>
+          </a:fillRef>
+          <a:effectRef idx="2">
+            <a:schemeClr val="accent1"/>
+          </a:effectRef>
+          <a:fontRef idx="minor">
+            <a:schemeClr val="lt1"/>
+          </a:fontRef>
+        </p:style>
+        <p:txBody>
+          <a:bodyPr rtlCol="0" anchor="ctr" wrap="square"/>
+          <a:lstStyle/>
+          <a:p>
+            <a:pPr algn="ctr">
+              <a:defRPr sz="1300" b="1">
+                <a:solidFill>
+                  <a:srgbClr val="00E676"/>
+                </a:solidFill>
+              </a:defRPr>
+            </a:pPr>
+            <a:r>
+              <a:t>WITH XNEXUS: AUTONOMOUS MESH (&lt; 5 MIN)</a:t>
+            </a:r>
+          </a:p>
+          <a:p>
+            <a:pPr>
+              <a:defRPr sz="1050">
+                <a:solidFill>
+                  <a:srgbClr val="E8EDF5"/>
+                </a:solidFill>
+              </a:defRPr>
+            </a:pPr>
+            <a:r>
+              <a:t>1. IMD, CWC, GSI feeds ingested concurrently via MCP (T + 0s)</a:t>
+            </a:r>
+          </a:p>
+          <a:p>
+            <a:pPr>
+              <a:defRPr sz="1050">
+                <a:solidFill>
+                  <a:srgbClr val="E8EDF5"/>
+                </a:solidFill>
+              </a:defRPr>
+            </a:pPr>
+            <a:r>
+              <a:t>2. WeatherIntel &amp; HydroMonitor agents reason jointly (T + 15s)</a:t>
+            </a:r>
+          </a:p>
+          <a:p>
+            <a:pPr>
+              <a:defRPr sz="1050">
+                <a:solidFill>
+                  <a:srgbClr val="E8EDF5"/>
+                </a:solidFill>
+              </a:defRPr>
+            </a:pPr>
+            <a:r>
+              <a:t>3. RouteOptimizer maps detours around blocked NHAI roads (T + 30s)</a:t>
+            </a:r>
+          </a:p>
+          <a:p>
+            <a:pPr>
+              <a:defRPr sz="1050">
+                <a:solidFill>
+                  <a:srgbClr val="E8EDF5"/>
+                </a:solidFill>
+              </a:defRPr>
+            </a:pPr>
+            <a:r>
+              <a:t>4. MedResponse triages 108 ICU hospital bed availability (T + 45s)</a:t>
+            </a:r>
+          </a:p>
+          <a:p>
+            <a:pPr>
+              <a:defRPr sz="1050">
+                <a:solidFill>
+                  <a:srgbClr val="E8EDF5"/>
+                </a:solidFill>
+              </a:defRPr>
+            </a:pPr>
+            <a:r>
+              <a:t>5. NDMA Sachet cell broadcast sent to local towers (T + 60s)</a:t>
+            </a:r>
+          </a:p>
+          <a:p>
+            <a:br/>
+            <a:pPr>
+              <a:defRPr sz="1050">
+                <a:solidFill>
+                  <a:srgbClr val="E8EDF5"/>
+                </a:solidFill>
+              </a:defRPr>
+            </a:pPr>
+            <a:r>
+              <a:t>RESULT: Under 5 minutes total response. Automatic life-saving routing.</a:t>
             </a:r>
           </a:p>
         </p:txBody>
@@ -6342,7 +7402,7 @@
         <p:spPr>
           <a:xfrm>
             <a:off x="731520" y="365760"/>
-            <a:ext cx="10698480" cy="365760"/>
+            <a:ext cx="10698480" cy="320040"/>
           </a:xfrm>
           <a:prstGeom prst="rect">
             <a:avLst/>
@@ -6364,7 +7424,7 @@
               </a:defRPr>
             </a:pPr>
             <a:r>
-              <a:t>05 / CORE CAPABILITIES</a:t>
+              <a:t>05 / MULTI-AGENT ARCHITECTURE</a:t>
             </a:r>
           </a:p>
         </p:txBody>
@@ -6378,7 +7438,7 @@
         <p:spPr>
           <a:xfrm>
             <a:off x="731520" y="685800"/>
-            <a:ext cx="10698480" cy="731520"/>
+            <a:ext cx="10698480" cy="640080"/>
           </a:xfrm>
           <a:prstGeom prst="rect">
             <a:avLst/>
@@ -6392,7 +7452,7 @@
           <a:lstStyle/>
           <a:p>
             <a:pPr>
-              <a:defRPr sz="2600" b="1">
+              <a:defRPr sz="2500" b="1">
                 <a:solidFill>
                   <a:srgbClr val="FFFFFF"/>
                 </a:solidFill>
@@ -6400,7 +7460,7 @@
               </a:defRPr>
             </a:pPr>
             <a:r>
-              <a:t>Real Indian Telemetry Data Feeds</a:t>
+              <a:t>India-Focused 9-Agentic Framework</a:t>
             </a:r>
           </a:p>
         </p:txBody>
@@ -6413,8 +7473,8 @@
         </p:nvSpPr>
         <p:spPr>
           <a:xfrm>
-            <a:off x="731520" y="1371600"/>
-            <a:ext cx="10698480" cy="457200"/>
+            <a:off x="731520" y="1325880"/>
+            <a:ext cx="10698480" cy="502920"/>
           </a:xfrm>
           <a:prstGeom prst="rect">
             <a:avLst/>
@@ -6428,7 +7488,7 @@
           <a:lstStyle/>
           <a:p>
             <a:pPr>
-              <a:defRPr sz="1300">
+              <a:defRPr sz="1200">
                 <a:solidFill>
                   <a:srgbClr val="6B7A99"/>
                 </a:solidFill>
@@ -6436,7 +7496,7 @@
               </a:defRPr>
             </a:pPr>
             <a:r>
-              <a:t>Direct integration with statutory Indian emergency data providers.</a:t>
+              <a:t>Nine specialized AI agents collaborating in real time using Indian government telemetry.</a:t>
             </a:r>
           </a:p>
         </p:txBody>
@@ -6449,14 +7509,14 @@
         </p:nvSpPr>
         <p:spPr>
           <a:xfrm>
-            <a:off x="731520" y="2011680"/>
-            <a:ext cx="3383280" cy="1920240"/>
+            <a:off x="731520" y="1920240"/>
+            <a:ext cx="3383280" cy="1325880"/>
           </a:xfrm>
           <a:prstGeom prst="roundRect">
             <a:avLst/>
           </a:prstGeom>
           <a:solidFill>
-            <a:srgbClr val="0F1420"/>
+            <a:srgbClr val="0E121E"/>
           </a:solidFill>
           <a:ln>
             <a:solidFill>
@@ -6483,27 +7543,30 @@
           <a:lstStyle/>
           <a:p>
             <a:pPr algn="ctr">
-              <a:defRPr sz="1300" b="1">
-                <a:solidFill>
-                  <a:srgbClr val="00F0FF"/>
-                </a:solidFill>
-              </a:defRPr>
-            </a:pPr>
-            <a:r>
-              <a:t>01. IMD Doppler Weather Radar</a:t>
-            </a:r>
-          </a:p>
-          <a:p>
-            <a:br/>
-            <a:pPr>
-              <a:defRPr sz="1100">
-                <a:solidFill>
-                  <a:srgbClr val="E8EDF5"/>
-                </a:solidFill>
-              </a:defRPr>
-            </a:pPr>
-            <a:r>
-              <a:t>Real-time reflectivity (Z factor) and cloud azimuth density mapping.</a:t>
+              <a:defRPr sz="1200" b="1">
+                <a:solidFill>
+                  <a:srgbClr val="FFFFFF"/>
+                </a:solidFill>
+              </a:defRPr>
+            </a:pPr>
+            <a:r>
+              <a:t>🛰️ WeatherIntel</a:t>
+            </a:r>
+          </a:p>
+          <a:p>
+            <a:pPr>
+              <a:defRPr sz="950">
+                <a:solidFill>
+                  <a:srgbClr val="6B7A99"/>
+                </a:solidFill>
+              </a:defRPr>
+            </a:pPr>
+            <a:r>
+              <a:t>Feed: IMD Doppler Radar &amp; INSAT-3D</a:t>
+            </a:r>
+            <a:br/>
+            <a:r>
+              <a:t>Tracks cloud reflectivity &amp; rain rate</a:t>
             </a:r>
           </a:p>
         </p:txBody>
@@ -6516,14 +7579,14 @@
         </p:nvSpPr>
         <p:spPr>
           <a:xfrm>
-            <a:off x="4297680" y="2011680"/>
-            <a:ext cx="3383280" cy="1920240"/>
+            <a:off x="4297680" y="1920240"/>
+            <a:ext cx="3383280" cy="1325880"/>
           </a:xfrm>
           <a:prstGeom prst="roundRect">
             <a:avLst/>
           </a:prstGeom>
           <a:solidFill>
-            <a:srgbClr val="0F1420"/>
+            <a:srgbClr val="0E121E"/>
           </a:solidFill>
           <a:ln>
             <a:solidFill>
@@ -6550,27 +7613,30 @@
           <a:lstStyle/>
           <a:p>
             <a:pPr algn="ctr">
-              <a:defRPr sz="1300" b="1">
-                <a:solidFill>
-                  <a:srgbClr val="00F0FF"/>
-                </a:solidFill>
-              </a:defRPr>
-            </a:pPr>
-            <a:r>
-              <a:t>02. CWC River Gauge Network</a:t>
-            </a:r>
-          </a:p>
-          <a:p>
-            <a:br/>
-            <a:pPr>
-              <a:defRPr sz="1100">
-                <a:solidFill>
-                  <a:srgbClr val="E8EDF5"/>
-                </a:solidFill>
-              </a:defRPr>
-            </a:pPr>
-            <a:r>
-              <a:t>Scrapes station water levels, discharge cusecs, and statutory danger marks.</a:t>
+              <a:defRPr sz="1200" b="1">
+                <a:solidFill>
+                  <a:srgbClr val="FFFFFF"/>
+                </a:solidFill>
+              </a:defRPr>
+            </a:pPr>
+            <a:r>
+              <a:t>🌊 HydroMonitor</a:t>
+            </a:r>
+          </a:p>
+          <a:p>
+            <a:pPr>
+              <a:defRPr sz="950">
+                <a:solidFill>
+                  <a:srgbClr val="6B7A99"/>
+                </a:solidFill>
+              </a:defRPr>
+            </a:pPr>
+            <a:r>
+              <a:t>Feed: CWC River Gauges</a:t>
+            </a:r>
+            <a:br/>
+            <a:r>
+              <a:t>Monitors river heights &amp; danger marks</a:t>
             </a:r>
           </a:p>
         </p:txBody>
@@ -6583,18 +7649,18 @@
         </p:nvSpPr>
         <p:spPr>
           <a:xfrm>
-            <a:off x="7863840" y="2011680"/>
-            <a:ext cx="3383280" cy="1920240"/>
+            <a:off x="7863840" y="1920240"/>
+            <a:ext cx="3383280" cy="1325880"/>
           </a:xfrm>
           <a:prstGeom prst="roundRect">
             <a:avLst/>
           </a:prstGeom>
           <a:solidFill>
-            <a:srgbClr val="0F1420"/>
+            <a:srgbClr val="0E121E"/>
           </a:solidFill>
           <a:ln>
             <a:solidFill>
-              <a:srgbClr val="7B61FF"/>
+              <a:srgbClr val="00F0FF"/>
             </a:solidFill>
           </a:ln>
         </p:spPr>
@@ -6617,27 +7683,30 @@
           <a:lstStyle/>
           <a:p>
             <a:pPr algn="ctr">
-              <a:defRPr sz="1300" b="1">
-                <a:solidFill>
-                  <a:srgbClr val="7B61FF"/>
-                </a:solidFill>
-              </a:defRPr>
-            </a:pPr>
-            <a:r>
-              <a:t>03. GSI Landslide Susceptibility</a:t>
-            </a:r>
-          </a:p>
-          <a:p>
-            <a:br/>
-            <a:pPr>
-              <a:defRPr sz="1100">
-                <a:solidFill>
-                  <a:srgbClr val="E8EDF5"/>
-                </a:solidFill>
-              </a:defRPr>
-            </a:pPr>
-            <a:r>
-              <a:t>Evaluates soil saturation, shear strength, and hill slope stability.</a:t>
+              <a:defRPr sz="1200" b="1">
+                <a:solidFill>
+                  <a:srgbClr val="FFFFFF"/>
+                </a:solidFill>
+              </a:defRPr>
+            </a:pPr>
+            <a:r>
+              <a:t>⛰️ GeoRisk</a:t>
+            </a:r>
+          </a:p>
+          <a:p>
+            <a:pPr>
+              <a:defRPr sz="950">
+                <a:solidFill>
+                  <a:srgbClr val="6B7A99"/>
+                </a:solidFill>
+              </a:defRPr>
+            </a:pPr>
+            <a:r>
+              <a:t>Feed: GSI Landslide Indices</a:t>
+            </a:r>
+            <a:br/>
+            <a:r>
+              <a:t>Calculates soil shear &amp; slope hazard</a:t>
             </a:r>
           </a:p>
         </p:txBody>
@@ -6650,18 +7719,18 @@
         </p:nvSpPr>
         <p:spPr>
           <a:xfrm>
-            <a:off x="731520" y="4206240"/>
-            <a:ext cx="3383280" cy="1920240"/>
+            <a:off x="731520" y="3383280"/>
+            <a:ext cx="3383280" cy="1325880"/>
           </a:xfrm>
           <a:prstGeom prst="roundRect">
             <a:avLst/>
           </a:prstGeom>
           <a:solidFill>
-            <a:srgbClr val="0F1420"/>
+            <a:srgbClr val="0E121E"/>
           </a:solidFill>
           <a:ln>
             <a:solidFill>
-              <a:srgbClr val="7B61FF"/>
+              <a:srgbClr val="00F0FF"/>
             </a:solidFill>
           </a:ln>
         </p:spPr>
@@ -6684,27 +7753,30 @@
           <a:lstStyle/>
           <a:p>
             <a:pPr algn="ctr">
-              <a:defRPr sz="1300" b="1">
-                <a:solidFill>
-                  <a:srgbClr val="7B61FF"/>
-                </a:solidFill>
-              </a:defRPr>
-            </a:pPr>
-            <a:r>
-              <a:t>04. MapmyIndia Detour Engine</a:t>
-            </a:r>
-          </a:p>
-          <a:p>
-            <a:br/>
-            <a:pPr>
-              <a:defRPr sz="1100">
-                <a:solidFill>
-                  <a:srgbClr val="E8EDF5"/>
-                </a:solidFill>
-              </a:defRPr>
-            </a:pPr>
-            <a:r>
-              <a:t>Autonomous pathfinding rerouting rescue fleets away from NHAI landslides.</a:t>
+              <a:defRPr sz="1200" b="1">
+                <a:solidFill>
+                  <a:srgbClr val="FFFFFF"/>
+                </a:solidFill>
+              </a:defRPr>
+            </a:pPr>
+            <a:r>
+              <a:t>🗺️ RouteOptimizer</a:t>
+            </a:r>
+          </a:p>
+          <a:p>
+            <a:pPr>
+              <a:defRPr sz="950">
+                <a:solidFill>
+                  <a:srgbClr val="6B7A99"/>
+                </a:solidFill>
+              </a:defRPr>
+            </a:pPr>
+            <a:r>
+              <a:t>Feed: MapmyIndia (Mappls) API</a:t>
+            </a:r>
+            <a:br/>
+            <a:r>
+              <a:t>Computes detours around blocked roads</a:t>
             </a:r>
           </a:p>
         </p:txBody>
@@ -6717,14 +7789,294 @@
         </p:nvSpPr>
         <p:spPr>
           <a:xfrm>
-            <a:off x="4297680" y="4206240"/>
-            <a:ext cx="3383280" cy="1920240"/>
+            <a:off x="4297680" y="3383280"/>
+            <a:ext cx="3383280" cy="1325880"/>
           </a:xfrm>
           <a:prstGeom prst="roundRect">
             <a:avLst/>
           </a:prstGeom>
           <a:solidFill>
-            <a:srgbClr val="0F1420"/>
+            <a:srgbClr val="0E121E"/>
+          </a:solidFill>
+          <a:ln>
+            <a:solidFill>
+              <a:srgbClr val="00F0FF"/>
+            </a:solidFill>
+          </a:ln>
+        </p:spPr>
+        <p:style>
+          <a:lnRef idx="1">
+            <a:schemeClr val="accent1"/>
+          </a:lnRef>
+          <a:fillRef idx="3">
+            <a:schemeClr val="accent1"/>
+          </a:fillRef>
+          <a:effectRef idx="2">
+            <a:schemeClr val="accent1"/>
+          </a:effectRef>
+          <a:fontRef idx="minor">
+            <a:schemeClr val="lt1"/>
+          </a:fontRef>
+        </p:style>
+        <p:txBody>
+          <a:bodyPr rtlCol="0" anchor="ctr" wrap="square"/>
+          <a:lstStyle/>
+          <a:p>
+            <a:pPr algn="ctr">
+              <a:defRPr sz="1200" b="1">
+                <a:solidFill>
+                  <a:srgbClr val="FFFFFF"/>
+                </a:solidFill>
+              </a:defRPr>
+            </a:pPr>
+            <a:r>
+              <a:t>📱 AlertBroadcast</a:t>
+            </a:r>
+          </a:p>
+          <a:p>
+            <a:pPr>
+              <a:defRPr sz="950">
+                <a:solidFill>
+                  <a:srgbClr val="6B7A99"/>
+                </a:solidFill>
+              </a:defRPr>
+            </a:pPr>
+            <a:r>
+              <a:t>Feed: NDMA Sachet Gateway</a:t>
+            </a:r>
+            <a:br/>
+            <a:r>
+              <a:t>Formats &amp; dispatches multilingual CAP alerts</a:t>
+            </a:r>
+          </a:p>
+        </p:txBody>
+      </p:sp>
+      <p:sp>
+        <p:nvSpPr>
+          <p:cNvPr id="11" name="Rounded Rectangle 10"/>
+          <p:cNvSpPr/>
+          <p:nvPr/>
+        </p:nvSpPr>
+        <p:spPr>
+          <a:xfrm>
+            <a:off x="7863840" y="3383280"/>
+            <a:ext cx="3383280" cy="1325880"/>
+          </a:xfrm>
+          <a:prstGeom prst="roundRect">
+            <a:avLst/>
+          </a:prstGeom>
+          <a:solidFill>
+            <a:srgbClr val="0E121E"/>
+          </a:solidFill>
+          <a:ln>
+            <a:solidFill>
+              <a:srgbClr val="00F0FF"/>
+            </a:solidFill>
+          </a:ln>
+        </p:spPr>
+        <p:style>
+          <a:lnRef idx="1">
+            <a:schemeClr val="accent1"/>
+          </a:lnRef>
+          <a:fillRef idx="3">
+            <a:schemeClr val="accent1"/>
+          </a:fillRef>
+          <a:effectRef idx="2">
+            <a:schemeClr val="accent1"/>
+          </a:effectRef>
+          <a:fontRef idx="minor">
+            <a:schemeClr val="lt1"/>
+          </a:fontRef>
+        </p:style>
+        <p:txBody>
+          <a:bodyPr rtlCol="0" anchor="ctr" wrap="square"/>
+          <a:lstStyle/>
+          <a:p>
+            <a:pPr algn="ctr">
+              <a:defRPr sz="1200" b="1">
+                <a:solidFill>
+                  <a:srgbClr val="FFFFFF"/>
+                </a:solidFill>
+              </a:defRPr>
+            </a:pPr>
+            <a:r>
+              <a:t>🏥 MedResponse</a:t>
+            </a:r>
+          </a:p>
+          <a:p>
+            <a:pPr>
+              <a:defRPr sz="950">
+                <a:solidFill>
+                  <a:srgbClr val="6B7A99"/>
+                </a:solidFill>
+              </a:defRPr>
+            </a:pPr>
+            <a:r>
+              <a:t>Feed: 108 Health API</a:t>
+            </a:r>
+            <a:br/>
+            <a:r>
+              <a:t>Triages hospital ICU beds &amp; ambulances</a:t>
+            </a:r>
+          </a:p>
+        </p:txBody>
+      </p:sp>
+      <p:sp>
+        <p:nvSpPr>
+          <p:cNvPr id="12" name="Rounded Rectangle 11"/>
+          <p:cNvSpPr/>
+          <p:nvPr/>
+        </p:nvSpPr>
+        <p:spPr>
+          <a:xfrm>
+            <a:off x="731520" y="4846320"/>
+            <a:ext cx="3383280" cy="1325880"/>
+          </a:xfrm>
+          <a:prstGeom prst="roundRect">
+            <a:avLst/>
+          </a:prstGeom>
+          <a:solidFill>
+            <a:srgbClr val="0E121E"/>
+          </a:solidFill>
+          <a:ln>
+            <a:solidFill>
+              <a:srgbClr val="00F0FF"/>
+            </a:solidFill>
+          </a:ln>
+        </p:spPr>
+        <p:style>
+          <a:lnRef idx="1">
+            <a:schemeClr val="accent1"/>
+          </a:lnRef>
+          <a:fillRef idx="3">
+            <a:schemeClr val="accent1"/>
+          </a:fillRef>
+          <a:effectRef idx="2">
+            <a:schemeClr val="accent1"/>
+          </a:effectRef>
+          <a:fontRef idx="minor">
+            <a:schemeClr val="lt1"/>
+          </a:fontRef>
+        </p:style>
+        <p:txBody>
+          <a:bodyPr rtlCol="0" anchor="ctr" wrap="square"/>
+          <a:lstStyle/>
+          <a:p>
+            <a:pPr algn="ctr">
+              <a:defRPr sz="1200" b="1">
+                <a:solidFill>
+                  <a:srgbClr val="FFFFFF"/>
+                </a:solidFill>
+              </a:defRPr>
+            </a:pPr>
+            <a:r>
+              <a:t>👥 PopDensity</a:t>
+            </a:r>
+          </a:p>
+          <a:p>
+            <a:pPr>
+              <a:defRPr sz="950">
+                <a:solidFill>
+                  <a:srgbClr val="6B7A99"/>
+                </a:solidFill>
+              </a:defRPr>
+            </a:pPr>
+            <a:r>
+              <a:t>Feed: Census Spatial Polygons</a:t>
+            </a:r>
+            <a:br/>
+            <a:r>
+              <a:t>Estimates households in hazard zone</a:t>
+            </a:r>
+          </a:p>
+        </p:txBody>
+      </p:sp>
+      <p:sp>
+        <p:nvSpPr>
+          <p:cNvPr id="13" name="Rounded Rectangle 12"/>
+          <p:cNvSpPr/>
+          <p:nvPr/>
+        </p:nvSpPr>
+        <p:spPr>
+          <a:xfrm>
+            <a:off x="4297680" y="4846320"/>
+            <a:ext cx="3383280" cy="1325880"/>
+          </a:xfrm>
+          <a:prstGeom prst="roundRect">
+            <a:avLst/>
+          </a:prstGeom>
+          <a:solidFill>
+            <a:srgbClr val="0E121E"/>
+          </a:solidFill>
+          <a:ln>
+            <a:solidFill>
+              <a:srgbClr val="00F0FF"/>
+            </a:solidFill>
+          </a:ln>
+        </p:spPr>
+        <p:style>
+          <a:lnRef idx="1">
+            <a:schemeClr val="accent1"/>
+          </a:lnRef>
+          <a:fillRef idx="3">
+            <a:schemeClr val="accent1"/>
+          </a:fillRef>
+          <a:effectRef idx="2">
+            <a:schemeClr val="accent1"/>
+          </a:effectRef>
+          <a:fontRef idx="minor">
+            <a:schemeClr val="lt1"/>
+          </a:fontRef>
+        </p:style>
+        <p:txBody>
+          <a:bodyPr rtlCol="0" anchor="ctr" wrap="square"/>
+          <a:lstStyle/>
+          <a:p>
+            <a:pPr algn="ctr">
+              <a:defRPr sz="1200" b="1">
+                <a:solidFill>
+                  <a:srgbClr val="FFFFFF"/>
+                </a:solidFill>
+              </a:defRPr>
+            </a:pPr>
+            <a:r>
+              <a:t>🏗️ InfraWatch</a:t>
+            </a:r>
+          </a:p>
+          <a:p>
+            <a:pPr>
+              <a:defRPr sz="950">
+                <a:solidFill>
+                  <a:srgbClr val="6B7A99"/>
+                </a:solidFill>
+              </a:defRPr>
+            </a:pPr>
+            <a:r>
+              <a:t>Feed: NHAI &amp; Rail Sensors</a:t>
+            </a:r>
+            <a:br/>
+            <a:r>
+              <a:t>Monitors bridge integrity &amp; railway tracks</a:t>
+            </a:r>
+          </a:p>
+        </p:txBody>
+      </p:sp>
+      <p:sp>
+        <p:nvSpPr>
+          <p:cNvPr id="14" name="Rounded Rectangle 13"/>
+          <p:cNvSpPr/>
+          <p:nvPr/>
+        </p:nvSpPr>
+        <p:spPr>
+          <a:xfrm>
+            <a:off x="7863840" y="4846320"/>
+            <a:ext cx="3383280" cy="1325880"/>
+          </a:xfrm>
+          <a:prstGeom prst="roundRect">
+            <a:avLst/>
+          </a:prstGeom>
+          <a:solidFill>
+            <a:srgbClr val="0E121E"/>
           </a:solidFill>
           <a:ln>
             <a:solidFill>
@@ -6751,94 +8103,30 @@
           <a:lstStyle/>
           <a:p>
             <a:pPr algn="ctr">
-              <a:defRPr sz="1300" b="1">
-                <a:solidFill>
-                  <a:srgbClr val="FF4D6A"/>
-                </a:solidFill>
-              </a:defRPr>
-            </a:pPr>
-            <a:r>
-              <a:t>05. NDMA Sachet Cell Broadcast</a:t>
-            </a:r>
-          </a:p>
-          <a:p>
-            <a:br/>
-            <a:pPr>
-              <a:defRPr sz="1100">
-                <a:solidFill>
-                  <a:srgbClr val="E8EDF5"/>
-                </a:solidFill>
-              </a:defRPr>
-            </a:pPr>
-            <a:r>
-              <a:t>Multilingual cell-tower SMS warnings forced to phones in hazard polygons.</a:t>
-            </a:r>
-          </a:p>
-        </p:txBody>
-      </p:sp>
-      <p:sp>
-        <p:nvSpPr>
-          <p:cNvPr id="11" name="Rounded Rectangle 10"/>
-          <p:cNvSpPr/>
-          <p:nvPr/>
-        </p:nvSpPr>
-        <p:spPr>
-          <a:xfrm>
-            <a:off x="7863840" y="4206240"/>
-            <a:ext cx="3383280" cy="1920240"/>
-          </a:xfrm>
-          <a:prstGeom prst="roundRect">
-            <a:avLst/>
-          </a:prstGeom>
-          <a:solidFill>
-            <a:srgbClr val="0F1420"/>
-          </a:solidFill>
-          <a:ln>
-            <a:solidFill>
-              <a:srgbClr val="00E676"/>
-            </a:solidFill>
-          </a:ln>
-        </p:spPr>
-        <p:style>
-          <a:lnRef idx="1">
-            <a:schemeClr val="accent1"/>
-          </a:lnRef>
-          <a:fillRef idx="3">
-            <a:schemeClr val="accent1"/>
-          </a:fillRef>
-          <a:effectRef idx="2">
-            <a:schemeClr val="accent1"/>
-          </a:effectRef>
-          <a:fontRef idx="minor">
-            <a:schemeClr val="lt1"/>
-          </a:fontRef>
-        </p:style>
-        <p:txBody>
-          <a:bodyPr rtlCol="0" anchor="ctr" wrap="square"/>
-          <a:lstStyle/>
-          <a:p>
-            <a:pPr algn="ctr">
-              <a:defRPr sz="1300" b="1">
-                <a:solidFill>
-                  <a:srgbClr val="00E676"/>
-                </a:solidFill>
-              </a:defRPr>
-            </a:pPr>
-            <a:r>
-              <a:t>06. 108 Emergency Health Triage</a:t>
-            </a:r>
-          </a:p>
-          <a:p>
-            <a:br/>
-            <a:pPr>
-              <a:defRPr sz="1100">
-                <a:solidFill>
-                  <a:srgbClr val="E8EDF5"/>
-                </a:solidFill>
-              </a:defRPr>
-            </a:pPr>
-            <a:r>
-              <a:t>Real-time ICU/trauma bed availability matrix and ambulance dispatch.</a:t>
+              <a:defRPr sz="1200" b="1">
+                <a:solidFill>
+                  <a:srgbClr val="FFFFFF"/>
+                </a:solidFill>
+              </a:defRPr>
+            </a:pPr>
+            <a:r>
+              <a:t>🎖️ Commander Core</a:t>
+            </a:r>
+          </a:p>
+          <a:p>
+            <a:pPr>
+              <a:defRPr sz="950">
+                <a:solidFill>
+                  <a:srgbClr val="6B7A99"/>
+                </a:solidFill>
+              </a:defRPr>
+            </a:pPr>
+            <a:r>
+              <a:t>Feed: Orchestrator Core</a:t>
+            </a:r>
+            <a:br/>
+            <a:r>
+              <a:t>Synthesizes data &amp; executes binding orders</a:t>
             </a:r>
           </a:p>
         </p:txBody>
@@ -6913,7 +8201,7 @@
         <p:spPr>
           <a:xfrm>
             <a:off x="731520" y="365760"/>
-            <a:ext cx="10698480" cy="365760"/>
+            <a:ext cx="10698480" cy="320040"/>
           </a:xfrm>
           <a:prstGeom prst="rect">
             <a:avLst/>
@@ -6935,7 +8223,7 @@
               </a:defRPr>
             </a:pPr>
             <a:r>
-              <a:t>06 / THE 'WOW' USP</a:t>
+              <a:t>06 / CORE CAPABILITIES</a:t>
             </a:r>
           </a:p>
         </p:txBody>
@@ -6949,7 +8237,7 @@
         <p:spPr>
           <a:xfrm>
             <a:off x="731520" y="685800"/>
-            <a:ext cx="10698480" cy="731520"/>
+            <a:ext cx="10698480" cy="640080"/>
           </a:xfrm>
           <a:prstGeom prst="rect">
             <a:avLst/>
@@ -6963,7 +8251,7 @@
           <a:lstStyle/>
           <a:p>
             <a:pPr>
-              <a:defRPr sz="2600" b="1">
+              <a:defRPr sz="2500" b="1">
                 <a:solidFill>
                   <a:srgbClr val="FFFFFF"/>
                 </a:solidFill>
@@ -6971,7 +8259,7 @@
               </a:defRPr>
             </a:pPr>
             <a:r>
-              <a:t>Beyond Alerting: Real-Data Autonomous Decisions</a:t>
+              <a:t>Real Indian Telemetry Data Feeds</a:t>
             </a:r>
           </a:p>
         </p:txBody>
@@ -6984,8 +8272,8 @@
         </p:nvSpPr>
         <p:spPr>
           <a:xfrm>
-            <a:off x="731520" y="1371600"/>
-            <a:ext cx="10698480" cy="457200"/>
+            <a:off x="731520" y="1325880"/>
+            <a:ext cx="10698480" cy="502920"/>
           </a:xfrm>
           <a:prstGeom prst="rect">
             <a:avLst/>
@@ -6999,7 +8287,7 @@
           <a:lstStyle/>
           <a:p>
             <a:pPr>
-              <a:defRPr sz="1300">
+              <a:defRPr sz="1200">
                 <a:solidFill>
                   <a:srgbClr val="6B7A99"/>
                 </a:solidFill>
@@ -7007,7 +8295,7 @@
               </a:defRPr>
             </a:pPr>
             <a:r>
-              <a:t>Why XNexus-CrisisOS stands out from legacy dashboard software.</a:t>
+              <a:t>Direct integration with statutory Indian emergency data providers.</a:t>
             </a:r>
           </a:p>
         </p:txBody>
@@ -7020,14 +8308,148 @@
         </p:nvSpPr>
         <p:spPr>
           <a:xfrm>
-            <a:off x="731520" y="2011680"/>
+            <a:off x="731520" y="1920240"/>
             <a:ext cx="3383280" cy="1920240"/>
           </a:xfrm>
           <a:prstGeom prst="roundRect">
             <a:avLst/>
           </a:prstGeom>
           <a:solidFill>
-            <a:srgbClr val="0F1420"/>
+            <a:srgbClr val="0E121E"/>
+          </a:solidFill>
+          <a:ln>
+            <a:solidFill>
+              <a:srgbClr val="00F0FF"/>
+            </a:solidFill>
+          </a:ln>
+        </p:spPr>
+        <p:style>
+          <a:lnRef idx="1">
+            <a:schemeClr val="accent1"/>
+          </a:lnRef>
+          <a:fillRef idx="3">
+            <a:schemeClr val="accent1"/>
+          </a:fillRef>
+          <a:effectRef idx="2">
+            <a:schemeClr val="accent1"/>
+          </a:effectRef>
+          <a:fontRef idx="minor">
+            <a:schemeClr val="lt1"/>
+          </a:fontRef>
+        </p:style>
+        <p:txBody>
+          <a:bodyPr rtlCol="0" anchor="ctr" wrap="square"/>
+          <a:lstStyle/>
+          <a:p>
+            <a:pPr algn="ctr">
+              <a:defRPr sz="1250" b="1">
+                <a:solidFill>
+                  <a:srgbClr val="00F0FF"/>
+                </a:solidFill>
+              </a:defRPr>
+            </a:pPr>
+            <a:r>
+              <a:t>01. IMD Doppler Weather Radar</a:t>
+            </a:r>
+          </a:p>
+          <a:p>
+            <a:br/>
+            <a:pPr>
+              <a:defRPr sz="1050">
+                <a:solidFill>
+                  <a:srgbClr val="E8EDF5"/>
+                </a:solidFill>
+              </a:defRPr>
+            </a:pPr>
+            <a:r>
+              <a:t>Real-time reflectivity (Z factor) and cloud azimuth density mapping.</a:t>
+            </a:r>
+          </a:p>
+        </p:txBody>
+      </p:sp>
+      <p:sp>
+        <p:nvSpPr>
+          <p:cNvPr id="7" name="Rounded Rectangle 6"/>
+          <p:cNvSpPr/>
+          <p:nvPr/>
+        </p:nvSpPr>
+        <p:spPr>
+          <a:xfrm>
+            <a:off x="4297680" y="1920240"/>
+            <a:ext cx="3383280" cy="1920240"/>
+          </a:xfrm>
+          <a:prstGeom prst="roundRect">
+            <a:avLst/>
+          </a:prstGeom>
+          <a:solidFill>
+            <a:srgbClr val="0E121E"/>
+          </a:solidFill>
+          <a:ln>
+            <a:solidFill>
+              <a:srgbClr val="00F0FF"/>
+            </a:solidFill>
+          </a:ln>
+        </p:spPr>
+        <p:style>
+          <a:lnRef idx="1">
+            <a:schemeClr val="accent1"/>
+          </a:lnRef>
+          <a:fillRef idx="3">
+            <a:schemeClr val="accent1"/>
+          </a:fillRef>
+          <a:effectRef idx="2">
+            <a:schemeClr val="accent1"/>
+          </a:effectRef>
+          <a:fontRef idx="minor">
+            <a:schemeClr val="lt1"/>
+          </a:fontRef>
+        </p:style>
+        <p:txBody>
+          <a:bodyPr rtlCol="0" anchor="ctr" wrap="square"/>
+          <a:lstStyle/>
+          <a:p>
+            <a:pPr algn="ctr">
+              <a:defRPr sz="1250" b="1">
+                <a:solidFill>
+                  <a:srgbClr val="00F0FF"/>
+                </a:solidFill>
+              </a:defRPr>
+            </a:pPr>
+            <a:r>
+              <a:t>02. CWC River Gauge Network</a:t>
+            </a:r>
+          </a:p>
+          <a:p>
+            <a:br/>
+            <a:pPr>
+              <a:defRPr sz="1050">
+                <a:solidFill>
+                  <a:srgbClr val="E8EDF5"/>
+                </a:solidFill>
+              </a:defRPr>
+            </a:pPr>
+            <a:r>
+              <a:t>Scrapes station water levels, discharge cusecs, and statutory danger marks.</a:t>
+            </a:r>
+          </a:p>
+        </p:txBody>
+      </p:sp>
+      <p:sp>
+        <p:nvSpPr>
+          <p:cNvPr id="8" name="Rounded Rectangle 7"/>
+          <p:cNvSpPr/>
+          <p:nvPr/>
+        </p:nvSpPr>
+        <p:spPr>
+          <a:xfrm>
+            <a:off x="7863840" y="1920240"/>
+            <a:ext cx="3383280" cy="1920240"/>
+          </a:xfrm>
+          <a:prstGeom prst="roundRect">
+            <a:avLst/>
+          </a:prstGeom>
+          <a:solidFill>
+            <a:srgbClr val="0E121E"/>
           </a:solidFill>
           <a:ln>
             <a:solidFill>
@@ -7054,114 +8476,47 @@
           <a:lstStyle/>
           <a:p>
             <a:pPr algn="ctr">
-              <a:defRPr sz="1300" b="1">
-                <a:solidFill>
-                  <a:srgbClr val="FFFFFF"/>
-                </a:solidFill>
-              </a:defRPr>
-            </a:pPr>
-            <a:r>
-              <a:t>01. Multi-Agency Data Fusion</a:t>
-            </a:r>
-          </a:p>
-          <a:p>
-            <a:br/>
-            <a:pPr>
-              <a:defRPr sz="1100">
+              <a:defRPr sz="1250" b="1">
+                <a:solidFill>
+                  <a:srgbClr val="7B61FF"/>
+                </a:solidFill>
+              </a:defRPr>
+            </a:pPr>
+            <a:r>
+              <a:t>03. GSI Landslide Susceptibility</a:t>
+            </a:r>
+          </a:p>
+          <a:p>
+            <a:br/>
+            <a:pPr>
+              <a:defRPr sz="1050">
                 <a:solidFill>
                   <a:srgbClr val="E8EDF5"/>
                 </a:solidFill>
               </a:defRPr>
             </a:pPr>
             <a:r>
-              <a:t>Agents from IMD, CWC, NDRF, MapmyIndia, and 108-Health share a semantic memory space.</a:t>
-            </a:r>
-          </a:p>
-        </p:txBody>
-      </p:sp>
-      <p:sp>
-        <p:nvSpPr>
-          <p:cNvPr id="7" name="Rounded Rectangle 6"/>
+              <a:t>Evaluates soil saturation, shear strength, and hill slope stability.</a:t>
+            </a:r>
+          </a:p>
+        </p:txBody>
+      </p:sp>
+      <p:sp>
+        <p:nvSpPr>
+          <p:cNvPr id="9" name="Rounded Rectangle 8"/>
           <p:cNvSpPr/>
           <p:nvPr/>
         </p:nvSpPr>
         <p:spPr>
           <a:xfrm>
-            <a:off x="4297680" y="2011680"/>
+            <a:off x="731520" y="4114800"/>
             <a:ext cx="3383280" cy="1920240"/>
           </a:xfrm>
           <a:prstGeom prst="roundRect">
             <a:avLst/>
           </a:prstGeom>
           <a:solidFill>
-            <a:srgbClr val="0F1420"/>
-          </a:solidFill>
-          <a:ln>
-            <a:solidFill>
-              <a:srgbClr val="00F0FF"/>
-            </a:solidFill>
-          </a:ln>
-        </p:spPr>
-        <p:style>
-          <a:lnRef idx="1">
-            <a:schemeClr val="accent1"/>
-          </a:lnRef>
-          <a:fillRef idx="3">
-            <a:schemeClr val="accent1"/>
-          </a:fillRef>
-          <a:effectRef idx="2">
-            <a:schemeClr val="accent1"/>
-          </a:effectRef>
-          <a:fontRef idx="minor">
-            <a:schemeClr val="lt1"/>
-          </a:fontRef>
-        </p:style>
-        <p:txBody>
-          <a:bodyPr rtlCol="0" anchor="ctr" wrap="square"/>
-          <a:lstStyle/>
-          <a:p>
-            <a:pPr algn="ctr">
-              <a:defRPr sz="1300" b="1">
-                <a:solidFill>
-                  <a:srgbClr val="FFFFFF"/>
-                </a:solidFill>
-              </a:defRPr>
-            </a:pPr>
-            <a:r>
-              <a:t>02. CWC-to-Road Graph Intelligence</a:t>
-            </a:r>
-          </a:p>
-          <a:p>
-            <a:br/>
-            <a:pPr>
-              <a:defRPr sz="1100">
-                <a:solidFill>
-                  <a:srgbClr val="E8EDF5"/>
-                </a:solidFill>
-              </a:defRPr>
-            </a:pPr>
-            <a:r>
-              <a:t>Flood inundation shapes directly overlay NHAI road graphs, auto-computing detours.</a:t>
-            </a:r>
-          </a:p>
-        </p:txBody>
-      </p:sp>
-      <p:sp>
-        <p:nvSpPr>
-          <p:cNvPr id="8" name="Rounded Rectangle 7"/>
-          <p:cNvSpPr/>
-          <p:nvPr/>
-        </p:nvSpPr>
-        <p:spPr>
-          <a:xfrm>
-            <a:off x="7863840" y="2011680"/>
-            <a:ext cx="3383280" cy="1920240"/>
-          </a:xfrm>
-          <a:prstGeom prst="roundRect">
-            <a:avLst/>
-          </a:prstGeom>
-          <a:solidFill>
-            <a:srgbClr val="0F1420"/>
+            <a:srgbClr val="0E121E"/>
           </a:solidFill>
           <a:ln>
             <a:solidFill>
@@ -7188,51 +8543,51 @@
           <a:lstStyle/>
           <a:p>
             <a:pPr algn="ctr">
-              <a:defRPr sz="1300" b="1">
-                <a:solidFill>
-                  <a:srgbClr val="FFFFFF"/>
-                </a:solidFill>
-              </a:defRPr>
-            </a:pPr>
-            <a:r>
-              <a:t>03. Multilingual Cell Broadcast</a:t>
-            </a:r>
-          </a:p>
-          <a:p>
-            <a:br/>
-            <a:pPr>
-              <a:defRPr sz="1100">
+              <a:defRPr sz="1250" b="1">
+                <a:solidFill>
+                  <a:srgbClr val="7B61FF"/>
+                </a:solidFill>
+              </a:defRPr>
+            </a:pPr>
+            <a:r>
+              <a:t>04. MapmyIndia Detour Engine</a:t>
+            </a:r>
+          </a:p>
+          <a:p>
+            <a:br/>
+            <a:pPr>
+              <a:defRPr sz="1050">
                 <a:solidFill>
                   <a:srgbClr val="E8EDF5"/>
                 </a:solidFill>
               </a:defRPr>
             </a:pPr>
             <a:r>
-              <a:t>NDMA Sachet protocol pushes Hindi, English, and local alerts directly to cell towers.</a:t>
-            </a:r>
-          </a:p>
-        </p:txBody>
-      </p:sp>
-      <p:sp>
-        <p:nvSpPr>
-          <p:cNvPr id="9" name="Rounded Rectangle 8"/>
+              <a:t>Autonomous pathfinding rerouting rescue fleets away from NHAI landslides.</a:t>
+            </a:r>
+          </a:p>
+        </p:txBody>
+      </p:sp>
+      <p:sp>
+        <p:nvSpPr>
+          <p:cNvPr id="10" name="Rounded Rectangle 9"/>
           <p:cNvSpPr/>
           <p:nvPr/>
         </p:nvSpPr>
         <p:spPr>
           <a:xfrm>
-            <a:off x="731520" y="4206240"/>
+            <a:off x="4297680" y="4114800"/>
             <a:ext cx="3383280" cy="1920240"/>
           </a:xfrm>
           <a:prstGeom prst="roundRect">
             <a:avLst/>
           </a:prstGeom>
           <a:solidFill>
-            <a:srgbClr val="0F1420"/>
+            <a:srgbClr val="0E121E"/>
           </a:solidFill>
           <a:ln>
             <a:solidFill>
-              <a:srgbClr val="7B61FF"/>
+              <a:srgbClr val="FF4D6A"/>
             </a:solidFill>
           </a:ln>
         </p:spPr>
@@ -7255,51 +8610,51 @@
           <a:lstStyle/>
           <a:p>
             <a:pPr algn="ctr">
-              <a:defRPr sz="1300" b="1">
-                <a:solidFill>
-                  <a:srgbClr val="FFFFFF"/>
-                </a:solidFill>
-              </a:defRPr>
-            </a:pPr>
-            <a:r>
-              <a:t>04. Tested on Real Wayanad Data</a:t>
-            </a:r>
-          </a:p>
-          <a:p>
-            <a:br/>
-            <a:pPr>
-              <a:defRPr sz="1100">
+              <a:defRPr sz="1250" b="1">
+                <a:solidFill>
+                  <a:srgbClr val="FF4D6A"/>
+                </a:solidFill>
+              </a:defRPr>
+            </a:pPr>
+            <a:r>
+              <a:t>05. NDMA Sachet Cell Broadcast</a:t>
+            </a:r>
+          </a:p>
+          <a:p>
+            <a:br/>
+            <a:pPr>
+              <a:defRPr sz="1050">
                 <a:solidFill>
                   <a:srgbClr val="E8EDF5"/>
                 </a:solidFill>
               </a:defRPr>
             </a:pPr>
             <a:r>
-              <a:t>Modeled against Kabini reservoir discharge records and 2024 Wayanad flood maps.</a:t>
-            </a:r>
-          </a:p>
-        </p:txBody>
-      </p:sp>
-      <p:sp>
-        <p:nvSpPr>
-          <p:cNvPr id="10" name="Rounded Rectangle 9"/>
+              <a:t>Multilingual cell-tower SMS warnings forced to phones in hazard polygons.</a:t>
+            </a:r>
+          </a:p>
+        </p:txBody>
+      </p:sp>
+      <p:sp>
+        <p:nvSpPr>
+          <p:cNvPr id="11" name="Rounded Rectangle 10"/>
           <p:cNvSpPr/>
           <p:nvPr/>
         </p:nvSpPr>
         <p:spPr>
           <a:xfrm>
-            <a:off x="4297680" y="4206240"/>
+            <a:off x="7863840" y="4114800"/>
             <a:ext cx="3383280" cy="1920240"/>
           </a:xfrm>
           <a:prstGeom prst="roundRect">
             <a:avLst/>
           </a:prstGeom>
           <a:solidFill>
-            <a:srgbClr val="0F1420"/>
+            <a:srgbClr val="0E121E"/>
           </a:solidFill>
           <a:ln>
             <a:solidFill>
-              <a:srgbClr val="7B61FF"/>
+              <a:srgbClr val="00E676"/>
             </a:solidFill>
           </a:ln>
         </p:spPr>
@@ -7322,94 +8677,27 @@
           <a:lstStyle/>
           <a:p>
             <a:pPr algn="ctr">
-              <a:defRPr sz="1300" b="1">
-                <a:solidFill>
-                  <a:srgbClr val="FFFFFF"/>
-                </a:solidFill>
-              </a:defRPr>
-            </a:pPr>
-            <a:r>
-              <a:t>05. 100% India-Native Infrastructure</a:t>
-            </a:r>
-          </a:p>
-          <a:p>
-            <a:br/>
-            <a:pPr>
-              <a:defRPr sz="1100">
+              <a:defRPr sz="1250" b="1">
+                <a:solidFill>
+                  <a:srgbClr val="00E676"/>
+                </a:solidFill>
+              </a:defRPr>
+            </a:pPr>
+            <a:r>
+              <a:t>06. 108 Emergency Health Triage</a:t>
+            </a:r>
+          </a:p>
+          <a:p>
+            <a:br/>
+            <a:pPr>
+              <a:defRPr sz="1050">
                 <a:solidFill>
                   <a:srgbClr val="E8EDF5"/>
                 </a:solidFill>
               </a:defRPr>
             </a:pPr>
             <a:r>
-              <a:t>Zero dependency on foreign mapping or cloud tools. Built on Indian APIs.</a:t>
-            </a:r>
-          </a:p>
-        </p:txBody>
-      </p:sp>
-      <p:sp>
-        <p:nvSpPr>
-          <p:cNvPr id="11" name="Rounded Rectangle 10"/>
-          <p:cNvSpPr/>
-          <p:nvPr/>
-        </p:nvSpPr>
-        <p:spPr>
-          <a:xfrm>
-            <a:off x="7863840" y="4206240"/>
-            <a:ext cx="3383280" cy="1920240"/>
-          </a:xfrm>
-          <a:prstGeom prst="roundRect">
-            <a:avLst/>
-          </a:prstGeom>
-          <a:solidFill>
-            <a:srgbClr val="0F1420"/>
-          </a:solidFill>
-          <a:ln>
-            <a:solidFill>
-              <a:srgbClr val="7B61FF"/>
-            </a:solidFill>
-          </a:ln>
-        </p:spPr>
-        <p:style>
-          <a:lnRef idx="1">
-            <a:schemeClr val="accent1"/>
-          </a:lnRef>
-          <a:fillRef idx="3">
-            <a:schemeClr val="accent1"/>
-          </a:fillRef>
-          <a:effectRef idx="2">
-            <a:schemeClr val="accent1"/>
-          </a:effectRef>
-          <a:fontRef idx="minor">
-            <a:schemeClr val="lt1"/>
-          </a:fontRef>
-        </p:style>
-        <p:txBody>
-          <a:bodyPr rtlCol="0" anchor="ctr" wrap="square"/>
-          <a:lstStyle/>
-          <a:p>
-            <a:pPr algn="ctr">
-              <a:defRPr sz="1300" b="1">
-                <a:solidFill>
-                  <a:srgbClr val="FFFFFF"/>
-                </a:solidFill>
-              </a:defRPr>
-            </a:pPr>
-            <a:r>
-              <a:t>06. Zero-Latency Hospital Triage</a:t>
-            </a:r>
-          </a:p>
-          <a:p>
-            <a:br/>
-            <a:pPr>
-              <a:defRPr sz="1100">
-                <a:solidFill>
-                  <a:srgbClr val="E8EDF5"/>
-                </a:solidFill>
-              </a:defRPr>
-            </a:pPr>
-            <a:r>
-              <a:t>Queries 108 health API to route casualties only to hospitals with verified ICU beds.</a:t>
+              <a:t>Real-time ICU/trauma bed availability matrix and ambulance dispatch.</a:t>
             </a:r>
           </a:p>
         </p:txBody>
@@ -7484,7 +8772,7 @@
         <p:spPr>
           <a:xfrm>
             <a:off x="731520" y="365760"/>
-            <a:ext cx="10698480" cy="365760"/>
+            <a:ext cx="10698480" cy="320040"/>
           </a:xfrm>
           <a:prstGeom prst="rect">
             <a:avLst/>
@@ -7506,7 +8794,7 @@
               </a:defRPr>
             </a:pPr>
             <a:r>
-              <a:t>07 / ARCHITECTURE</a:t>
+              <a:t>07 / ALGORITHMIC FOUNDATIONS</a:t>
             </a:r>
           </a:p>
         </p:txBody>
@@ -7520,7 +8808,7 @@
         <p:spPr>
           <a:xfrm>
             <a:off x="731520" y="685800"/>
-            <a:ext cx="10698480" cy="731520"/>
+            <a:ext cx="10698480" cy="640080"/>
           </a:xfrm>
           <a:prstGeom prst="rect">
             <a:avLst/>
@@ -7534,7 +8822,7 @@
           <a:lstStyle/>
           <a:p>
             <a:pPr>
-              <a:defRPr sz="2600" b="1">
+              <a:defRPr sz="2500" b="1">
                 <a:solidFill>
                   <a:srgbClr val="FFFFFF"/>
                 </a:solidFill>
@@ -7542,7 +8830,7 @@
               </a:defRPr>
             </a:pPr>
             <a:r>
-              <a:t>Model Context Protocol (MCP) Integration Mesh</a:t>
+              <a:t>Mathematical Formulas &amp; Risk Modeling</a:t>
             </a:r>
           </a:p>
         </p:txBody>
@@ -7555,8 +8843,8 @@
         </p:nvSpPr>
         <p:spPr>
           <a:xfrm>
-            <a:off x="731520" y="1371600"/>
-            <a:ext cx="10698480" cy="457200"/>
+            <a:off x="731520" y="1325880"/>
+            <a:ext cx="10698480" cy="502920"/>
           </a:xfrm>
           <a:prstGeom prst="rect">
             <a:avLst/>
@@ -7570,7 +8858,7 @@
           <a:lstStyle/>
           <a:p>
             <a:pPr>
-              <a:defRPr sz="1300">
+              <a:defRPr sz="1200">
                 <a:solidFill>
                   <a:srgbClr val="6B7A99"/>
                 </a:solidFill>
@@ -7578,7 +8866,7 @@
               </a:defRPr>
             </a:pPr>
             <a:r>
-              <a:t>Open standard connecting LLM agents to government APIs via JSON-RPC.</a:t>
+              <a:t>Rigorous mathematical modeling driving multi-agent risk evaluation.</a:t>
             </a:r>
           </a:p>
         </p:txBody>
@@ -7591,18 +8879,18 @@
         </p:nvSpPr>
         <p:spPr>
           <a:xfrm>
-            <a:off x="731520" y="2011680"/>
-            <a:ext cx="10607040" cy="4297680"/>
+            <a:off x="731520" y="1920240"/>
+            <a:ext cx="5120640" cy="2103120"/>
           </a:xfrm>
           <a:prstGeom prst="roundRect">
             <a:avLst/>
           </a:prstGeom>
           <a:solidFill>
-            <a:srgbClr val="0F1420"/>
+            <a:srgbClr val="0E121E"/>
           </a:solidFill>
           <a:ln>
             <a:solidFill>
-              <a:srgbClr val="7B61FF"/>
+              <a:srgbClr val="00F0FF"/>
             </a:solidFill>
           </a:ln>
         </p:spPr>
@@ -7625,86 +8913,280 @@
           <a:lstStyle/>
           <a:p>
             <a:pPr algn="ctr">
-              <a:defRPr sz="1600" b="1">
-                <a:solidFill>
-                  <a:srgbClr val="7B61FF"/>
-                </a:solidFill>
-              </a:defRPr>
-            </a:pPr>
-            <a:r>
-              <a:t>MCP SERVER RACK ARCHITECTURE</a:t>
-            </a:r>
-          </a:p>
-          <a:p>
-            <a:pPr>
-              <a:defRPr sz="1200">
+              <a:defRPr sz="1250" b="1">
+                <a:solidFill>
+                  <a:srgbClr val="FFFFFF"/>
+                </a:solidFill>
+              </a:defRPr>
+            </a:pPr>
+            <a:r>
+              <a:t>1. IMD Radar Rain Rate Equation</a:t>
+            </a:r>
+          </a:p>
+          <a:p>
+            <a:pPr>
+              <a:defRPr sz="1100" b="1">
+                <a:solidFill>
+                  <a:srgbClr val="00F0FF"/>
+                </a:solidFill>
+                <a:latin typeface="Courier New"/>
+              </a:defRPr>
+            </a:pPr>
+            <a:r>
+              <a:t>Formula: R = (Z / a) ** (1/b)</a:t>
+            </a:r>
+          </a:p>
+          <a:p>
+            <a:br/>
+            <a:pPr>
+              <a:defRPr sz="1000">
                 <a:solidFill>
                   <a:srgbClr val="E8EDF5"/>
                 </a:solidFill>
               </a:defRPr>
             </a:pPr>
             <a:r>
-              <a:t>• MCP-IMD-WEATHER  --&gt; Scrapes INSAT-3D infrared cloud temperature and Doppler Z-reflectivity.</a:t>
-            </a:r>
-          </a:p>
-          <a:p>
-            <a:pPr>
-              <a:defRPr sz="1200">
+              <a:t>Where Z is radar reflectivity factor, a = 200, b = 1.6 (Marshall-Palmer relationship for monsoon clouds).</a:t>
+            </a:r>
+          </a:p>
+        </p:txBody>
+      </p:sp>
+      <p:sp>
+        <p:nvSpPr>
+          <p:cNvPr id="7" name="Rounded Rectangle 6"/>
+          <p:cNvSpPr/>
+          <p:nvPr/>
+        </p:nvSpPr>
+        <p:spPr>
+          <a:xfrm>
+            <a:off x="6126480" y="1920240"/>
+            <a:ext cx="5120640" cy="2103120"/>
+          </a:xfrm>
+          <a:prstGeom prst="roundRect">
+            <a:avLst/>
+          </a:prstGeom>
+          <a:solidFill>
+            <a:srgbClr val="0E121E"/>
+          </a:solidFill>
+          <a:ln>
+            <a:solidFill>
+              <a:srgbClr val="00F0FF"/>
+            </a:solidFill>
+          </a:ln>
+        </p:spPr>
+        <p:style>
+          <a:lnRef idx="1">
+            <a:schemeClr val="accent1"/>
+          </a:lnRef>
+          <a:fillRef idx="3">
+            <a:schemeClr val="accent1"/>
+          </a:fillRef>
+          <a:effectRef idx="2">
+            <a:schemeClr val="accent1"/>
+          </a:effectRef>
+          <a:fontRef idx="minor">
+            <a:schemeClr val="lt1"/>
+          </a:fontRef>
+        </p:style>
+        <p:txBody>
+          <a:bodyPr rtlCol="0" anchor="ctr" wrap="square"/>
+          <a:lstStyle/>
+          <a:p>
+            <a:pPr algn="ctr">
+              <a:defRPr sz="1250" b="1">
+                <a:solidFill>
+                  <a:srgbClr val="FFFFFF"/>
+                </a:solidFill>
+              </a:defRPr>
+            </a:pPr>
+            <a:r>
+              <a:t>2. Landslide Susceptibility Index</a:t>
+            </a:r>
+          </a:p>
+          <a:p>
+            <a:pPr>
+              <a:defRPr sz="1100" b="1">
+                <a:solidFill>
+                  <a:srgbClr val="00F0FF"/>
+                </a:solidFill>
+                <a:latin typeface="Courier New"/>
+              </a:defRPr>
+            </a:pPr>
+            <a:r>
+              <a:t>Formula: Risk = w1*Rain + w2*SoilSat + w3*tan(Slope)</a:t>
+            </a:r>
+          </a:p>
+          <a:p>
+            <a:br/>
+            <a:pPr>
+              <a:defRPr sz="1000">
                 <a:solidFill>
                   <a:srgbClr val="E8EDF5"/>
                 </a:solidFill>
               </a:defRPr>
             </a:pPr>
             <a:r>
-              <a:t>• MCP-CWC-HYDRO    --&gt; Parses Central Water Commission river gauge station water levels &amp; discharge rates.</a:t>
-            </a:r>
-          </a:p>
-          <a:p>
-            <a:pPr>
-              <a:defRPr sz="1200">
+              <a:t>Combines IMD precipitation rate, GSI soil shear saturation %, and DEM slope angle to yield a 0–1 risk index.</a:t>
+            </a:r>
+          </a:p>
+        </p:txBody>
+      </p:sp>
+      <p:sp>
+        <p:nvSpPr>
+          <p:cNvPr id="8" name="Rounded Rectangle 7"/>
+          <p:cNvSpPr/>
+          <p:nvPr/>
+        </p:nvSpPr>
+        <p:spPr>
+          <a:xfrm>
+            <a:off x="731520" y="4206240"/>
+            <a:ext cx="5120640" cy="2103120"/>
+          </a:xfrm>
+          <a:prstGeom prst="roundRect">
+            <a:avLst/>
+          </a:prstGeom>
+          <a:solidFill>
+            <a:srgbClr val="0E121E"/>
+          </a:solidFill>
+          <a:ln>
+            <a:solidFill>
+              <a:srgbClr val="00F0FF"/>
+            </a:solidFill>
+          </a:ln>
+        </p:spPr>
+        <p:style>
+          <a:lnRef idx="1">
+            <a:schemeClr val="accent1"/>
+          </a:lnRef>
+          <a:fillRef idx="3">
+            <a:schemeClr val="accent1"/>
+          </a:fillRef>
+          <a:effectRef idx="2">
+            <a:schemeClr val="accent1"/>
+          </a:effectRef>
+          <a:fontRef idx="minor">
+            <a:schemeClr val="lt1"/>
+          </a:fontRef>
+        </p:style>
+        <p:txBody>
+          <a:bodyPr rtlCol="0" anchor="ctr" wrap="square"/>
+          <a:lstStyle/>
+          <a:p>
+            <a:pPr algn="ctr">
+              <a:defRPr sz="1250" b="1">
+                <a:solidFill>
+                  <a:srgbClr val="FFFFFF"/>
+                </a:solidFill>
+              </a:defRPr>
+            </a:pPr>
+            <a:r>
+              <a:t>3. River Danger Breach Margin</a:t>
+            </a:r>
+          </a:p>
+          <a:p>
+            <a:pPr>
+              <a:defRPr sz="1100" b="1">
+                <a:solidFill>
+                  <a:srgbClr val="00F0FF"/>
+                </a:solidFill>
+                <a:latin typeface="Courier New"/>
+              </a:defRPr>
+            </a:pPr>
+            <a:r>
+              <a:t>Formula: Delta_H = H_current - H_danger</a:t>
+            </a:r>
+          </a:p>
+          <a:p>
+            <a:br/>
+            <a:pPr>
+              <a:defRPr sz="1000">
                 <a:solidFill>
                   <a:srgbClr val="E8EDF5"/>
                 </a:solidFill>
               </a:defRPr>
             </a:pPr>
             <a:r>
-              <a:t>• MCP-GSI-GEO      --&gt; Evaluates GSI landslide hazard zonation GIS layers &amp; soil moisture indices.</a:t>
-            </a:r>
-          </a:p>
-          <a:p>
-            <a:pPr>
-              <a:defRPr sz="1200">
+              <a:t>Calculates gauge elevation margin above statutory danger mark &amp; rate of rise (+cm/hr).</a:t>
+            </a:r>
+          </a:p>
+        </p:txBody>
+      </p:sp>
+      <p:sp>
+        <p:nvSpPr>
+          <p:cNvPr id="9" name="Rounded Rectangle 8"/>
+          <p:cNvSpPr/>
+          <p:nvPr/>
+        </p:nvSpPr>
+        <p:spPr>
+          <a:xfrm>
+            <a:off x="6126480" y="4206240"/>
+            <a:ext cx="5120640" cy="2103120"/>
+          </a:xfrm>
+          <a:prstGeom prst="roundRect">
+            <a:avLst/>
+          </a:prstGeom>
+          <a:solidFill>
+            <a:srgbClr val="0E121E"/>
+          </a:solidFill>
+          <a:ln>
+            <a:solidFill>
+              <a:srgbClr val="00F0FF"/>
+            </a:solidFill>
+          </a:ln>
+        </p:spPr>
+        <p:style>
+          <a:lnRef idx="1">
+            <a:schemeClr val="accent1"/>
+          </a:lnRef>
+          <a:fillRef idx="3">
+            <a:schemeClr val="accent1"/>
+          </a:fillRef>
+          <a:effectRef idx="2">
+            <a:schemeClr val="accent1"/>
+          </a:effectRef>
+          <a:fontRef idx="minor">
+            <a:schemeClr val="lt1"/>
+          </a:fontRef>
+        </p:style>
+        <p:txBody>
+          <a:bodyPr rtlCol="0" anchor="ctr" wrap="square"/>
+          <a:lstStyle/>
+          <a:p>
+            <a:pPr algn="ctr">
+              <a:defRPr sz="1250" b="1">
+                <a:solidFill>
+                  <a:srgbClr val="FFFFFF"/>
+                </a:solidFill>
+              </a:defRPr>
+            </a:pPr>
+            <a:r>
+              <a:t>4. Hospital Route Priority Score</a:t>
+            </a:r>
+          </a:p>
+          <a:p>
+            <a:pPr>
+              <a:defRPr sz="1100" b="1">
+                <a:solidFill>
+                  <a:srgbClr val="00F0FF"/>
+                </a:solidFill>
+                <a:latin typeface="Courier New"/>
+              </a:defRPr>
+            </a:pPr>
+            <a:r>
+              <a:t>Formula: Score = ICU_beds / (Travel_time + 1.5 * Traffic_delay)</a:t>
+            </a:r>
+          </a:p>
+          <a:p>
+            <a:br/>
+            <a:pPr>
+              <a:defRPr sz="1000">
                 <a:solidFill>
                   <a:srgbClr val="E8EDF5"/>
                 </a:solidFill>
               </a:defRPr>
             </a:pPr>
             <a:r>
-              <a:t>• MCP-MAPMYINDIA   --&gt; Connects to MapmyIndia routing engine to compute emergency bypass routes.</a:t>
-            </a:r>
-          </a:p>
-          <a:p>
-            <a:pPr>
-              <a:defRPr sz="1200">
-                <a:solidFill>
-                  <a:srgbClr val="E8EDF5"/>
-                </a:solidFill>
-              </a:defRPr>
-            </a:pPr>
-            <a:r>
-              <a:t>• MCP-NDMA-SACHET  --&gt; Formats OASIS CAP v1.2 XML cell broadcast payloads for target mobile towers.</a:t>
-            </a:r>
-          </a:p>
-          <a:p>
-            <a:pPr>
-              <a:defRPr sz="1200">
-                <a:solidFill>
-                  <a:srgbClr val="E8EDF5"/>
-                </a:solidFill>
-              </a:defRPr>
-            </a:pPr>
-            <a:r>
-              <a:t>• MCP-108-HEALTH   --&gt; Queries state 108 emergency health databases for live ICU bed availability.</a:t>
+              <a:t>Ranks nearest trauma hospitals by real-time bed availability and MapmyIndia traffic ETA.</a:t>
             </a:r>
           </a:p>
         </p:txBody>
@@ -7779,7 +9261,7 @@
         <p:spPr>
           <a:xfrm>
             <a:off x="731520" y="365760"/>
-            <a:ext cx="10698480" cy="365760"/>
+            <a:ext cx="10698480" cy="320040"/>
           </a:xfrm>
           <a:prstGeom prst="rect">
             <a:avLst/>
@@ -7801,7 +9283,7 @@
               </a:defRPr>
             </a:pPr>
             <a:r>
-              <a:t>08 / DEVELOPMENT LIFECYCLE</a:t>
+              <a:t>08 / ARCHITECTURE</a:t>
             </a:r>
           </a:p>
         </p:txBody>
@@ -7815,7 +9297,7 @@
         <p:spPr>
           <a:xfrm>
             <a:off x="731520" y="685800"/>
-            <a:ext cx="10698480" cy="731520"/>
+            <a:ext cx="10698480" cy="640080"/>
           </a:xfrm>
           <a:prstGeom prst="rect">
             <a:avLst/>
@@ -7829,7 +9311,7 @@
           <a:lstStyle/>
           <a:p>
             <a:pPr>
-              <a:defRPr sz="2600" b="1">
+              <a:defRPr sz="2500" b="1">
                 <a:solidFill>
                   <a:srgbClr val="FFFFFF"/>
                 </a:solidFill>
@@ -7837,7 +9319,7 @@
               </a:defRPr>
             </a:pPr>
             <a:r>
-              <a:t>End-to-End Technical Development Process</a:t>
+              <a:t>Model Context Protocol (MCP) Integration Mesh</a:t>
             </a:r>
           </a:p>
         </p:txBody>
@@ -7850,8 +9332,8 @@
         </p:nvSpPr>
         <p:spPr>
           <a:xfrm>
-            <a:off x="731520" y="1371600"/>
-            <a:ext cx="10698480" cy="457200"/>
+            <a:off x="731520" y="1325880"/>
+            <a:ext cx="10698480" cy="502920"/>
           </a:xfrm>
           <a:prstGeom prst="rect">
             <a:avLst/>
@@ -7865,7 +9347,7 @@
           <a:lstStyle/>
           <a:p>
             <a:pPr>
-              <a:defRPr sz="1300">
+              <a:defRPr sz="1200">
                 <a:solidFill>
                   <a:srgbClr val="6B7A99"/>
                 </a:solidFill>
@@ -7873,7 +9355,7 @@
               </a:defRPr>
             </a:pPr>
             <a:r>
-              <a:t>The complete 5-step engineering pipeline from raw data scrapers to cell dispatch.</a:t>
+              <a:t>Open standard connecting LLM agents to government APIs via JSON-RPC.</a:t>
             </a:r>
           </a:p>
         </p:txBody>
@@ -7886,80 +9368,14 @@
         </p:nvSpPr>
         <p:spPr>
           <a:xfrm>
-            <a:off x="731520" y="2011680"/>
-            <a:ext cx="10607040" cy="777240"/>
+            <a:off x="731520" y="1920240"/>
+            <a:ext cx="10607040" cy="4389120"/>
           </a:xfrm>
           <a:prstGeom prst="roundRect">
             <a:avLst/>
           </a:prstGeom>
           <a:solidFill>
-            <a:srgbClr val="0F1420"/>
-          </a:solidFill>
-          <a:ln>
-            <a:solidFill>
-              <a:srgbClr val="00F0FF"/>
-            </a:solidFill>
-          </a:ln>
-        </p:spPr>
-        <p:style>
-          <a:lnRef idx="1">
-            <a:schemeClr val="accent1"/>
-          </a:lnRef>
-          <a:fillRef idx="3">
-            <a:schemeClr val="accent1"/>
-          </a:fillRef>
-          <a:effectRef idx="2">
-            <a:schemeClr val="accent1"/>
-          </a:effectRef>
-          <a:fontRef idx="minor">
-            <a:schemeClr val="lt1"/>
-          </a:fontRef>
-        </p:style>
-        <p:txBody>
-          <a:bodyPr rtlCol="0" anchor="ctr" wrap="square"/>
-          <a:lstStyle/>
-          <a:p>
-            <a:pPr algn="ctr">
-              <a:defRPr sz="1200" b="1">
-                <a:solidFill>
-                  <a:srgbClr val="00F0FF"/>
-                </a:solidFill>
-              </a:defRPr>
-            </a:pPr>
-            <a:r>
-              <a:t>STEP 01: Telemetry Data Scrapers</a:t>
-            </a:r>
-          </a:p>
-          <a:p>
-            <a:pPr>
-              <a:defRPr sz="1050">
-                <a:solidFill>
-                  <a:srgbClr val="E8EDF5"/>
-                </a:solidFill>
-              </a:defRPr>
-            </a:pPr>
-            <a:r>
-              <a:t>Ingests IMD Doppler radar reflectivity, CWC water levels, and GSI soil layers into JSON feeds every 15 min.</a:t>
-            </a:r>
-          </a:p>
-        </p:txBody>
-      </p:sp>
-      <p:sp>
-        <p:nvSpPr>
-          <p:cNvPr id="7" name="Rounded Rectangle 6"/>
-          <p:cNvSpPr/>
-          <p:nvPr/>
-        </p:nvSpPr>
-        <p:spPr>
-          <a:xfrm>
-            <a:off x="731520" y="2880360"/>
-            <a:ext cx="10607040" cy="777240"/>
-          </a:xfrm>
-          <a:prstGeom prst="roundRect">
-            <a:avLst/>
-          </a:prstGeom>
-          <a:solidFill>
-            <a:srgbClr val="0F1420"/>
+            <a:srgbClr val="0E121E"/>
           </a:solidFill>
           <a:ln>
             <a:solidFill>
@@ -7986,224 +9402,86 @@
           <a:lstStyle/>
           <a:p>
             <a:pPr algn="ctr">
-              <a:defRPr sz="1200" b="1">
+              <a:defRPr sz="1500" b="1">
                 <a:solidFill>
                   <a:srgbClr val="7B61FF"/>
                 </a:solidFill>
               </a:defRPr>
             </a:pPr>
             <a:r>
-              <a:t>STEP 02: FastMCP Tool Servers</a:t>
-            </a:r>
-          </a:p>
-          <a:p>
-            <a:pPr>
-              <a:defRPr sz="1050">
+              <a:t>MCP SERVER RACK ARCHITECTURE</a:t>
+            </a:r>
+          </a:p>
+          <a:p>
+            <a:pPr>
+              <a:defRPr sz="1150">
                 <a:solidFill>
                   <a:srgbClr val="E8EDF5"/>
                 </a:solidFill>
               </a:defRPr>
             </a:pPr>
             <a:r>
-              <a:t>Wraps government endpoints into standardized Model Context Protocol (MCP) JSON-RPC tool servers.</a:t>
-            </a:r>
-          </a:p>
-        </p:txBody>
-      </p:sp>
-      <p:sp>
-        <p:nvSpPr>
-          <p:cNvPr id="8" name="Rounded Rectangle 7"/>
-          <p:cNvSpPr/>
-          <p:nvPr/>
-        </p:nvSpPr>
-        <p:spPr>
-          <a:xfrm>
-            <a:off x="731520" y="3749039"/>
-            <a:ext cx="10607040" cy="777240"/>
-          </a:xfrm>
-          <a:prstGeom prst="roundRect">
-            <a:avLst/>
-          </a:prstGeom>
-          <a:solidFill>
-            <a:srgbClr val="0F1420"/>
-          </a:solidFill>
-          <a:ln>
-            <a:solidFill>
-              <a:srgbClr val="00F0FF"/>
-            </a:solidFill>
-          </a:ln>
-        </p:spPr>
-        <p:style>
-          <a:lnRef idx="1">
-            <a:schemeClr val="accent1"/>
-          </a:lnRef>
-          <a:fillRef idx="3">
-            <a:schemeClr val="accent1"/>
-          </a:fillRef>
-          <a:effectRef idx="2">
-            <a:schemeClr val="accent1"/>
-          </a:effectRef>
-          <a:fontRef idx="minor">
-            <a:schemeClr val="lt1"/>
-          </a:fontRef>
-        </p:style>
-        <p:txBody>
-          <a:bodyPr rtlCol="0" anchor="ctr" wrap="square"/>
-          <a:lstStyle/>
-          <a:p>
-            <a:pPr algn="ctr">
-              <a:defRPr sz="1200" b="1">
-                <a:solidFill>
-                  <a:srgbClr val="00F0FF"/>
-                </a:solidFill>
-              </a:defRPr>
-            </a:pPr>
-            <a:r>
-              <a:t>STEP 03: LangGraph State Engine</a:t>
-            </a:r>
-          </a:p>
-          <a:p>
-            <a:pPr>
-              <a:defRPr sz="1050">
+              <a:t>• MCP-IMD-WEATHER  --&gt; Scrapes INSAT-3D infrared cloud temperature and Doppler Z-reflectivity.</a:t>
+            </a:r>
+          </a:p>
+          <a:p>
+            <a:pPr>
+              <a:defRPr sz="1150">
                 <a:solidFill>
                   <a:srgbClr val="E8EDF5"/>
                 </a:solidFill>
               </a:defRPr>
             </a:pPr>
             <a:r>
-              <a:t>Constructs an event-driven DisasterState graph coordinating Weather, Hydro, GeoRisk, and Commander agents.</a:t>
-            </a:r>
-          </a:p>
-        </p:txBody>
-      </p:sp>
-      <p:sp>
-        <p:nvSpPr>
-          <p:cNvPr id="9" name="Rounded Rectangle 8"/>
-          <p:cNvSpPr/>
-          <p:nvPr/>
-        </p:nvSpPr>
-        <p:spPr>
-          <a:xfrm>
-            <a:off x="731520" y="4617720"/>
-            <a:ext cx="10607040" cy="777240"/>
-          </a:xfrm>
-          <a:prstGeom prst="roundRect">
-            <a:avLst/>
-          </a:prstGeom>
-          <a:solidFill>
-            <a:srgbClr val="0F1420"/>
-          </a:solidFill>
-          <a:ln>
-            <a:solidFill>
-              <a:srgbClr val="7B61FF"/>
-            </a:solidFill>
-          </a:ln>
-        </p:spPr>
-        <p:style>
-          <a:lnRef idx="1">
-            <a:schemeClr val="accent1"/>
-          </a:lnRef>
-          <a:fillRef idx="3">
-            <a:schemeClr val="accent1"/>
-          </a:fillRef>
-          <a:effectRef idx="2">
-            <a:schemeClr val="accent1"/>
-          </a:effectRef>
-          <a:fontRef idx="minor">
-            <a:schemeClr val="lt1"/>
-          </a:fontRef>
-        </p:style>
-        <p:txBody>
-          <a:bodyPr rtlCol="0" anchor="ctr" wrap="square"/>
-          <a:lstStyle/>
-          <a:p>
-            <a:pPr algn="ctr">
-              <a:defRPr sz="1200" b="1">
-                <a:solidFill>
-                  <a:srgbClr val="7B61FF"/>
-                </a:solidFill>
-              </a:defRPr>
-            </a:pPr>
-            <a:r>
-              <a:t>STEP 04: PostGIS Spatial GIS Engine</a:t>
-            </a:r>
-          </a:p>
-          <a:p>
-            <a:pPr>
-              <a:defRPr sz="1050">
+              <a:t>• MCP-CWC-HYDRO    --&gt; Parses Central Water Commission river gauge station water levels &amp; discharge rates.</a:t>
+            </a:r>
+          </a:p>
+          <a:p>
+            <a:pPr>
+              <a:defRPr sz="1150">
                 <a:solidFill>
                   <a:srgbClr val="E8EDF5"/>
                 </a:solidFill>
               </a:defRPr>
             </a:pPr>
             <a:r>
-              <a:t>Intersects flood shapes with Census block demographics and computes bypass detours via MapmyIndia.</a:t>
-            </a:r>
-          </a:p>
-        </p:txBody>
-      </p:sp>
-      <p:sp>
-        <p:nvSpPr>
-          <p:cNvPr id="10" name="Rounded Rectangle 9"/>
-          <p:cNvSpPr/>
-          <p:nvPr/>
-        </p:nvSpPr>
-        <p:spPr>
-          <a:xfrm>
-            <a:off x="731520" y="5486400"/>
-            <a:ext cx="10607040" cy="777240"/>
-          </a:xfrm>
-          <a:prstGeom prst="roundRect">
-            <a:avLst/>
-          </a:prstGeom>
-          <a:solidFill>
-            <a:srgbClr val="0F1420"/>
-          </a:solidFill>
-          <a:ln>
-            <a:solidFill>
-              <a:srgbClr val="00E676"/>
-            </a:solidFill>
-          </a:ln>
-        </p:spPr>
-        <p:style>
-          <a:lnRef idx="1">
-            <a:schemeClr val="accent1"/>
-          </a:lnRef>
-          <a:fillRef idx="3">
-            <a:schemeClr val="accent1"/>
-          </a:fillRef>
-          <a:effectRef idx="2">
-            <a:schemeClr val="accent1"/>
-          </a:effectRef>
-          <a:fontRef idx="minor">
-            <a:schemeClr val="lt1"/>
-          </a:fontRef>
-        </p:style>
-        <p:txBody>
-          <a:bodyPr rtlCol="0" anchor="ctr" wrap="square"/>
-          <a:lstStyle/>
-          <a:p>
-            <a:pPr algn="ctr">
-              <a:defRPr sz="1200" b="1">
-                <a:solidFill>
-                  <a:srgbClr val="00E676"/>
-                </a:solidFill>
-              </a:defRPr>
-            </a:pPr>
-            <a:r>
-              <a:t>STEP 05: Dispatch &amp; UI Synchronization</a:t>
-            </a:r>
-          </a:p>
-          <a:p>
-            <a:pPr>
-              <a:defRPr sz="1050">
+              <a:t>• MCP-GSI-GEO      --&gt; Evaluates GSI landslide hazard zonation GIS layers &amp; soil moisture indices.</a:t>
+            </a:r>
+          </a:p>
+          <a:p>
+            <a:pPr>
+              <a:defRPr sz="1150">
                 <a:solidFill>
                   <a:srgbClr val="E8EDF5"/>
                 </a:solidFill>
               </a:defRPr>
             </a:pPr>
             <a:r>
-              <a:t>Dispatches CAP XML alerts to NDMA Sachet cell towers, triages 108 hospital beds, and syncs UI via WebSockets.</a:t>
+              <a:t>• MCP-MAPMYINDIA   --&gt; Connects to MapmyIndia routing engine to compute emergency bypass routes.</a:t>
+            </a:r>
+          </a:p>
+          <a:p>
+            <a:pPr>
+              <a:defRPr sz="1150">
+                <a:solidFill>
+                  <a:srgbClr val="E8EDF5"/>
+                </a:solidFill>
+              </a:defRPr>
+            </a:pPr>
+            <a:r>
+              <a:t>• MCP-NDMA-SACHET  --&gt; Formats OASIS CAP v1.2 XML cell broadcast payloads for target mobile towers.</a:t>
+            </a:r>
+          </a:p>
+          <a:p>
+            <a:pPr>
+              <a:defRPr sz="1150">
+                <a:solidFill>
+                  <a:srgbClr val="E8EDF5"/>
+                </a:solidFill>
+              </a:defRPr>
+            </a:pPr>
+            <a:r>
+              <a:t>• MCP-108-HEALTH   --&gt; Queries state 108 emergency health databases for live ICU bed availability.</a:t>
             </a:r>
           </a:p>
         </p:txBody>
@@ -8278,7 +9556,7 @@
         <p:spPr>
           <a:xfrm>
             <a:off x="731520" y="365760"/>
-            <a:ext cx="10698480" cy="365760"/>
+            <a:ext cx="10698480" cy="320040"/>
           </a:xfrm>
           <a:prstGeom prst="rect">
             <a:avLst/>
@@ -8300,7 +9578,7 @@
               </a:defRPr>
             </a:pPr>
             <a:r>
-              <a:t>09 / CODE SPECS</a:t>
+              <a:t>09 / CODE SPECS (SERVER)</a:t>
             </a:r>
           </a:p>
         </p:txBody>
@@ -8314,7 +9592,7 @@
         <p:spPr>
           <a:xfrm>
             <a:off x="731520" y="685800"/>
-            <a:ext cx="10698480" cy="731520"/>
+            <a:ext cx="10698480" cy="640080"/>
           </a:xfrm>
           <a:prstGeom prst="rect">
             <a:avLst/>
@@ -8328,7 +9606,7 @@
           <a:lstStyle/>
           <a:p>
             <a:pPr>
-              <a:defRPr sz="2600" b="1">
+              <a:defRPr sz="2500" b="1">
                 <a:solidFill>
                   <a:srgbClr val="FFFFFF"/>
                 </a:solidFill>
@@ -8336,7 +9614,7 @@
               </a:defRPr>
             </a:pPr>
             <a:r>
-              <a:t>Production Engineering Code &amp; API Schemas</a:t>
+              <a:t>Python FastMCP Ingestion Server Code</a:t>
             </a:r>
           </a:p>
         </p:txBody>
@@ -8349,8 +9627,8 @@
         </p:nvSpPr>
         <p:spPr>
           <a:xfrm>
-            <a:off x="731520" y="1371600"/>
-            <a:ext cx="10698480" cy="457200"/>
+            <a:off x="731520" y="1325880"/>
+            <a:ext cx="10698480" cy="502920"/>
           </a:xfrm>
           <a:prstGeom prst="rect">
             <a:avLst/>
@@ -8364,7 +9642,7 @@
           <a:lstStyle/>
           <a:p>
             <a:pPr>
-              <a:defRPr sz="1300">
+              <a:defRPr sz="1200">
                 <a:solidFill>
                   <a:srgbClr val="6B7A99"/>
                 </a:solidFill>
@@ -8372,7 +9650,7 @@
               </a:defRPr>
             </a:pPr>
             <a:r>
-              <a:t>Key backend script components powering XNexus-CrisisOS.</a:t>
+              <a:t>Production implementation of mcp_cwc_server.py exposing CWC telemetry endpoints.</a:t>
             </a:r>
           </a:p>
         </p:txBody>
@@ -8385,14 +9663,14 @@
         </p:nvSpPr>
         <p:spPr>
           <a:xfrm>
-            <a:off x="731520" y="2011680"/>
-            <a:ext cx="5120640" cy="4297680"/>
+            <a:off x="731520" y="1920240"/>
+            <a:ext cx="10607040" cy="4389120"/>
           </a:xfrm>
           <a:prstGeom prst="roundRect">
             <a:avLst/>
           </a:prstGeom>
           <a:solidFill>
-            <a:srgbClr val="0F1420"/>
+            <a:srgbClr val="0E121E"/>
           </a:solidFill>
           <a:ln>
             <a:solidFill>
@@ -8419,19 +9697,19 @@
           <a:lstStyle/>
           <a:p>
             <a:pPr algn="ctr">
-              <a:defRPr sz="1200" b="1">
+              <a:defRPr sz="1300" b="1">
                 <a:solidFill>
                   <a:srgbClr val="00F0FF"/>
                 </a:solidFill>
               </a:defRPr>
             </a:pPr>
             <a:r>
-              <a:t>1. PYTHON FastMCP SERVER (mcp_cwc_server.py)</a:t>
-            </a:r>
-          </a:p>
-          <a:p>
-            <a:pPr>
-              <a:defRPr sz="950">
+              <a:t>ideation/mcp_cwc_server.py (Python FastMCP SDK)</a:t>
+            </a:r>
+          </a:p>
+          <a:p>
+            <a:pPr>
+              <a:defRPr sz="1050">
                 <a:solidFill>
                   <a:srgbClr val="E8EDF5"/>
                 </a:solidFill>
@@ -8449,6 +9727,19 @@
             <a:br/>
             <a:br/>
             <a:r>
+              <a:t>CWC_DATABASE = {</a:t>
+            </a:r>
+            <a:br/>
+            <a:r>
+              <a:t>    "CWC-KBL-03": {"name": "Kabini Gauge", "river": "Kabini", "current_level": 839.24, "danger_mark": 840.00}</a:t>
+            </a:r>
+            <a:br/>
+            <a:r>
+              <a:t>}</a:t>
+            </a:r>
+            <a:br/>
+            <a:br/>
+            <a:r>
               <a:t>@mcp.tool()</a:t>
             </a:r>
             <a:br/>
@@ -8457,7 +9748,11 @@
             </a:r>
             <a:br/>
             <a:r>
-              <a:t>    return CWC_DB.get(station_id)</a:t>
+              <a:t>    """Fetch current water level, warning limit &amp; discharge rate for CWC river gauge."""</a:t>
+            </a:r>
+            <a:br/>
+            <a:r>
+              <a:t>    return CWC_DATABASE.get(station_id, {"error": "Station not found"})</a:t>
             </a:r>
             <a:br/>
             <a:br/>
@@ -8470,11 +9765,15 @@
             </a:r>
             <a:br/>
             <a:r>
+              <a:t>    """Calculate breach margin against statutory danger mark."""</a:t>
+            </a:r>
+            <a:br/>
+            <a:r>
               <a:t>    data = await get_river_level(station_id)</a:t>
             </a:r>
             <a:br/>
             <a:r>
-              <a:t>    current, danger = data["current"], data["danger"]</a:t>
+              <a:t>    current, danger = data["current_level"], data["danger_mark"]</a:t>
             </a:r>
             <a:br/>
             <a:r>
@@ -8491,143 +9790,6 @@
             <a:br/>
             <a:r>
               <a:t>    }</a:t>
-            </a:r>
-          </a:p>
-        </p:txBody>
-      </p:sp>
-      <p:sp>
-        <p:nvSpPr>
-          <p:cNvPr id="7" name="Rounded Rectangle 6"/>
-          <p:cNvSpPr/>
-          <p:nvPr/>
-        </p:nvSpPr>
-        <p:spPr>
-          <a:xfrm>
-            <a:off x="6217920" y="2011680"/>
-            <a:ext cx="5120640" cy="4297680"/>
-          </a:xfrm>
-          <a:prstGeom prst="roundRect">
-            <a:avLst/>
-          </a:prstGeom>
-          <a:solidFill>
-            <a:srgbClr val="0F1420"/>
-          </a:solidFill>
-          <a:ln>
-            <a:solidFill>
-              <a:srgbClr val="7B61FF"/>
-            </a:solidFill>
-          </a:ln>
-        </p:spPr>
-        <p:style>
-          <a:lnRef idx="1">
-            <a:schemeClr val="accent1"/>
-          </a:lnRef>
-          <a:fillRef idx="3">
-            <a:schemeClr val="accent1"/>
-          </a:fillRef>
-          <a:effectRef idx="2">
-            <a:schemeClr val="accent1"/>
-          </a:effectRef>
-          <a:fontRef idx="minor">
-            <a:schemeClr val="lt1"/>
-          </a:fontRef>
-        </p:style>
-        <p:txBody>
-          <a:bodyPr rtlCol="0" anchor="ctr" wrap="square"/>
-          <a:lstStyle/>
-          <a:p>
-            <a:pPr algn="ctr">
-              <a:defRPr sz="1200" b="1">
-                <a:solidFill>
-                  <a:srgbClr val="7B61FF"/>
-                </a:solidFill>
-              </a:defRPr>
-            </a:pPr>
-            <a:r>
-              <a:t>2. LANGGRAPH ORCHESTRATOR (agent_orchestrator.py)</a:t>
-            </a:r>
-          </a:p>
-          <a:p>
-            <a:pPr>
-              <a:defRPr sz="950">
-                <a:solidFill>
-                  <a:srgbClr val="E8EDF5"/>
-                </a:solidFill>
-                <a:latin typeface="Courier New"/>
-              </a:defRPr>
-            </a:pPr>
-            <a:r>
-              <a:t>class DisasterState(TypedDict):</a:t>
-            </a:r>
-            <a:br/>
-            <a:r>
-              <a:t>    incident_active: bool</a:t>
-            </a:r>
-            <a:br/>
-            <a:r>
-              <a:t>    rainfall_rate_mm_hr: float</a:t>
-            </a:r>
-            <a:br/>
-            <a:r>
-              <a:t>    landslide_risk_score: float</a:t>
-            </a:r>
-            <a:br/>
-            <a:r>
-              <a:t>    recommended_action: str</a:t>
-            </a:r>
-            <a:br/>
-            <a:r>
-              <a:t>    evacuation_routes: List[str]</a:t>
-            </a:r>
-            <a:br/>
-            <a:br/>
-            <a:r>
-              <a:t>def commander_agent(state: DisasterState):</a:t>
-            </a:r>
-            <a:br/>
-            <a:r>
-              <a:t>    if state["landslide_risk_score"] &gt; 0.75:</a:t>
-            </a:r>
-            <a:br/>
-            <a:r>
-              <a:t>        return {</a:t>
-            </a:r>
-            <a:br/>
-            <a:r>
-              <a:t>            "recommended_action": "EVACUATE Sector B-4",</a:t>
-            </a:r>
-            <a:br/>
-            <a:r>
-              <a:t>            "evacuation_routes": ["Route 3 East Bypass"],</a:t>
-            </a:r>
-            <a:br/>
-            <a:r>
-              <a:t>            "incident_active": True</a:t>
-            </a:r>
-            <a:br/>
-            <a:r>
-              <a:t>        }</a:t>
-            </a:r>
-            <a:br/>
-            <a:br/>
-            <a:r>
-              <a:t>workflow = StateGraph(DisasterState)</a:t>
-            </a:r>
-            <a:br/>
-            <a:r>
-              <a:t>workflow.add_node("Weather", weather_agent)</a:t>
-            </a:r>
-            <a:br/>
-            <a:r>
-              <a:t>workflow.add_node("Commander", commander_agent)</a:t>
-            </a:r>
-            <a:br/>
-            <a:r>
-              <a:t>workflow.add_edge("Weather", "Commander")</a:t>
-            </a:r>
-            <a:br/>
-            <a:r>
-              <a:t>app = workflow.compile()</a:t>
             </a:r>
           </a:p>
         </p:txBody>
